--- a/materials/第1讲整合试讲主版本/第1讲_宪法总论_整合试讲主版本.pptx
+++ b/materials/第1讲整合试讲主版本/第1讲_宪法总论_整合试讲主版本.pptx
@@ -1272,7 +1272,7 @@
             <a:r>
               <a:rPr lang="en-US" dirty="0"/>
               <a:t>16｜回看第一学时：“根本”已经有了哪些内容？
-核心/条件性安排：核心；页预算2分钟
+核心/条件性安排：核心；页预算4.5分钟
 1. 逐字讲述
 在题目给定的条件下，宪法修改不能通过，法律和其他议案可以通过。关键不是笼统地说“多数赞成”，而是分清要求哪一种多数。
 2. 逐字讲述
@@ -1281,8 +1281,9 @@
 这三个方面相互联系，但各自都有依据。你若能把其中一项解释给别人，而不只列出名称，今天的概念就已经开始展开。下半堂要处理的疑问是：既然宪法有最高效力，为什么国家生活仍需要大量普通法律？我们把这个问题放到一项具体的赔偿请求中。
 4. 活动，不朗读（0.3分钟）
 学生在材料页边各写一个词，概括自己还没说清的一层关系；收回注意后下课。课间另计。
+本页预算含本学时机动时间2.5分钟，供指读、追问及回看；不增加必讲内容。
 教师备查，不朗读
-本页结束核心第一学时，累计45分钟。若每学时50分钟，此处转附页E1（第32—33页）共5分钟，再进入课间。
+本页保留2分钟收束，另登记第一学时2分30秒机动预算，供前面指读、追问与回看使用，不是新增必讲正文。按45分钟下课。若每学时50分钟，此处转附页E1（第32—33页）共5分钟，再进入课间。
 本页出处
 任务2讲评；第一学时收束
 来源及定位
@@ -1598,7 +1599,7 @@
 4. 逐字讲述
 这时可以看出普通法律新增的第一层信息：它在宪法的权利要求下，区分并规定具体适用情形。宪法第41条使我们知道存在这样的根本权利依据；第3条则使我们能够对一项给定事实继续判断。
 5. 逐字讲述
-把条件看清不是在回避保障权利。条件本来就是具体制度的一部分。我们要做的是把事实和规则连接起来，既不把每一个不满都直接宣布为同一种赔偿，也不在事实已经给足时一律推说无法判断。接着还有第二层：即使属于赔偿情形，由谁依法回应？
+把条件看清不是在回避保障权利。条件本来就是具体制度的一部分。我们要做的是把事实和规则连接起来，既不把每一个不满都直接宣布为同一种赔偿，也不在事实已经给足时一律推说无法判断。接着还有第二层：即使属于赔偿情形，由谁依法承担赔偿义务？
 教师备查，不朗读
 本页正文较长，允许22磅引文；不得截去行政职权条件。2010年已修改第2条表述，不能把全法一律说成违法归责。
 本页出处
@@ -1804,7 +1805,7 @@
           <a:p>
             <a:r>
               <a:rPr lang="en-US" dirty="0"/>
-              <a:t>20｜法律还回答：谁承担回应的义务？
+              <a:t>20｜法律还回答：谁承担赔偿义务？
 核心/条件性安排：核心；页预算3分钟
 1. 逐字讲述
 再看第7条第一款。相应行政机关成为赔偿义务机关。这个规定并不只是让我们多记一个机关名称，它给权利请求确定了制度上的承担者。
@@ -1815,7 +1816,7 @@
 4. 逐字讲述
 这也改变了看问题的位置。我们不只问工作人员有没有善意，还要问相应机关依法应当承担什么职责。即使更换了具体承办人，机关也不能因此摆脱法定义务。友善可以使办理更体贴，法定职责则使办理成为应当承担的事。
 5. 逐字讲述
-这句话要连着前面的条件理解：应当依法回应，不等于每个请求人主张的全部事项都当然成立。现在我们已经有了情形和义务机关两项信息，给定事实以后，就能作一个有根据的有限判断。
+这句话要连着前面的条件理解：相应机关依法承担赔偿义务，不等于每个请求人主张的全部事项都当然成立。现在我们已经有了情形和义务机关两项信息，给定事实以后，就能作一个有根据的有限判断。
 教师备查，不朗读
 凝练段落为课程原创，表达选择参研究/02。机关对外赔偿与第16条追偿、处分等不同，不据此说工作人员免责。
 本页出处
@@ -2223,28 +2224,25 @@
           <a:p>
             <a:r>
               <a:rPr lang="en-US" dirty="0"/>
-              <a:t>24｜最高效力，与制度是否写全，是两个问题
-核心/条件性安排：核心；页预算3.5分钟
+              <a:t>24｜具体办法都有了，宪法还约束什么？
+核心/条件性安排：核心；页预算1.5分钟
 1. 逐字讲述
-刚才的例子容易引出一个真实的疑问：处理请求时我们一直在读国家赔偿法，那么宪法是不是只剩一段背景？既然还有很多细节要由法律规定，宪法的效力是不是也要等法律来决定？
-2. 逐字讲述
-要回答它，先分清两个问题。最高效力回答普通法律能不能排除、背离宪法要求；具体制度回答这些要求在某个领域中怎样展开。规范已经有约束力，与全部办理细节已经写完，是两个不同判断。
+刚才一直在用国家赔偿法判断情形和义务机关，宪法是否只剩背景？请先找出材料B第5条、材料D第41条及赔偿法第3、7条。
+2. 活动，不朗读（0.5分钟）
+重新定位并回读上述条文，教师停讲，不先给完整解释。
 3. 逐字讲述
-第41条已经确认相应赔偿权，这项规定对国家机关具有法律约束力。国家赔偿法进一步规定哪些情形、哪个机关、怎样提出请求。我们需要后者，是因为办理需要具体制度，不是因为前者原本毫无效力。
-4. 逐字讲述
-再向另一面想。宪法已经确认权利，也不等于个案所有条件和结论已经齐备。你仍然要查是不是行使相应职权、是否发生法定侵害和损害。最高的效力没有替代这些事实判断。
-5. 逐字讲述
-所以，宪法与普通法律在这里既有约束关系，也有制度展开的关系。法律可以形成不同的具体安排，却须尊重根本权利要求。我们不能说每个制度细节早就逐字藏在第41条里；也不能把依照法律规定理解成法律想保障才保障。
-6. 逐字讲述
-把这个区别说清楚，比背一句“宪法与法律相互联系”更进一步。现在请大家自己解释一次：法律已经规定了那么多具体事项，宪法在这里究竟还约束什么？
+这些条文已经读过。下一页请把它们连成理由，说明具体规定增添了什么，宪法又约束什么。
 教师备查，不朗读
-不就直接裁判依据作一概结论；立法形成空间存在学理争论见来源记录。屏幕与讲述不采用所有权利都等待配套法的说法。
+本页只提出疑问、定位材料，不预讲第26页结论。完整理由合并到第26页核心讲评与教师备查；这次调整只服务于当前关系题。
 本页出处
-宪法第5、41条；教材印刷219、319、324—325页
+宪法第5、41条；国家赔偿法第3、7条
 来源及定位
 中华人民共和国宪法（2018年修正）
 https://www.mofcom.gov.cn/xxgcxjpxsdzgtsshzysx/zywj/art/2018/art_45c1e16fe351469090d53e63178268c8.html
-第5、41条</a:t>
+第5、41条
+国家赔偿法
+https://fgk.chinatax.gov.cn/zcfgk/c100009/c5211800/content.html
+第3、7条</a:t>
             </a:r>
             <a:endParaRPr lang="en-US" dirty="0"/>
           </a:p>
@@ -2434,21 +2432,21 @@
             <a:r>
               <a:rPr lang="en-US" dirty="0"/>
               <a:t>26｜任务4讲评：把已有约束与新增安排同时说清
-核心/条件性安排：核心；页预算4分钟
+核心/条件性安排：核心；页预算3.5分钟
 1. 活动，不朗读（1分钟）
-请两名学生各给一个理由或一个制度例子，总计约1分钟。
+请两名学生各给一个理由或一个制度例子，总计约1分钟；先听实际回答，再补缺口。
 2. 逐字讲述
-一种完整回答可以这样说：第41条已经确认相应侵权损失者依照法律规定取得赔偿的权利；第5条使普通法律受到宪法约束，不能自行排除这一要求。第7条又把义务落实到相应行政机关，因此提出请求与办理请求都有了更具体的制度依据。
+把两条宪法规定合起来看：第41条已经确认相应侵权损失者依照法律规定取得赔偿的权利，第5条要求普通法律不得抵触宪法。普通法律因此不能把是否尊重这一权利当成可任意选择的事。
 3. 逐字讲述
-也可以选第3条作例子，说明哪些行政侵权情形纳入本法赔偿；或者用第9条说明提出途径同样需要安排。我们看重的是，你是否把已有的根本要求与新增的具体信息接起来，而不是用了几个学理词。
+但第41条没有列尽办理需要的情形和主体。国家赔偿法第7条确定赔偿义务机关，使请求人与办理者知道由谁承担；也可以用第3条的适用情形作说明。需要这些具体规定，与宪法已经有约束力，可以同时成立。
 4. 逐字讲述
-如果只写“宪法不能任意违反”，前半层成立，后半层还缺法律增加了什么。如果只写“第7条规定赔偿义务机关”，例子找对了，还须说明该安排受到什么约束。把两句话并排放着并不难，难的是说明它们为什么可以同时成立。
-5. 逐字讲述
-我们可以把关系收成一句话：法律继续回答怎样保障，仍须尊重宪法已经确认的保障要求。这不是说任何赔偿请求都应全额支持，而是说形成具体规则与取消根本约束，不能混为一件事。
-6. 逐字讲述
-这道题把条文背后的关系接了起来。接下来用两个更短的问题，看这个关系能否离开熟悉的起首句而成立。
+法律继续回答怎样保障，仍须尊重宪法已经确认的保障要求。这也不意味着每一项赔偿请求都当然成立，具体条件仍要依法判断。接下来换两个短问题继续检验这个关系。
 教师备查，不朗读
-收束为课程原创表达，与Pro示例相关但作范围收紧。没有将一种方案合理等同全法合宪；不从立即答题声称独立迁移已经成功。
+按实际回答选用反馈：若学生已准确解释两层，只回应“你说明了第41条确认的权利和第5条的约束，也举出了普通法律新增的安排，两层理由已接起来”，再补其未提到的条件；不把核心讲评与短反馈全部叠加朗读。
+展开备查，仅在仍混淆时替换或补充核心说明：最高效力回答普通法律能不能排除、背离宪法要求，具体制度回答这些要求怎样在一个领域展开。规范已经有约束力，与全部办理细节已经写完，是两个不同判断。第41条已确认相应赔偿权，国家赔偿法继续规定情形、主体和提出途径；需要后者不等于前者此前无效。
+展开备查：宪法确认权利并不意味着个案条件已齐备。仍须核行使职权、法定侵害和损害等事实。每个制度细节并非逐字藏在第41条里，“依照法律规定”也不能解释为立法者想保障才保障。不能只因一种方案看似合理就宣布全法合宪。
+可据真实回答追问：只说最高效力，追问普通法律增加哪项信息；只说第7条义务机关，追问这一安排受什么约束。不要把预备漏项说成本班已经出现的错误。展开超过本页时调用第二学时机动预算，不挤第25页3分钟作答交流。
+不就直接裁判依据作一概结论；立法形成空间的学理争论见来源记录。即时作答不证明独立迁移已成功。
 本页出处
 任务4参考说明｜宪法第5、41条；国家赔偿法第3、7、9条
 来源及定位
@@ -2861,17 +2859,15 @@
             <a:r>
               <a:rPr lang="en-US" dirty="0"/>
               <a:t>03｜先读国家要做什么，再读怎样组织国家
-核心/条件性安排：核心；页预算4分钟
+核心/条件性安排：核心；页预算3.25分钟
 1. 逐字讲述
-请翻到材料A现行宪法部分。序言明确说，国家的根本任务是沿着中国特色社会主义道路，集中力量进行社会主义现代化建设。这里回答国家发展的根本方向。序言末段又说明，宪法规定国家的根本制度和根本任务，具有最高法律效力。先把这两处各自回答的问题分开。
+请翻到材料A。序言规定国家的根本任务是沿着中国特色社会主义道路，集中力量进行社会主义现代化建设；末段说明宪法规定根本制度和任务，具有最高法律效力。先看这两处各自回答什么。
 2. 活动，不朗读（1.25分钟）
 静默阅读材料A现行序言两段，标出“根本任务”和“根本法地位”。
 3. 逐字讲述
-国家要实现共同任务，就要组织资源、形成决定、付诸行动。这些活动由谁来进行，用什么权力来进行，对人的权利承担什么义务，不能留给每个机关临时回答。因此，根本任务与国家机构、基本权利并不是两组不相干的内容：有共同目标，也需要实现目标的制度和规则。
+实现共同任务需要组织资源、形成决定、付诸行动。由谁行动、依据什么权力、对人的权利承担什么义务，都需要制度和规范。因此，根本任务与国家机构、基本权利联系在一起。
 4. 逐字讲述
-看目录时也可以沿着这个问题走。序言和总纲呈现根本任务、国家性质及基本制度；第二章规定公民的基本权利和义务；第三章配置国家机构；第四章规定国旗、国歌、国徽、首都。这张目录不是本课要求机械记住的清单，它把国家的方向、权力组织和公民地位放进同一个法律文本。
-5. 逐字讲述
-对未来从事公安工作的同学而言，维护社会秩序是熟悉的任务。但宪法学习要多追问一步：完成任务的机关从何获得职权，又必须遵守什么？不能因为目标重要，就略去权力如何行使、权利怎样保障。下面看总纲的两个起点。
+目录把这种联系展开：序言和总纲呈现根本任务、国家性质及基本制度，第二章规定公民基本权利义务，第三章配置国家机构，第四章规定国旗、国歌、国徽、首都。下面看总纲的两个起点。
 本页出处
 现行宪法序言（节录）与目录
 来源及定位
@@ -3076,7 +3072,7 @@
             <a:r>
               <a:rPr lang="en-US" dirty="0"/>
               <a:t>31｜任务7：把国家的制度与个人的权利接起来
-核心/条件性安排：核心；页预算3.5分钟
+核心/条件性安排：核心；页预算6分钟
 1. 逐字讲述
 最后请写两三句话，把宪法、普通法律、机关履职和个人权利放在同一个解释里。至少选择一项今天实际读到的制度作支撑，不需要复制整张关系图。
 2. 活动，不朗读（1分钟）
@@ -3087,8 +3083,9 @@
 回到1954年的照片，我们关心的不只是一次会议怎样举行，而是国家生活为什么需要持续的共同规则；回到甲的请求，我们关心的也不只是找到某个条号，而是根本要求怎样进入具体制度。宪法的根本地位，既体现在它怎样安排国家，也体现在它要求国家怎样对待人。
 5. 逐字讲述
 第一讲到这里。下一讲转向宪法的发展，继续解释这些根本规则怎样形成和调整。今天先把一件事说清：国家权力需要组织起来，也必须在规范和权利要求之中行使。
+本页预算含本学时机动时间2.5分钟，供指读、追问及回看；不增加必讲内容。
 教师备查，不朗读
-90分钟核心到本页结束。后四页为100分钟条件性扩展，按指定位置插入，不在90分钟课后继续全放。没有真人试读，不预写效果评价。
+本页保留3分30秒收束，另登记第二学时2分30秒机动预算，供条文指读、实际回答追问及第26页必要展开使用，不再增加必讲内容。90分钟核心到本页结束。后四页为100分钟条件性扩展，按指定位置插入，不在90分钟课后继续全放。没有真人试读，不预写效果评价。
 本页出处
 任务7及第一讲收束；下一讲：宪法的发展
 来源及定位
@@ -3702,15 +3699,13 @@
             <a:r>
               <a:rPr lang="en-US" dirty="0"/>
               <a:t>04｜国家的根本安排，先回答哪些问题？
-核心/条件性安排：核心；页预算3分钟
+核心/条件性安排：核心；页预算2.25分钟
 1. 逐字讲述
-第一条规定我国是工人阶级领导的、以工农联盟为基础的人民民主专政的社会主义国家；社会主义制度是根本制度，中国共产党领导是中国特色社会主义最本质的特征。第二条随即明确，一切权力属于人民。这里既有国家性质和根本制度，也有国家权力归属。
+第一条规定我国是工人阶级领导的、以工农联盟为基础的人民民主专政的社会主义国家；社会主义制度是根本制度，中国共产党领导是中国特色社会主义最本质的特征。第二条明确，一切权力属于人民。这里规定国家性质、根本制度和权力归属。
 2. 逐字讲述
-为什么这些内容具有根本性？因为无论以后讨论经济制度、教育事务、公安履职还是赔偿请求，都已经置身于一定的国家制度和权力秩序之中。具体法律不能每进入一个领域，就重新决定国家性质、权力属于谁、公民是否有基本权利。宪法先确立这些共同前提，其他法律和国家活动在其中展开。
+这些内容为具体法律和国家活动确立共同前提。讨论教育事务、公安履职或者赔偿请求时，不能每进入一个领域，就重新决定国家性质、权力属于谁、公民是否有基本权利。
 3. 逐字讲述
-这不意味着普通法律处理的小事不重要。对一个人来说，劳动报酬、一次拘留、一笔赔偿都可能影响生活。根本与具体，说的是它们在国家制度和法律体系中承担什么工作，并不是给个人痛苦排大小。宪法也不是所有部门法细节的总和。它没有把每个合同条款、每种犯罪构成和每项赔偿标准全部写进来。
-4. 逐字讲述
-所以，“根本”要从关系中理解：它确立其他国家活动须共同遵循的基本安排。带着这个认识，再看宪法的概念，定义中的每个部分就有了实际内容。
+普通法律处理劳动报酬、拘留、赔偿等具体事务，同样关系到人的生活。根本与具体区别的是规范承担的工作，宪法也没有把每个合同条款、犯罪构成和赔偿标准全部写完。现在把刚才的内容连成一个概念。
 教师备查，不朗读
 屏幕第1条为明确的教学提要，不加原文引号；完整条文在材料B。第3、4讲分别深化国体政体和基本制度。
 本页出处
@@ -3807,13 +3802,11 @@
             <a:r>
               <a:rPr lang="en-US" dirty="0"/>
               <a:t>05｜现在，把“宪法”说完整
-核心/条件性安排：核心；页预算2分钟
+核心/条件性安排：核心；页预算1.5分钟
 1. 逐字讲述
-我们可以作这样的概括：宪法是规定国家根本制度和根本任务、公民基本权利和义务、国家权力组织运行等根本问题，具有最高法律效力的国家根本法。这是本课根据教材和条文作的概括，便于把刚才看到的内容连起来。
+本课根据教材和条文这样概括：宪法是规定国家根本制度和根本任务、公民基本权利和义务、国家权力组织运行等根本问题，具有最高法律效力的国家根本法。
 2. 逐字讲述
-概念不只帮助我们认出一本书，还帮助我们判断正在讨论哪一层问题。问权力属于谁，是在问根本安排；问普通法律能否背离宪法，是在问效力关系；问怎样修改宪法，是在问根本规则的程序保障。三个方面相互联系，但不能互相替代。
-3. 逐字讲述
-尤其不能从“这个问题很重要”一步跳到“这条规定效力最高”。很多普通法律保护的利益同样重要。我们还要说明宪法在国家权力和法律体系中的地位，并实际看它对其他规范提出的要求。这正是下一步要解释的最高法律效力。
+用这个概念区分三个相连的问题：权力属于谁，涉及根本安排；普通法律能否背离宪法，涉及效力关系；怎样修改宪法，涉及程序保障。先看最高效力究竟提出什么要求。
 教师备查，不朗读
 这里不是某一条宪法的逐字定义。完整解释与修宪对照分别在后页，不恢复词源、分类与渊源目录。
 本页出处
@@ -3910,19 +3903,17 @@
             <a:r>
               <a:rPr lang="en-US" dirty="0"/>
               <a:t>06｜制定法律的人和机关，也处在宪法之内
-核心/条件性安排：核心；页预算4分钟
+核心/条件性安排：核心；页预算3.5分钟
 1. 逐字讲述
-我们刚才说，宪法规定国家权力归属和机关安排。现在把立法放进这个框架：制定法律本身也是行使国家权力。立法机关的地位和权限并不在宪法之外，因此它形成的具体规则也不能取得排除宪法约束的权力。
+制定法律本身也是行使国家权力。立法机关的地位和权限处在宪法规定的框架内，它形成的具体规则也不能排除宪法约束。
 2. 活动，不朗读（0.5分钟）
 读第5条第3款，圈出被约束的规范种类和“不得抵触”。
 3. 逐字讲述
-第5条把这个关系说得很明确：一切法律、行政法规和地方性法规，都不得同宪法相抵触。最高效力因此不只是一句高低排名，它要求其他规范在制定和实施中符合宪法。规则写得更详细，并不会使它的位置反而高于宪法。
+第5条明确规定：一切法律、行政法规和地方性法规，都不得同宪法相抵触。这使最高效力成为其他规范在制定和实施中须遵守的要求。
 4. 逐字讲述
-我们可以作一个简短的设想。如果每个领域的法律都能说“在我这里，宪法要求可以不算”，共同的国家制度和基本权利就会被分领域逐项排除。最终剩下的只是宪法的名称，失去的是它作为共同规范的作用。普通法律可以在一个领域作具体选择，但具体选择要在共同约束下形成。
+设想每个领域的法律都能自行排除宪法要求，共同的国家制度和基本权利就会被逐项架空。因此，普通法律可以形成具体安排，但必须遵守共同约束。将来适用行政法律和职权规定，也要放在这个关系中理解。
 5. 逐字讲述
-这也解释为什么学习宪法并非只关心最高国家机关。你将来读行政法律、适用具体职权规定，仍然是在这个规范关系之中。后半堂我们会用国家赔偿法观察：受约束的普通法律又怎样作出具体安排。
-6. 逐字讲述
-先留下这一层认识：立法不是逃出宪法去写规则，而是在宪法规定的权力秩序中形成规则。接下来再往前追问，国家权力既然属于人民，它怎样被组织成日常能够运行的国家机构？
+后半堂我们用国家赔偿法观察具体安排。先继续追问：国家权力属于人民，怎样被组织成日常能够运行的国家机构？
 教师备查，不朗读
 不由本页推出任何个人可自行宣布法律普遍失效，纠正机制留第8讲；规范结构说明不冒充完整的宪法权威历史解释。
 本页出处
@@ -4025,7 +4016,7 @@
 2. 活动，不朗读（1.25分钟）
 阅读材料B第2条及第3条前三款，在“产生”“负责”“监督”下划线。
 3. 逐字讲述
-屏幕上的连线要连着这些动词读。产生关系说明机关怎样取得制度上的位置；负责和监督关系说明这个位置同时带来责任。只画“人民—人大—其他机关”的名单，还不能完整说明制度，因为名单没有告诉我们权力怎样受到持续约束。
+图中向下的箭头只表示产生关系：人大由民主选举产生，行政、监察、审判、检察机关由人大产生。这里概括组织关系，不表示各级人大都由全民直接选举。负责和监督另看右侧文字：人大对人民负责、受人民监督；这些国家机关对人大负责、受人大监督。产生说明制度位置，负责和监督说明行使权力还须承担责任。
 4. 逐字讲述
 第2条也没有把人民管理国家和社会事务的方式缩成参加一次选举。它还规定人民依照法律，通过各种途径和形式，管理国家事务、经济和文化事业以及社会事务。本课先认识整体关系，具体制度以后逐一展开。
 5. 逐字讲述
@@ -4790,7 +4781,7 @@
       </p:sp>
       <p:pic>
         <p:nvPicPr>
-          <p:cNvPr id="6" name="Image 0" descr="C:\Users\tsunami\Documents\ChatGPT\教学工作\constitution-law-8-lessons\materials\第1讲叙事授课试做\来源\1954\1954-09-15_代表进入怀仁堂_刘东鳌_新华社.jpg">    </p:cNvPr>
+          <p:cNvPr id="6" name="Image 0" descr="C:\Users\tsunami\Documents\Codex\2026-09-30\task\constitution-law-8-lessons\materials\第1讲叙事授课试做\来源\1954\1954-09-15_代表进入怀仁堂_刘东鳌_新华社.jpg">    </p:cNvPr>
           <p:cNvPicPr>
             <a:picLocks noChangeAspect="1"/>
           </p:cNvPicPr>
@@ -10438,7 +10429,7 @@
                 <a:ea typeface="Microsoft YaHei" pitchFamily="34" charset="-122"/>
                 <a:cs typeface="Microsoft YaHei" pitchFamily="34" charset="-120"/>
               </a:rPr>
-              <a:t>法律还回答：谁承担回应的义务？</a:t>
+              <a:t>法律还回答：谁承担赔偿义务？</a:t>
             </a:r>
             <a:endParaRPr lang="zh-CN" sz="3600" dirty="0"/>
           </a:p>
@@ -12202,7 +12193,7 @@
                 <a:ea typeface="Microsoft YaHei" pitchFamily="34" charset="-122"/>
                 <a:cs typeface="Microsoft YaHei" pitchFamily="34" charset="-120"/>
               </a:rPr>
-              <a:t>最高效力，与制度是否写全，是两个问题</a:t>
+              <a:t>具体办法都有了，宪法还约束什么？</a:t>
             </a:r>
             <a:endParaRPr lang="zh-CN" sz="3600" dirty="0"/>
           </a:p>
@@ -12210,30 +12201,45 @@
       </p:sp>
       <p:sp>
         <p:nvSpPr>
-          <p:cNvPr id="4" name="Shape 2"/>
-          <p:cNvSpPr/>
-          <p:nvPr/>
-        </p:nvSpPr>
-        <p:spPr>
-          <a:xfrm>
-            <a:off x="713232" y="1901952"/>
-            <a:ext cx="5175504" cy="3657600"/>
-          </a:xfrm>
-          <a:prstGeom prst="rect">
-            <a:avLst/>
-          </a:prstGeom>
-          <a:solidFill>
-            <a:srgbClr val="FFFFFF"/>
-          </a:solidFill>
-          <a:ln w="12700">
-            <a:solidFill>
-              <a:srgbClr val="FFFFFF">
-                <a:alpha val="0"/>
-              </a:srgbClr>
-            </a:solidFill>
-            <a:prstDash val="solid"/>
-          </a:ln>
-        </p:spPr>
+          <p:cNvPr id="4" name="Text 2"/>
+          <p:cNvSpPr/>
+          <p:nvPr/>
+        </p:nvSpPr>
+        <p:spPr>
+          <a:xfrm>
+            <a:off x="795528" y="1920240"/>
+            <a:ext cx="10533888" cy="457200"/>
+          </a:xfrm>
+          <a:prstGeom prst="rect">
+            <a:avLst/>
+          </a:prstGeom>
+          <a:noFill/>
+          <a:ln/>
+        </p:spPr>
+        <p:txBody>
+          <a:bodyPr wrap="none" lIns="0" tIns="0" rIns="0" bIns="0" rtlCol="0" anchor="t"/>
+          <a:lstStyle/>
+          <a:p>
+            <a:pPr algn="l" indent="0" marL="0">
+              <a:lnSpc>
+                <a:spcPct val="105000"/>
+              </a:lnSpc>
+              <a:buNone/>
+            </a:pPr>
+            <a:r>
+              <a:rPr lang="zh-CN" altLang="en-US" sz="2400" b="1" dirty="0">
+                <a:solidFill>
+                  <a:srgbClr val="9B3D32"/>
+                </a:solidFill>
+                <a:latin typeface="Microsoft YaHei" pitchFamily="34" charset="0"/>
+                <a:ea typeface="Microsoft YaHei" pitchFamily="34" charset="-122"/>
+                <a:cs typeface="Microsoft YaHei" pitchFamily="34" charset="-120"/>
+              </a:rPr>
+              <a:t>从刚才的办理判断继续追问</a:t>
+            </a:r>
+            <a:endParaRPr lang="zh-CN" sz="2400" dirty="0"/>
+          </a:p>
+        </p:txBody>
       </p:sp>
       <p:sp>
         <p:nvSpPr>
@@ -12243,8 +12249,50 @@
         </p:nvSpPr>
         <p:spPr>
           <a:xfrm>
-            <a:off x="914400" y="2103120"/>
-            <a:ext cx="4773168" cy="548640"/>
+            <a:off x="795528" y="2450592"/>
+            <a:ext cx="10533888" cy="1165860"/>
+          </a:xfrm>
+          <a:prstGeom prst="rect">
+            <a:avLst/>
+          </a:prstGeom>
+          <a:noFill/>
+          <a:ln/>
+        </p:spPr>
+        <p:txBody>
+          <a:bodyPr wrap="none" lIns="0" tIns="0" rIns="0" bIns="0" rtlCol="0" anchor="t"/>
+          <a:lstStyle/>
+          <a:p>
+            <a:pPr algn="l" indent="0" marL="0">
+              <a:lnSpc>
+                <a:spcPct val="105000"/>
+              </a:lnSpc>
+              <a:buNone/>
+            </a:pPr>
+            <a:r>
+              <a:rPr lang="zh-CN" altLang="en-US" sz="2600" dirty="0">
+                <a:solidFill>
+                  <a:srgbClr val="2B302F"/>
+                </a:solidFill>
+                <a:latin typeface="Microsoft YaHei" pitchFamily="34" charset="0"/>
+                <a:ea typeface="Microsoft YaHei" pitchFamily="34" charset="-122"/>
+                <a:cs typeface="Microsoft YaHei" pitchFamily="34" charset="-120"/>
+              </a:rPr>
+              <a:t>一直在用国家赔偿法，宪法是否只剩背景？</a:t>
+            </a:r>
+            <a:endParaRPr lang="zh-CN" sz="2600" dirty="0"/>
+          </a:p>
+        </p:txBody>
+      </p:sp>
+      <p:sp>
+        <p:nvSpPr>
+          <p:cNvPr id="6" name="Text 4"/>
+          <p:cNvSpPr/>
+          <p:nvPr/>
+        </p:nvSpPr>
+        <p:spPr>
+          <a:xfrm>
+            <a:off x="795528" y="3854196"/>
+            <a:ext cx="10533888" cy="457200"/>
           </a:xfrm>
           <a:prstGeom prst="rect">
             <a:avLst/>
@@ -12271,7 +12319,7 @@
                 <a:ea typeface="Microsoft YaHei" pitchFamily="34" charset="-122"/>
                 <a:cs typeface="Microsoft YaHei" pitchFamily="34" charset="-120"/>
               </a:rPr>
-              <a:t>最高效力问什么</a:t>
+              <a:t>先找到材料，不急于听结论</a:t>
             </a:r>
             <a:endParaRPr lang="zh-CN" sz="2400" dirty="0"/>
           </a:p>
@@ -12279,33 +12327,33 @@
       </p:sp>
       <p:sp>
         <p:nvSpPr>
-          <p:cNvPr id="6" name="Text 4"/>
-          <p:cNvSpPr/>
-          <p:nvPr/>
-        </p:nvSpPr>
-        <p:spPr>
-          <a:xfrm>
-            <a:off x="914400" y="2798064"/>
-            <a:ext cx="4773168" cy="2606040"/>
-          </a:xfrm>
-          <a:prstGeom prst="rect">
-            <a:avLst/>
-          </a:prstGeom>
-          <a:noFill/>
-          <a:ln/>
-        </p:spPr>
-        <p:txBody>
-          <a:bodyPr wrap="none" lIns="0" tIns="0" rIns="0" bIns="0" rtlCol="0" anchor="t"/>
-          <a:lstStyle/>
-          <a:p>
-            <a:pPr algn="l" indent="0" marL="0">
-              <a:lnSpc>
-                <a:spcPct val="105000"/>
-              </a:lnSpc>
-              <a:buNone/>
-            </a:pPr>
-            <a:r>
-              <a:rPr lang="zh-CN" altLang="en-US" sz="2400" dirty="0">
+          <p:cNvPr id="7" name="Text 5"/>
+          <p:cNvSpPr/>
+          <p:nvPr/>
+        </p:nvSpPr>
+        <p:spPr>
+          <a:xfrm>
+            <a:off x="795528" y="4384548"/>
+            <a:ext cx="10533888" cy="1165860"/>
+          </a:xfrm>
+          <a:prstGeom prst="rect">
+            <a:avLst/>
+          </a:prstGeom>
+          <a:noFill/>
+          <a:ln/>
+        </p:spPr>
+        <p:txBody>
+          <a:bodyPr wrap="none" lIns="0" tIns="0" rIns="0" bIns="0" rtlCol="0" anchor="t"/>
+          <a:lstStyle/>
+          <a:p>
+            <a:pPr algn="l" indent="0" marL="0">
+              <a:lnSpc>
+                <a:spcPct val="105000"/>
+              </a:lnSpc>
+              <a:buNone/>
+            </a:pPr>
+            <a:r>
+              <a:rPr lang="zh-CN" altLang="en-US" sz="2600" dirty="0">
                 <a:solidFill>
                   <a:srgbClr val="2B302F"/>
                 </a:solidFill>
@@ -12313,166 +12361,15 @@
                 <a:ea typeface="Microsoft YaHei" pitchFamily="34" charset="-122"/>
                 <a:cs typeface="Microsoft YaHei" pitchFamily="34" charset="-120"/>
               </a:rPr>
-              <a:t>普通法律能否排除、</a:t>
-            </a:r>
-            <a:endParaRPr lang="zh-CN" sz="2400" dirty="0"/>
-          </a:p>
-          <a:p>
-            <a:pPr algn="l" indent="0" marL="0">
-              <a:lnSpc>
-                <a:spcPct val="105000"/>
-              </a:lnSpc>
-              <a:buNone/>
-            </a:pPr>
-            <a:r>
-              <a:rPr lang="zh-CN" altLang="en-US" sz="2400" dirty="0">
-                <a:solidFill>
-                  <a:srgbClr val="2B302F"/>
-                </a:solidFill>
-                <a:latin typeface="Microsoft YaHei" pitchFamily="34" charset="0"/>
-                <a:ea typeface="Microsoft YaHei" pitchFamily="34" charset="-122"/>
-                <a:cs typeface="Microsoft YaHei" pitchFamily="34" charset="-120"/>
-              </a:rPr>
-              <a:t>背离宪法要求？</a:t>
-            </a:r>
-            <a:endParaRPr lang="zh-CN" sz="2400" dirty="0"/>
-          </a:p>
-        </p:txBody>
-      </p:sp>
-      <p:sp>
-        <p:nvSpPr>
-          <p:cNvPr id="7" name="Shape 5"/>
-          <p:cNvSpPr/>
-          <p:nvPr/>
-        </p:nvSpPr>
-        <p:spPr>
-          <a:xfrm>
-            <a:off x="6327648" y="1901952"/>
-            <a:ext cx="5175504" cy="3657600"/>
-          </a:xfrm>
-          <a:prstGeom prst="rect">
-            <a:avLst/>
-          </a:prstGeom>
-          <a:solidFill>
-            <a:srgbClr val="E8ECE6"/>
-          </a:solidFill>
-          <a:ln w="12700">
-            <a:solidFill>
-              <a:srgbClr val="E8ECE6">
-                <a:alpha val="0"/>
-              </a:srgbClr>
-            </a:solidFill>
-            <a:prstDash val="solid"/>
-          </a:ln>
-        </p:spPr>
+              <a:t>材料B：第5条；材料D：第41条第3款、国家赔偿法第3、7条。</a:t>
+            </a:r>
+            <a:endParaRPr lang="zh-CN" sz="2600" dirty="0"/>
+          </a:p>
+        </p:txBody>
       </p:sp>
       <p:sp>
         <p:nvSpPr>
           <p:cNvPr id="8" name="Text 6"/>
-          <p:cNvSpPr/>
-          <p:nvPr/>
-        </p:nvSpPr>
-        <p:spPr>
-          <a:xfrm>
-            <a:off x="6528816" y="2103120"/>
-            <a:ext cx="4773168" cy="548640"/>
-          </a:xfrm>
-          <a:prstGeom prst="rect">
-            <a:avLst/>
-          </a:prstGeom>
-          <a:noFill/>
-          <a:ln/>
-        </p:spPr>
-        <p:txBody>
-          <a:bodyPr wrap="none" lIns="0" tIns="0" rIns="0" bIns="0" rtlCol="0" anchor="t"/>
-          <a:lstStyle/>
-          <a:p>
-            <a:pPr algn="l" indent="0" marL="0">
-              <a:lnSpc>
-                <a:spcPct val="105000"/>
-              </a:lnSpc>
-              <a:buNone/>
-            </a:pPr>
-            <a:r>
-              <a:rPr lang="zh-CN" altLang="en-US" sz="2400" b="1" dirty="0">
-                <a:solidFill>
-                  <a:srgbClr val="9B3D32"/>
-                </a:solidFill>
-                <a:latin typeface="Microsoft YaHei" pitchFamily="34" charset="0"/>
-                <a:ea typeface="Microsoft YaHei" pitchFamily="34" charset="-122"/>
-                <a:cs typeface="Microsoft YaHei" pitchFamily="34" charset="-120"/>
-              </a:rPr>
-              <a:t>具体制度问什么</a:t>
-            </a:r>
-            <a:endParaRPr lang="zh-CN" sz="2400" dirty="0"/>
-          </a:p>
-        </p:txBody>
-      </p:sp>
-      <p:sp>
-        <p:nvSpPr>
-          <p:cNvPr id="9" name="Text 7"/>
-          <p:cNvSpPr/>
-          <p:nvPr/>
-        </p:nvSpPr>
-        <p:spPr>
-          <a:xfrm>
-            <a:off x="6528816" y="2798064"/>
-            <a:ext cx="4773168" cy="2606040"/>
-          </a:xfrm>
-          <a:prstGeom prst="rect">
-            <a:avLst/>
-          </a:prstGeom>
-          <a:noFill/>
-          <a:ln/>
-        </p:spPr>
-        <p:txBody>
-          <a:bodyPr wrap="none" lIns="0" tIns="0" rIns="0" bIns="0" rtlCol="0" anchor="t"/>
-          <a:lstStyle/>
-          <a:p>
-            <a:pPr algn="l" indent="0" marL="0">
-              <a:lnSpc>
-                <a:spcPct val="105000"/>
-              </a:lnSpc>
-              <a:buNone/>
-            </a:pPr>
-            <a:r>
-              <a:rPr lang="zh-CN" altLang="en-US" sz="2400" dirty="0">
-                <a:solidFill>
-                  <a:srgbClr val="2B302F"/>
-                </a:solidFill>
-                <a:latin typeface="Microsoft YaHei" pitchFamily="34" charset="0"/>
-                <a:ea typeface="Microsoft YaHei" pitchFamily="34" charset="-122"/>
-                <a:cs typeface="Microsoft YaHei" pitchFamily="34" charset="-120"/>
-              </a:rPr>
-              <a:t>相应要求怎样在这个领域形成可</a:t>
-            </a:r>
-            <a:endParaRPr lang="zh-CN" sz="2400" dirty="0"/>
-          </a:p>
-          <a:p>
-            <a:pPr algn="l" indent="0" marL="0">
-              <a:lnSpc>
-                <a:spcPct val="105000"/>
-              </a:lnSpc>
-              <a:buNone/>
-            </a:pPr>
-            <a:r>
-              <a:rPr lang="zh-CN" altLang="en-US" sz="2400" dirty="0">
-                <a:solidFill>
-                  <a:srgbClr val="2B302F"/>
-                </a:solidFill>
-                <a:latin typeface="Microsoft YaHei" pitchFamily="34" charset="0"/>
-                <a:ea typeface="Microsoft YaHei" pitchFamily="34" charset="-122"/>
-                <a:cs typeface="Microsoft YaHei" pitchFamily="34" charset="-120"/>
-              </a:rPr>
-              <a:t>办理的规则？</a:t>
-            </a:r>
-            <a:endParaRPr lang="zh-CN" sz="2400" dirty="0"/>
-          </a:p>
-        </p:txBody>
-      </p:sp>
-      <p:sp>
-        <p:nvSpPr>
-          <p:cNvPr id="10" name="Text 8"/>
           <p:cNvSpPr/>
           <p:nvPr/>
         </p:nvSpPr>
@@ -12506,7 +12403,7 @@
                 <a:ea typeface="Microsoft YaHei" pitchFamily="34" charset="-122"/>
                 <a:cs typeface="Microsoft YaHei" pitchFamily="34" charset="-120"/>
               </a:rPr>
-              <a:t>需要具体办法，不会使根本约束变成等待生效的愿望。</a:t>
+              <a:t>带着已读条文，先尝试解释这个疑问。</a:t>
             </a:r>
             <a:endParaRPr lang="zh-CN" sz="2400" dirty="0"/>
           </a:p>
@@ -12514,7 +12411,7 @@
       </p:sp>
       <p:sp>
         <p:nvSpPr>
-          <p:cNvPr id="11" name="Text 9"/>
+          <p:cNvPr id="9" name="Text 7"/>
           <p:cNvSpPr/>
           <p:nvPr/>
         </p:nvSpPr>
@@ -12548,7 +12445,7 @@
                 <a:ea typeface="Microsoft YaHei" pitchFamily="34" charset="-122"/>
                 <a:cs typeface="Microsoft YaHei" pitchFamily="34" charset="-120"/>
               </a:rPr>
-              <a:t>宪法第5、41条；教材印刷219、319、324—325页</a:t>
+              <a:t>宪法第5、41条；国家赔偿法第3、7条</a:t>
             </a:r>
             <a:endParaRPr lang="zh-CN" sz="1200" dirty="0"/>
           </a:p>
@@ -12556,7 +12453,7 @@
       </p:sp>
       <p:sp>
         <p:nvSpPr>
-          <p:cNvPr id="12" name="Text 10"/>
+          <p:cNvPr id="10" name="Text 8"/>
           <p:cNvSpPr/>
           <p:nvPr/>
         </p:nvSpPr>
@@ -20603,7 +20500,7 @@
         <p:spPr>
           <a:xfrm>
             <a:off x="804672" y="1956816"/>
-            <a:ext cx="3438144" cy="1085088"/>
+            <a:ext cx="3438144" cy="902208"/>
           </a:xfrm>
           <a:prstGeom prst="rect">
             <a:avLst/>
@@ -20630,7 +20527,7 @@
         <p:spPr>
           <a:xfrm>
             <a:off x="969264" y="2075688"/>
-            <a:ext cx="3108960" cy="902208"/>
+            <a:ext cx="3108960" cy="719328"/>
           </a:xfrm>
           <a:prstGeom prst="rect">
             <a:avLst/>
@@ -20672,7 +20569,7 @@
         <p:spPr>
           <a:xfrm>
             <a:off x="4617720" y="2048256"/>
-            <a:ext cx="6675120" cy="966216"/>
+            <a:ext cx="6675120" cy="783336"/>
           </a:xfrm>
           <a:prstGeom prst="rect">
             <a:avLst/>
@@ -20713,8 +20610,8 @@
         </p:nvSpPr>
         <p:spPr>
           <a:xfrm>
-            <a:off x="2523744" y="3060192"/>
-            <a:ext cx="0" cy="137160"/>
+            <a:off x="2523744" y="2877312"/>
+            <a:ext cx="0" cy="411480"/>
           </a:xfrm>
           <a:prstGeom prst="line">
             <a:avLst/>
@@ -20731,14 +20628,56 @@
       </p:sp>
       <p:sp>
         <p:nvSpPr>
-          <p:cNvPr id="8" name="Shape 6"/>
-          <p:cNvSpPr/>
-          <p:nvPr/>
-        </p:nvSpPr>
-        <p:spPr>
-          <a:xfrm>
-            <a:off x="804672" y="3215640"/>
-            <a:ext cx="3438144" cy="1085088"/>
+          <p:cNvPr id="8" name="Text 6"/>
+          <p:cNvSpPr/>
+          <p:nvPr/>
+        </p:nvSpPr>
+        <p:spPr>
+          <a:xfrm>
+            <a:off x="2779776" y="2927604"/>
+            <a:ext cx="2286000" cy="292608"/>
+          </a:xfrm>
+          <a:prstGeom prst="rect">
+            <a:avLst/>
+          </a:prstGeom>
+          <a:noFill/>
+          <a:ln/>
+        </p:spPr>
+        <p:txBody>
+          <a:bodyPr wrap="none" lIns="0" tIns="0" rIns="0" bIns="0" rtlCol="0" anchor="t"/>
+          <a:lstStyle/>
+          <a:p>
+            <a:pPr algn="l" indent="0" marL="0">
+              <a:lnSpc>
+                <a:spcPct val="105000"/>
+              </a:lnSpc>
+              <a:buNone/>
+            </a:pPr>
+            <a:r>
+              <a:rPr lang="zh-CN" altLang="en-US" sz="1800" dirty="0">
+                <a:solidFill>
+                  <a:srgbClr val="9B3D32"/>
+                </a:solidFill>
+                <a:latin typeface="Microsoft YaHei" pitchFamily="34" charset="0"/>
+                <a:ea typeface="Microsoft YaHei" pitchFamily="34" charset="-122"/>
+                <a:cs typeface="Microsoft YaHei" pitchFamily="34" charset="-120"/>
+              </a:rPr>
+              <a:t>民主选举产生</a:t>
+            </a:r>
+            <a:endParaRPr lang="zh-CN" sz="1800" dirty="0"/>
+          </a:p>
+        </p:txBody>
+      </p:sp>
+      <p:sp>
+        <p:nvSpPr>
+          <p:cNvPr id="9" name="Shape 7"/>
+          <p:cNvSpPr/>
+          <p:nvPr/>
+        </p:nvSpPr>
+        <p:spPr>
+          <a:xfrm>
+            <a:off x="804672" y="3307080"/>
+            <a:ext cx="3438144" cy="902208"/>
           </a:xfrm>
           <a:prstGeom prst="rect">
             <a:avLst/>
@@ -20758,14 +20697,14 @@
       </p:sp>
       <p:sp>
         <p:nvSpPr>
-          <p:cNvPr id="9" name="Text 7"/>
-          <p:cNvSpPr/>
-          <p:nvPr/>
-        </p:nvSpPr>
-        <p:spPr>
-          <a:xfrm>
-            <a:off x="969264" y="3334512"/>
-            <a:ext cx="3108960" cy="902208"/>
+          <p:cNvPr id="10" name="Text 8"/>
+          <p:cNvSpPr/>
+          <p:nvPr/>
+        </p:nvSpPr>
+        <p:spPr>
+          <a:xfrm>
+            <a:off x="969264" y="3425952"/>
+            <a:ext cx="3108960" cy="719328"/>
           </a:xfrm>
           <a:prstGeom prst="rect">
             <a:avLst/>
@@ -20800,14 +20739,14 @@
       </p:sp>
       <p:sp>
         <p:nvSpPr>
-          <p:cNvPr id="10" name="Text 8"/>
-          <p:cNvSpPr/>
-          <p:nvPr/>
-        </p:nvSpPr>
-        <p:spPr>
-          <a:xfrm>
-            <a:off x="4617720" y="3307080"/>
-            <a:ext cx="6675120" cy="966216"/>
+          <p:cNvPr id="11" name="Text 9"/>
+          <p:cNvSpPr/>
+          <p:nvPr/>
+        </p:nvSpPr>
+        <p:spPr>
+          <a:xfrm>
+            <a:off x="4617720" y="3398520"/>
+            <a:ext cx="6675120" cy="783336"/>
           </a:xfrm>
           <a:prstGeom prst="rect">
             <a:avLst/>
@@ -20834,7 +20773,7 @@
                 <a:ea typeface="Microsoft YaHei" pitchFamily="34" charset="-122"/>
                 <a:cs typeface="Microsoft YaHei" pitchFamily="34" charset="-120"/>
               </a:rPr>
-              <a:t>由民主选举产生，对人民负责，受人民监督。</a:t>
+              <a:t>人民代表大会对人民负责，受人民监督。</a:t>
             </a:r>
             <a:endParaRPr lang="zh-CN" sz="2400" dirty="0"/>
           </a:p>
@@ -20842,14 +20781,14 @@
       </p:sp>
       <p:sp>
         <p:nvSpPr>
-          <p:cNvPr id="11" name="Shape 9"/>
-          <p:cNvSpPr/>
-          <p:nvPr/>
-        </p:nvSpPr>
-        <p:spPr>
-          <a:xfrm>
-            <a:off x="2523744" y="4319016"/>
-            <a:ext cx="0" cy="137160"/>
+          <p:cNvPr id="12" name="Shape 10"/>
+          <p:cNvSpPr/>
+          <p:nvPr/>
+        </p:nvSpPr>
+        <p:spPr>
+          <a:xfrm>
+            <a:off x="2523744" y="4227576"/>
+            <a:ext cx="0" cy="411480"/>
           </a:xfrm>
           <a:prstGeom prst="line">
             <a:avLst/>
@@ -20866,14 +20805,56 @@
       </p:sp>
       <p:sp>
         <p:nvSpPr>
-          <p:cNvPr id="12" name="Shape 10"/>
-          <p:cNvSpPr/>
-          <p:nvPr/>
-        </p:nvSpPr>
-        <p:spPr>
-          <a:xfrm>
-            <a:off x="804672" y="4474464"/>
-            <a:ext cx="3438144" cy="1085088"/>
+          <p:cNvPr id="13" name="Text 11"/>
+          <p:cNvSpPr/>
+          <p:nvPr/>
+        </p:nvSpPr>
+        <p:spPr>
+          <a:xfrm>
+            <a:off x="2779776" y="4277868"/>
+            <a:ext cx="2286000" cy="292608"/>
+          </a:xfrm>
+          <a:prstGeom prst="rect">
+            <a:avLst/>
+          </a:prstGeom>
+          <a:noFill/>
+          <a:ln/>
+        </p:spPr>
+        <p:txBody>
+          <a:bodyPr wrap="none" lIns="0" tIns="0" rIns="0" bIns="0" rtlCol="0" anchor="t"/>
+          <a:lstStyle/>
+          <a:p>
+            <a:pPr algn="l" indent="0" marL="0">
+              <a:lnSpc>
+                <a:spcPct val="105000"/>
+              </a:lnSpc>
+              <a:buNone/>
+            </a:pPr>
+            <a:r>
+              <a:rPr lang="zh-CN" altLang="en-US" sz="1800" dirty="0">
+                <a:solidFill>
+                  <a:srgbClr val="9B3D32"/>
+                </a:solidFill>
+                <a:latin typeface="Microsoft YaHei" pitchFamily="34" charset="0"/>
+                <a:ea typeface="Microsoft YaHei" pitchFamily="34" charset="-122"/>
+                <a:cs typeface="Microsoft YaHei" pitchFamily="34" charset="-120"/>
+              </a:rPr>
+              <a:t>由人大产生</a:t>
+            </a:r>
+            <a:endParaRPr lang="zh-CN" sz="1800" dirty="0"/>
+          </a:p>
+        </p:txBody>
+      </p:sp>
+      <p:sp>
+        <p:nvSpPr>
+          <p:cNvPr id="14" name="Shape 12"/>
+          <p:cNvSpPr/>
+          <p:nvPr/>
+        </p:nvSpPr>
+        <p:spPr>
+          <a:xfrm>
+            <a:off x="804672" y="4657344"/>
+            <a:ext cx="3438144" cy="902208"/>
           </a:xfrm>
           <a:prstGeom prst="rect">
             <a:avLst/>
@@ -20893,14 +20874,14 @@
       </p:sp>
       <p:sp>
         <p:nvSpPr>
-          <p:cNvPr id="13" name="Text 11"/>
-          <p:cNvSpPr/>
-          <p:nvPr/>
-        </p:nvSpPr>
-        <p:spPr>
-          <a:xfrm>
-            <a:off x="969264" y="4593336"/>
-            <a:ext cx="3108960" cy="902208"/>
+          <p:cNvPr id="15" name="Text 13"/>
+          <p:cNvSpPr/>
+          <p:nvPr/>
+        </p:nvSpPr>
+        <p:spPr>
+          <a:xfrm>
+            <a:off x="969264" y="4776216"/>
+            <a:ext cx="3108960" cy="719328"/>
           </a:xfrm>
           <a:prstGeom prst="rect">
             <a:avLst/>
@@ -20955,14 +20936,14 @@
       </p:sp>
       <p:sp>
         <p:nvSpPr>
-          <p:cNvPr id="14" name="Text 12"/>
-          <p:cNvSpPr/>
-          <p:nvPr/>
-        </p:nvSpPr>
-        <p:spPr>
-          <a:xfrm>
-            <a:off x="4617720" y="4565904"/>
-            <a:ext cx="6675120" cy="966216"/>
+          <p:cNvPr id="16" name="Text 14"/>
+          <p:cNvSpPr/>
+          <p:nvPr/>
+        </p:nvSpPr>
+        <p:spPr>
+          <a:xfrm>
+            <a:off x="4617720" y="4748784"/>
+            <a:ext cx="6675120" cy="783336"/>
           </a:xfrm>
           <a:prstGeom prst="rect">
             <a:avLst/>
@@ -20989,15 +20970,35 @@
                 <a:ea typeface="Microsoft YaHei" pitchFamily="34" charset="-122"/>
                 <a:cs typeface="Microsoft YaHei" pitchFamily="34" charset="-120"/>
               </a:rPr>
-              <a:t>由人民代表大会产生，对它负责，受它监督。</a:t>
+              <a:t>这些机关对人民代表大会</a:t>
             </a:r>
             <a:endParaRPr lang="zh-CN" sz="2400" dirty="0"/>
           </a:p>
-        </p:txBody>
-      </p:sp>
-      <p:sp>
-        <p:nvSpPr>
-          <p:cNvPr id="15" name="Text 13"/>
+          <a:p>
+            <a:pPr algn="l" indent="0" marL="0">
+              <a:lnSpc>
+                <a:spcPct val="105000"/>
+              </a:lnSpc>
+              <a:buNone/>
+            </a:pPr>
+            <a:r>
+              <a:rPr lang="zh-CN" altLang="en-US" sz="2400" dirty="0">
+                <a:solidFill>
+                  <a:srgbClr val="2B302F"/>
+                </a:solidFill>
+                <a:latin typeface="Microsoft YaHei" pitchFamily="34" charset="0"/>
+                <a:ea typeface="Microsoft YaHei" pitchFamily="34" charset="-122"/>
+                <a:cs typeface="Microsoft YaHei" pitchFamily="34" charset="-120"/>
+              </a:rPr>
+              <a:t>负责，受人民代表大会监督。</a:t>
+            </a:r>
+            <a:endParaRPr lang="zh-CN" sz="2400" dirty="0"/>
+          </a:p>
+        </p:txBody>
+      </p:sp>
+      <p:sp>
+        <p:nvSpPr>
+          <p:cNvPr id="17" name="Text 15"/>
           <p:cNvSpPr/>
           <p:nvPr/>
         </p:nvSpPr>
@@ -21031,7 +21032,7 @@
                 <a:ea typeface="Microsoft YaHei" pitchFamily="34" charset="-122"/>
                 <a:cs typeface="Microsoft YaHei" pitchFamily="34" charset="-120"/>
               </a:rPr>
-              <a:t>连线要读出产生、负责和监督，不能只认机关名称。</a:t>
+              <a:t>人大选举含直接、间接层级；负责与监督另读右侧。</a:t>
             </a:r>
             <a:endParaRPr lang="zh-CN" sz="2400" dirty="0"/>
           </a:p>
@@ -21039,7 +21040,7 @@
       </p:sp>
       <p:sp>
         <p:nvSpPr>
-          <p:cNvPr id="16" name="Text 14"/>
+          <p:cNvPr id="18" name="Text 16"/>
           <p:cNvSpPr/>
           <p:nvPr/>
         </p:nvSpPr>
@@ -21081,7 +21082,7 @@
       </p:sp>
       <p:sp>
         <p:nvSpPr>
-          <p:cNvPr id="17" name="Text 15"/>
+          <p:cNvPr id="19" name="Text 17"/>
           <p:cNvSpPr/>
           <p:nvPr/>
         </p:nvSpPr>

--- a/materials/第1讲整合试讲主版本/第1讲_宪法总论_整合试讲主版本.pptx
+++ b/materials/第1讲整合试讲主版本/第1讲_宪法总论_整合试讲主版本.pptx
@@ -1273,6 +1273,7 @@
               <a:rPr lang="en-US" dirty="0"/>
               <a:t>16｜回看第一学时：“根本”已经有了哪些内容？
 核心/条件性安排：核心；页预算2分钟
+本学时另有2分钟机动，可前移到实际指读、追问或补充理由处，不新增固定讲述。
 1. 逐字讲述
 在题目给定的条件下，宪法修改不能通过，法律和其他议案可以通过。关键不是笼统地说“多数赞成”，而是分清要求哪一种多数。
 2. 逐字讲述
@@ -1282,7 +1283,7 @@
 4. 活动，不朗读（0.3分钟）
 学生在材料页边各写一个词，概括自己还没说清的一层关系；收回注意后下课。课间另计。
 教师备查，不朗读
-本页结束核心第一学时，累计45分钟。若每学时50分钟，此处转附页E1（第32—33页）共5分钟，再进入课间。
+本页常规流程累计43分钟；本学时另留2分钟供实际指读、追问与回看，按需穿插，不另加内容。若每学时50分钟，此处转附页E1（第32—33页）共5分钟，再进入课间。
 本页出处
 任务2讲评；第一学时收束
 来源及定位
@@ -1804,7 +1805,7 @@
           <a:p>
             <a:r>
               <a:rPr lang="en-US" dirty="0"/>
-              <a:t>20｜法律还回答：谁承担回应的义务？
+              <a:t>20｜法律还回答：谁依法承担赔偿义务？
 核心/条件性安排：核心；页预算3分钟
 1. 逐字讲述
 再看第7条第一款。相应行政机关成为赔偿义务机关。这个规定并不只是让我们多记一个机关名称，它给权利请求确定了制度上的承担者。
@@ -1813,9 +1814,9 @@
 3. 逐字讲述
 假设一位工作人员态度友善，愿意耐心接待，这当然值得肯定。但当相应法定条件已经成立时，受害人提出请求的根据，不能只取决于他有没有碰上一位愿意额外帮忙的人。法律把义务落实到机关，就使请求能够依据规则提出，而不是到处寻找私人照顾。
 4. 逐字讲述
-这也改变了看问题的位置。我们不只问工作人员有没有善意，还要问相应机关依法应当承担什么职责。即使更换了具体承办人，机关也不能因此摆脱法定义务。友善可以使办理更体贴，法定职责则使办理成为应当承担的事。
+这也改变了看问题的位置。我们不只问工作人员有没有善意，还要问相应机关是否依法承担赔偿义务。即使更换了具体承办人，机关也不能因此摆脱法定义务。友善可以使办理更体贴，法定职责则使办理成为应当承担的事。
 5. 逐字讲述
-这句话要连着前面的条件理解：应当依法回应，不等于每个请求人主张的全部事项都当然成立。现在我们已经有了情形和义务机关两项信息，给定事实以后，就能作一个有根据的有限判断。
+这句话要连着前面的条件理解：依法承担赔偿义务，不等于每个请求人主张的全部事项都当然成立。现在我们已经有了情形和义务机关两项信息，给定事实以后，就能作一个有根据的有限判断。
 教师备查，不朗读
 凝练段落为课程原创，表达选择参研究/02。机关对外赔偿与第16条追偿、处分等不同，不据此说工作人员免责。
 本页出处
@@ -2223,28 +2224,25 @@
           <a:p>
             <a:r>
               <a:rPr lang="en-US" dirty="0"/>
-              <a:t>24｜最高效力，与制度是否写全，是两个问题
-核心/条件性安排：核心；页预算3.5分钟
+              <a:t>24｜刚才一直在读普通法律，宪法还在哪里？
+核心/条件性安排：核心；页预算1.5分钟
 1. 逐字讲述
-刚才的例子容易引出一个真实的疑问：处理请求时我们一直在读国家赔偿法，那么宪法是不是只剩一段背景？既然还有很多细节要由法律规定，宪法的效力是不是也要等法律来决定？
+刚才处理请求时，我们一直在读国家赔偿法。那么宪法是不是只剩一段背景？既然还有细节要由法律规定，宪法的效力是不是也要等法律来决定？
 2. 逐字讲述
-要回答它，先分清两个问题。最高效力回答普通法律能不能排除、背离宪法要求；具体制度回答这些要求在某个领域中怎样展开。规范已经有约束力，与全部办理细节已经写完，是两个不同判断。
-3. 逐字讲述
-第41条已经确认相应赔偿权，这项规定对国家机关具有法律约束力。国家赔偿法进一步规定哪些情形、哪个机关、怎样提出请求。我们需要后者，是因为办理需要具体制度，不是因为前者原本毫无效力。
-4. 逐字讲述
-再向另一面想。宪法已经确认权利，也不等于个案所有条件和结论已经齐备。你仍然要查是不是行使相应职权、是否发生法定侵害和损害。最高的效力没有替代这些事实判断。
-5. 逐字讲述
-所以，宪法与普通法律在这里既有约束关系，也有制度展开的关系。法律可以形成不同的具体安排，却须尊重根本权利要求。我们不能说每个制度细节早就逐字藏在第41条里；也不能把依照法律规定理解成法律想保障才保障。
-6. 逐字讲述
-把这个区别说清楚，比背一句“宪法与法律相互联系”更进一步。现在请大家自己解释一次：法律已经规定了那么多具体事项，宪法在这里究竟还约束什么？
+先不急着听教师的解释。请回到第5条、第41条，再回看刚才帮助我们找到赔偿情形和义务机关的两条法律。下一页用这些材料自己组织一个回答。
+3. 活动，不朗读（0.5分钟）
+回看指定条文，约30秒。只定位材料，不在此页先给完整关系解释。
 教师备查，不朗读
-不就直接裁判依据作一概结论；立法形成空间存在学理争论见来源记录。屏幕与讲述不采用所有权利都等待配套法的说法。
+本页保留真实疑问及作答所需条文定位，完整关系讲解集中在学生尝试之后的第26页；不要求无材料猜答案。
 本页出处
-宪法第5、41条；教材印刷219、319、324—325页
+任务4准备｜宪法第5、41条；国家赔偿法第3、7条
 来源及定位
 中华人民共和国宪法（2018年修正）
 https://www.mofcom.gov.cn/xxgcxjpxsdzgtsshzysx/zywj/art/2018/art_45c1e16fe351469090d53e63178268c8.html
-第5、41条</a:t>
+第5、41条
+国家赔偿法
+https://fgk.chinatax.gov.cn/zcfgk/c100009/c5211800/content.html
+第3、7条</a:t>
             </a:r>
             <a:endParaRPr lang="en-US" dirty="0"/>
           </a:p>
@@ -2335,11 +2333,11 @@
               <a:t>25｜任务4：宪法在这里究竟还约束什么？
 核心/条件性安排：核心；页预算3.75分钟
 1. 逐字讲述
-请认真对待这个疑问。不是只答宪法最高，也不是再答一遍县公安局。用第5条和第41条说明宪法的约束，再举一项国家赔偿法真正补充的安排，解释为什么两种规范都需要。
+用第5条和第41条说明宪法的约束，再举一项国家赔偿法增加的安排，解释为什么两种规范都需要。可以按自己的顺序写出理由。
 2. 活动，不朗读（3分钟）
 独立写作2分30秒；同桌各读一句并指出对方是否只给结论，约30秒。不要跳到下一页。
 教师备查，不朗读
-这是M1新增关系说明任务。题面只提出疑问和依据要求，不预填完整结论。不同意某种讲法也须给出条文理由，不把学生当辩论对手。
+保留M1关系说明任务：先回看、尝试，再反馈。题面不预填完整结论。不得把教学设问称为真实学生原话。
 本页出处
 任务4｜材料B、D；宪法第5、41条
 来源及定位
@@ -2434,21 +2432,19 @@
             <a:r>
               <a:rPr lang="en-US" dirty="0"/>
               <a:t>26｜任务4讲评：把已有约束与新增安排同时说清
-核心/条件性安排：核心；页预算4分钟
+核心/条件性安排：核心；页预算3分钟
 1. 活动，不朗读（1分钟）
-请两名学生各给一个理由或一个制度例子，总计约1分钟。
+请两名学生各给一个理由或一个制度例子，总计约1分钟。依据实际回答选择短反馈或备查展开，不虚构错误。
 2. 逐字讲述
-一种完整回答可以这样说：第41条已经确认相应侵权损失者依照法律规定取得赔偿的权利；第5条使普通法律受到宪法约束，不能自行排除这一要求。第7条又把义务落实到相应行政机关，因此提出请求与办理请求都有了更具体的制度依据。
+把刚才的回答放回两组条文：第41条已经确认相应赔偿权，第5条约束普通法律；第7条再确定谁负赔偿义务。需要补充办理制度，并不表示宪法此前无效；已有最高效力，也没有替我们写完个案条件。法律继续回答怎样保障，仍须尊重宪法已经确认的保障要求。
 3. 逐字讲述
-也可以选第3条作例子，说明哪些行政侵权情形纳入本法赔偿；或者用第9条说明提出途径同样需要安排。我们看重的是，你是否把已有的根本要求与新增的具体信息接起来，而不是用了几个学理词。
-4. 逐字讲述
-如果只写“宪法不能任意违反”，前半层成立，后半层还缺法律增加了什么。如果只写“第7条规定赔偿义务机关”，例子找对了，还须说明该安排受到什么约束。把两句话并排放着并不难，难的是说明它们为什么可以同时成立。
-5. 逐字讲述
-我们可以把关系收成一句话：法律继续回答怎样保障，仍须尊重宪法已经确认的保障要求。这不是说任何赔偿请求都应全额支持，而是说形成具体规则与取消根本约束，不能混为一件事。
-6. 逐字讲述
-这道题把条文背后的关系接了起来。接下来用两个更短的问题，看这个关系能否离开熟悉的起首句而成立。
+这道题要说明的是已有约束与新增安排怎样并存。接下来用两个短问题，看看这个关系是否取决于法律开头有没有写根据宪法。
 教师备查，不朗读
-收束为课程原创表达，与Pro示例相关但作范围收紧。没有将一种方案合理等同全法合宪；不从立即答题声称独立迁移已经成功。
+常规讲评先听实际回答。上面的短反馈用于已说清两层关系的回答；不要再逐段复读本页全部备查。若仍有混淆，用下段替代短反馈中对应部分，并从第二学时3分钟机动中调配，不额外叠加两套完整讲评。
+需要展开时：最高效力回答普通法律能不能排除或背离宪法要求；具体制度回答相应要求怎样在一个领域展开。规范已经有约束力，与全部办理细节已经写完，是两个不同判断。第41条已经确认相应赔偿权，对国家机关具有约束力；国家赔偿法第3条增加具体情形，第7条明确义务机关，第9条安排提出途径。需要后者，因为办理需要具体制度，而不是前者原本没有效力。
+另一面的限度：宪法已经确认权利，并不等于个案事实和结论全部齐备，仍须核查职权性质、法定侵害及损害等。法律有形成具体制度的空间，不能说所有细节早已逐字藏在第41条，也不能把依照法律规定理解成可以任意取消该宪法要求。
+按实际缺口回应：只说宪法最高，追问第41条确认什么、具体法律增加什么；只列第7条义务机关，追问第5条怎样约束这一安排。接受第3条或第9条准确例子，不要求统一学理措辞。
+保留主讲之外的完整理由供教师按需调用。不就宪法直接裁判依据作一概结论；立法形成空间的学理区别见来源记录。不把即时回答当作独立迁移已经成功。
 本页出处
 任务4参考说明｜宪法第5、41条；国家赔偿法第3、7、9条
 来源及定位
@@ -2861,7 +2857,7 @@
             <a:r>
               <a:rPr lang="en-US" dirty="0"/>
               <a:t>03｜先读国家要做什么，再读怎样组织国家
-核心/条件性安排：核心；页预算4分钟
+核心/条件性安排：核心；页预算3.5分钟
 1. 逐字讲述
 请翻到材料A现行宪法部分。序言明确说，国家的根本任务是沿着中国特色社会主义道路，集中力量进行社会主义现代化建设。这里回答国家发展的根本方向。序言末段又说明，宪法规定国家的根本制度和根本任务，具有最高法律效力。先把这两处各自回答的问题分开。
 2. 活动，不朗读（1.25分钟）
@@ -2869,9 +2865,7 @@
 3. 逐字讲述
 国家要实现共同任务，就要组织资源、形成决定、付诸行动。这些活动由谁来进行，用什么权力来进行，对人的权利承担什么义务，不能留给每个机关临时回答。因此，根本任务与国家机构、基本权利并不是两组不相干的内容：有共同目标，也需要实现目标的制度和规则。
 4. 逐字讲述
-看目录时也可以沿着这个问题走。序言和总纲呈现根本任务、国家性质及基本制度；第二章规定公民的基本权利和义务；第三章配置国家机构；第四章规定国旗、国歌、国徽、首都。这张目录不是本课要求机械记住的清单，它把国家的方向、权力组织和公民地位放进同一个法律文本。
-5. 逐字讲述
-对未来从事公安工作的同学而言，维护社会秩序是熟悉的任务。但宪法学习要多追问一步：完成任务的机关从何获得职权，又必须遵守什么？不能因为目标重要，就略去权力如何行使、权利怎样保障。下面看总纲的两个起点。
+材料A列有宪法目录。请留意，国家的根本方向、权力组织和公民地位被放进同一个法律文本。对未来从事公安工作的同学而言，维护秩序也要回答：机关从何获得职权，履职须遵守什么？下面看总纲的两个起点。
 本页出处
 现行宪法序言（节录）与目录
 来源及定位
@@ -3077,6 +3071,7 @@
               <a:rPr lang="en-US" dirty="0"/>
               <a:t>31｜任务7：把国家的制度与个人的权利接起来
 核心/条件性安排：核心；页预算3.5分钟
+本学时另有3分钟机动，可前移到实际指读、追问或补充理由处，不新增固定讲述。
 1. 逐字讲述
 最后请写两三句话，把宪法、普通法律、机关履职和个人权利放在同一个解释里。至少选择一项今天实际读到的制度作支撑，不需要复制整张关系图。
 2. 活动，不朗读（1分钟）
@@ -3088,6 +3083,7 @@
 5. 逐字讲述
 第一讲到这里。下一讲转向宪法的发展，继续解释这些根本规则怎样形成和调整。今天先把一件事说清：国家权力需要组织起来，也必须在规范和权利要求之中行使。
 教师备查，不朗读
+本学时常规流程42分钟，另留3分钟机动；优先按真实回答调用第26页必要理由、指读和回看，不虚填为固定讲述。
 90分钟核心到本页结束。后四页为100分钟条件性扩展，按指定位置插入，不在90分钟课后继续全放。没有真人试读，不预写效果评价。
 本页出处
 任务7及第一讲收束；下一讲：宪法的发展
@@ -3702,15 +3698,13 @@
             <a:r>
               <a:rPr lang="en-US" dirty="0"/>
               <a:t>04｜国家的根本安排，先回答哪些问题？
-核心/条件性安排：核心；页预算3分钟
+核心/条件性安排：核心；页预算2.25分钟
 1. 逐字讲述
 第一条规定我国是工人阶级领导的、以工农联盟为基础的人民民主专政的社会主义国家；社会主义制度是根本制度，中国共产党领导是中国特色社会主义最本质的特征。第二条随即明确，一切权力属于人民。这里既有国家性质和根本制度，也有国家权力归属。
 2. 逐字讲述
 为什么这些内容具有根本性？因为无论以后讨论经济制度、教育事务、公安履职还是赔偿请求，都已经置身于一定的国家制度和权力秩序之中。具体法律不能每进入一个领域，就重新决定国家性质、权力属于谁、公民是否有基本权利。宪法先确立这些共同前提，其他法律和国家活动在其中展开。
 3. 逐字讲述
-这不意味着普通法律处理的小事不重要。对一个人来说，劳动报酬、一次拘留、一笔赔偿都可能影响生活。根本与具体，说的是它们在国家制度和法律体系中承担什么工作，并不是给个人痛苦排大小。宪法也不是所有部门法细节的总和。它没有把每个合同条款、每种犯罪构成和每项赔偿标准全部写进来。
-4. 逐字讲述
-所以，“根本”要从关系中理解：它确立其他国家活动须共同遵循的基本安排。带着这个认识，再看宪法的概念，定义中的每个部分就有了实际内容。
+普通法律处理具体事务，同样关系到人的切身利益。这里区分的是规范承担的工作：宪法确立共同的基本安排，普通法律展开具体领域的规则。宪法没有把每项合同条款、犯罪构成和赔偿标准全部写进来。现在把已经看到的内容连成概念。
 教师备查，不朗读
 屏幕第1条为明确的教学提要，不加原文引号；完整条文在材料B。第3、4讲分别深化国体政体和基本制度。
 本页出处
@@ -3807,13 +3801,13 @@
             <a:r>
               <a:rPr lang="en-US" dirty="0"/>
               <a:t>05｜现在，把“宪法”说完整
-核心/条件性安排：核心；页预算2分钟
+核心/条件性安排：核心；页预算1.75分钟
 1. 逐字讲述
 我们可以作这样的概括：宪法是规定国家根本制度和根本任务、公民基本权利和义务、国家权力组织运行等根本问题，具有最高法律效力的国家根本法。这是本课根据教材和条文作的概括，便于把刚才看到的内容连起来。
 2. 逐字讲述
 概念不只帮助我们认出一本书，还帮助我们判断正在讨论哪一层问题。问权力属于谁，是在问根本安排；问普通法律能否背离宪法，是在问效力关系；问怎样修改宪法，是在问根本规则的程序保障。三个方面相互联系，但不能互相替代。
 3. 逐字讲述
-尤其不能从“这个问题很重要”一步跳到“这条规定效力最高”。很多普通法律保护的利益同样重要。我们还要说明宪法在国家权力和法律体系中的地位，并实际看它对其他规范提出的要求。这正是下一步要解释的最高法律效力。
+下面就把第二个方面展开：宪法为什么能够约束制定法律的活动？请直接看第5条。
 教师备查，不朗读
 这里不是某一条宪法的逐字定义。完整解释与修宪对照分别在后页，不恢复词源、分类与渊源目录。
 本页出处
@@ -3910,7 +3904,7 @@
             <a:r>
               <a:rPr lang="en-US" dirty="0"/>
               <a:t>06｜制定法律的人和机关，也处在宪法之内
-核心/条件性安排：核心；页预算4分钟
+核心/条件性安排：核心；页预算3.5分钟
 1. 逐字讲述
 我们刚才说，宪法规定国家权力归属和机关安排。现在把立法放进这个框架：制定法律本身也是行使国家权力。立法机关的地位和权限并不在宪法之外，因此它形成的具体规则也不能取得排除宪法约束的权力。
 2. 活动，不朗读（0.5分钟）
@@ -3920,9 +3914,7 @@
 4. 逐字讲述
 我们可以作一个简短的设想。如果每个领域的法律都能说“在我这里，宪法要求可以不算”，共同的国家制度和基本权利就会被分领域逐项排除。最终剩下的只是宪法的名称，失去的是它作为共同规范的作用。普通法律可以在一个领域作具体选择，但具体选择要在共同约束下形成。
 5. 逐字讲述
-这也解释为什么学习宪法并非只关心最高国家机关。你将来读行政法律、适用具体职权规定，仍然是在这个规范关系之中。后半堂我们会用国家赔偿法观察：受约束的普通法律又怎样作出具体安排。
-6. 逐字讲述
-先留下这一层认识：立法不是逃出宪法去写规则，而是在宪法规定的权力秩序中形成规则。接下来再往前追问，国家权力既然属于人民，它怎样被组织成日常能够运行的国家机构？
+你将来适用具体职权规定，仍在这个规范关系之中。后半堂用国家赔偿法观察具体安排。现在先追问：权力既然属于人民，怎样被组织成能够运行的国家机构？
 教师备查，不朗读
 不由本页推出任何个人可自行宣布法律普遍失效，纠正机制留第8讲；规范结构说明不冒充完整的宪法权威历史解释。
 本页出处
@@ -4025,7 +4017,7 @@
 2. 活动，不朗读（1.25分钟）
 阅读材料B第2条及第3条前三款，在“产生”“负责”“监督”下划线。
 3. 逐字讲述
-屏幕上的连线要连着这些动词读。产生关系说明机关怎样取得制度上的位置；负责和监督关系说明这个位置同时带来责任。只画“人民—人大—其他机关”的名单，还不能完整说明制度，因为名单没有告诉我们权力怎样受到持续约束。
+图中的向下箭头只表示产生或组织关系：人大由民主选举产生，相应国家机关由人大产生。它没有展开直接选举与间接选举的层级，不能读成各级人大都由全体人民直接选举。负责和监督请看右侧文字：人大对人民负责、受人民监督；这些机关对产生它的人大负责、受该人大监督。产生说明制度位置，负责和监督说明持续的责任，不能用同一根向下箭头代替。
 4. 逐字讲述
 第2条也没有把人民管理国家和社会事务的方式缩成参加一次选举。它还规定人民依照法律，通过各种途径和形式，管理国家事务、经济和文化事业以及社会事务。本课先认识整体关系，具体制度以后逐一展开。
 5. 逐字讲述
@@ -4033,7 +4025,7 @@
 教师备查，不朗读
 人大由人民选举产生的直接/间接层级不在本页铺开；图不表示所有人大都由全民直接选举。民主集中制完整内容包括中央地方关系等，留后续。
 本页出处
-现行宪法第2条、第3条前三款（图为关系提要）
+宪法第2、3条；选举层级未展开，非各级均全民直选
 来源及定位
 中华人民共和国宪法（2018年修正）
 https://www.mofcom.gov.cn/xxgcxjpxsdzgtsshzysx/zywj/art/2018/art_45c1e16fe351469090d53e63178268c8.html
@@ -10438,7 +10430,7 @@
                 <a:ea typeface="Microsoft YaHei" pitchFamily="34" charset="-122"/>
                 <a:cs typeface="Microsoft YaHei" pitchFamily="34" charset="-120"/>
               </a:rPr>
-              <a:t>法律还回答：谁承担回应的义务？</a:t>
+              <a:t>法律还回答：谁依法承担赔偿义务？</a:t>
             </a:r>
             <a:endParaRPr lang="zh-CN" sz="3600" dirty="0"/>
           </a:p>
@@ -12202,7 +12194,7 @@
                 <a:ea typeface="Microsoft YaHei" pitchFamily="34" charset="-122"/>
                 <a:cs typeface="Microsoft YaHei" pitchFamily="34" charset="-120"/>
               </a:rPr>
-              <a:t>最高效力，与制度是否写全，是两个问题</a:t>
+              <a:t>刚才一直在读普通法律，宪法还在哪里？</a:t>
             </a:r>
             <a:endParaRPr lang="zh-CN" sz="3600" dirty="0"/>
           </a:p>
@@ -12271,7 +12263,7 @@
                 <a:ea typeface="Microsoft YaHei" pitchFamily="34" charset="-122"/>
                 <a:cs typeface="Microsoft YaHei" pitchFamily="34" charset="-120"/>
               </a:rPr>
-              <a:t>最高效力问什么</a:t>
+              <a:t>回看材料B、D</a:t>
             </a:r>
             <a:endParaRPr lang="zh-CN" sz="2400" dirty="0"/>
           </a:p>
@@ -12313,7 +12305,7 @@
                 <a:ea typeface="Microsoft YaHei" pitchFamily="34" charset="-122"/>
                 <a:cs typeface="Microsoft YaHei" pitchFamily="34" charset="-120"/>
               </a:rPr>
-              <a:t>普通法律能否排除、</a:t>
+              <a:t>宪法第5条第3款</a:t>
             </a:r>
             <a:endParaRPr lang="zh-CN" sz="2400" dirty="0"/>
           </a:p>
@@ -12333,7 +12325,7 @@
                 <a:ea typeface="Microsoft YaHei" pitchFamily="34" charset="-122"/>
                 <a:cs typeface="Microsoft YaHei" pitchFamily="34" charset="-120"/>
               </a:rPr>
-              <a:t>背离宪法要求？</a:t>
+              <a:t>宪法第41条第3款</a:t>
             </a:r>
             <a:endParaRPr lang="zh-CN" sz="2400" dirty="0"/>
           </a:p>
@@ -12402,7 +12394,7 @@
                 <a:ea typeface="Microsoft YaHei" pitchFamily="34" charset="-122"/>
                 <a:cs typeface="Microsoft YaHei" pitchFamily="34" charset="-120"/>
               </a:rPr>
-              <a:t>具体制度问什么</a:t>
+              <a:t>回看刚用过的规则</a:t>
             </a:r>
             <a:endParaRPr lang="zh-CN" sz="2400" dirty="0"/>
           </a:p>
@@ -12444,7 +12436,7 @@
                 <a:ea typeface="Microsoft YaHei" pitchFamily="34" charset="-122"/>
                 <a:cs typeface="Microsoft YaHei" pitchFamily="34" charset="-120"/>
               </a:rPr>
-              <a:t>相应要求怎样在这个领域形成可</a:t>
+              <a:t>国家赔偿法第3条、第7条：我们</a:t>
             </a:r>
             <a:endParaRPr lang="zh-CN" sz="2400" dirty="0"/>
           </a:p>
@@ -12464,7 +12456,7 @@
                 <a:ea typeface="Microsoft YaHei" pitchFamily="34" charset="-122"/>
                 <a:cs typeface="Microsoft YaHei" pitchFamily="34" charset="-120"/>
               </a:rPr>
-              <a:t>办理的规则？</a:t>
+              <a:t>据此作了哪些判断？</a:t>
             </a:r>
             <a:endParaRPr lang="zh-CN" sz="2400" dirty="0"/>
           </a:p>
@@ -12506,7 +12498,7 @@
                 <a:ea typeface="Microsoft YaHei" pitchFamily="34" charset="-122"/>
                 <a:cs typeface="Microsoft YaHei" pitchFamily="34" charset="-120"/>
               </a:rPr>
-              <a:t>需要具体办法，不会使根本约束变成等待生效的愿望。</a:t>
+              <a:t>先回到手中的条文，再解释它们为什么都需要。</a:t>
             </a:r>
             <a:endParaRPr lang="zh-CN" sz="2400" dirty="0"/>
           </a:p>
@@ -12548,7 +12540,7 @@
                 <a:ea typeface="Microsoft YaHei" pitchFamily="34" charset="-122"/>
                 <a:cs typeface="Microsoft YaHei" pitchFamily="34" charset="-120"/>
               </a:rPr>
-              <a:t>宪法第5、41条；教材印刷219、319、324—325页</a:t>
+              <a:t>任务4准备｜宪法第5、41条；国家赔偿法第3、7条</a:t>
             </a:r>
             <a:endParaRPr lang="zh-CN" sz="1200" dirty="0"/>
           </a:p>
@@ -12748,7 +12740,7 @@
                 <a:ea typeface="Microsoft YaHei" pitchFamily="34" charset="-122"/>
                 <a:cs typeface="Microsoft YaHei" pitchFamily="34" charset="-120"/>
               </a:rPr>
-              <a:t>同学提出的疑问｜教学设定</a:t>
+              <a:t>继续刚才的疑问｜教学设定</a:t>
             </a:r>
             <a:endParaRPr lang="zh-CN" sz="2400" dirty="0"/>
           </a:p>
@@ -20602,8 +20594,8 @@
         </p:nvSpPr>
         <p:spPr>
           <a:xfrm>
-            <a:off x="804672" y="1956816"/>
-            <a:ext cx="3438144" cy="1085088"/>
+            <a:off x="804672" y="1938528"/>
+            <a:ext cx="3730752" cy="914400"/>
           </a:xfrm>
           <a:prstGeom prst="rect">
             <a:avLst/>
@@ -20629,8 +20621,8 @@
         </p:nvSpPr>
         <p:spPr>
           <a:xfrm>
-            <a:off x="969264" y="2075688"/>
-            <a:ext cx="3108960" cy="902208"/>
+            <a:off x="969264" y="2029968"/>
+            <a:ext cx="3401568" cy="768096"/>
           </a:xfrm>
           <a:prstGeom prst="rect">
             <a:avLst/>
@@ -20671,8 +20663,8 @@
         </p:nvSpPr>
         <p:spPr>
           <a:xfrm>
-            <a:off x="4617720" y="2048256"/>
-            <a:ext cx="6675120" cy="966216"/>
+            <a:off x="4919472" y="2029968"/>
+            <a:ext cx="6364224" cy="777240"/>
           </a:xfrm>
           <a:prstGeom prst="rect">
             <a:avLst/>
@@ -20713,8 +20705,8 @@
         </p:nvSpPr>
         <p:spPr>
           <a:xfrm>
-            <a:off x="2523744" y="3060192"/>
-            <a:ext cx="0" cy="137160"/>
+            <a:off x="2286000" y="2880360"/>
+            <a:ext cx="0" cy="338328"/>
           </a:xfrm>
           <a:prstGeom prst="line">
             <a:avLst/>
@@ -20731,14 +20723,56 @@
       </p:sp>
       <p:sp>
         <p:nvSpPr>
-          <p:cNvPr id="8" name="Shape 6"/>
-          <p:cNvSpPr/>
-          <p:nvPr/>
-        </p:nvSpPr>
-        <p:spPr>
-          <a:xfrm>
-            <a:off x="804672" y="3215640"/>
-            <a:ext cx="3438144" cy="1085088"/>
+          <p:cNvPr id="8" name="Text 6"/>
+          <p:cNvSpPr/>
+          <p:nvPr/>
+        </p:nvSpPr>
+        <p:spPr>
+          <a:xfrm>
+            <a:off x="2560320" y="2912364"/>
+            <a:ext cx="2029968" cy="320040"/>
+          </a:xfrm>
+          <a:prstGeom prst="rect">
+            <a:avLst/>
+          </a:prstGeom>
+          <a:noFill/>
+          <a:ln/>
+        </p:spPr>
+        <p:txBody>
+          <a:bodyPr wrap="none" lIns="0" tIns="0" rIns="0" bIns="0" rtlCol="0" anchor="t"/>
+          <a:lstStyle/>
+          <a:p>
+            <a:pPr algn="l" indent="0" marL="0">
+              <a:lnSpc>
+                <a:spcPct val="105000"/>
+              </a:lnSpc>
+              <a:buNone/>
+            </a:pPr>
+            <a:r>
+              <a:rPr lang="zh-CN" altLang="en-US" sz="1800" dirty="0">
+                <a:solidFill>
+                  <a:srgbClr val="9B3D32"/>
+                </a:solidFill>
+                <a:latin typeface="Microsoft YaHei" pitchFamily="34" charset="0"/>
+                <a:ea typeface="Microsoft YaHei" pitchFamily="34" charset="-122"/>
+                <a:cs typeface="Microsoft YaHei" pitchFamily="34" charset="-120"/>
+              </a:rPr>
+              <a:t>民主选举产生</a:t>
+            </a:r>
+            <a:endParaRPr lang="zh-CN" sz="1800" dirty="0"/>
+          </a:p>
+        </p:txBody>
+      </p:sp>
+      <p:sp>
+        <p:nvSpPr>
+          <p:cNvPr id="9" name="Shape 7"/>
+          <p:cNvSpPr/>
+          <p:nvPr/>
+        </p:nvSpPr>
+        <p:spPr>
+          <a:xfrm>
+            <a:off x="804672" y="3246120"/>
+            <a:ext cx="3730752" cy="914400"/>
           </a:xfrm>
           <a:prstGeom prst="rect">
             <a:avLst/>
@@ -20758,14 +20792,14 @@
       </p:sp>
       <p:sp>
         <p:nvSpPr>
-          <p:cNvPr id="9" name="Text 7"/>
-          <p:cNvSpPr/>
-          <p:nvPr/>
-        </p:nvSpPr>
-        <p:spPr>
-          <a:xfrm>
-            <a:off x="969264" y="3334512"/>
-            <a:ext cx="3108960" cy="902208"/>
+          <p:cNvPr id="10" name="Text 8"/>
+          <p:cNvSpPr/>
+          <p:nvPr/>
+        </p:nvSpPr>
+        <p:spPr>
+          <a:xfrm>
+            <a:off x="969264" y="3337560"/>
+            <a:ext cx="3401568" cy="768096"/>
           </a:xfrm>
           <a:prstGeom prst="rect">
             <a:avLst/>
@@ -20800,14 +20834,14 @@
       </p:sp>
       <p:sp>
         <p:nvSpPr>
-          <p:cNvPr id="10" name="Text 8"/>
-          <p:cNvSpPr/>
-          <p:nvPr/>
-        </p:nvSpPr>
-        <p:spPr>
-          <a:xfrm>
-            <a:off x="4617720" y="3307080"/>
-            <a:ext cx="6675120" cy="966216"/>
+          <p:cNvPr id="11" name="Text 9"/>
+          <p:cNvSpPr/>
+          <p:nvPr/>
+        </p:nvSpPr>
+        <p:spPr>
+          <a:xfrm>
+            <a:off x="4919472" y="3337560"/>
+            <a:ext cx="6364224" cy="777240"/>
           </a:xfrm>
           <a:prstGeom prst="rect">
             <a:avLst/>
@@ -20834,7 +20868,7 @@
                 <a:ea typeface="Microsoft YaHei" pitchFamily="34" charset="-122"/>
                 <a:cs typeface="Microsoft YaHei" pitchFamily="34" charset="-120"/>
               </a:rPr>
-              <a:t>由民主选举产生，对人民负责，受人民监督。</a:t>
+              <a:t>人民代表大会对人民负责，受人民监督。</a:t>
             </a:r>
             <a:endParaRPr lang="zh-CN" sz="2400" dirty="0"/>
           </a:p>
@@ -20842,14 +20876,14 @@
       </p:sp>
       <p:sp>
         <p:nvSpPr>
-          <p:cNvPr id="11" name="Shape 9"/>
-          <p:cNvSpPr/>
-          <p:nvPr/>
-        </p:nvSpPr>
-        <p:spPr>
-          <a:xfrm>
-            <a:off x="2523744" y="4319016"/>
-            <a:ext cx="0" cy="137160"/>
+          <p:cNvPr id="12" name="Shape 10"/>
+          <p:cNvSpPr/>
+          <p:nvPr/>
+        </p:nvSpPr>
+        <p:spPr>
+          <a:xfrm>
+            <a:off x="2286000" y="4187952"/>
+            <a:ext cx="0" cy="338328"/>
           </a:xfrm>
           <a:prstGeom prst="line">
             <a:avLst/>
@@ -20866,14 +20900,56 @@
       </p:sp>
       <p:sp>
         <p:nvSpPr>
-          <p:cNvPr id="12" name="Shape 10"/>
-          <p:cNvSpPr/>
-          <p:nvPr/>
-        </p:nvSpPr>
-        <p:spPr>
-          <a:xfrm>
-            <a:off x="804672" y="4474464"/>
-            <a:ext cx="3438144" cy="1085088"/>
+          <p:cNvPr id="13" name="Text 11"/>
+          <p:cNvSpPr/>
+          <p:nvPr/>
+        </p:nvSpPr>
+        <p:spPr>
+          <a:xfrm>
+            <a:off x="2560320" y="4219956"/>
+            <a:ext cx="2029968" cy="320040"/>
+          </a:xfrm>
+          <a:prstGeom prst="rect">
+            <a:avLst/>
+          </a:prstGeom>
+          <a:noFill/>
+          <a:ln/>
+        </p:spPr>
+        <p:txBody>
+          <a:bodyPr wrap="none" lIns="0" tIns="0" rIns="0" bIns="0" rtlCol="0" anchor="t"/>
+          <a:lstStyle/>
+          <a:p>
+            <a:pPr algn="l" indent="0" marL="0">
+              <a:lnSpc>
+                <a:spcPct val="105000"/>
+              </a:lnSpc>
+              <a:buNone/>
+            </a:pPr>
+            <a:r>
+              <a:rPr lang="zh-CN" altLang="en-US" sz="1800" dirty="0">
+                <a:solidFill>
+                  <a:srgbClr val="9B3D32"/>
+                </a:solidFill>
+                <a:latin typeface="Microsoft YaHei" pitchFamily="34" charset="0"/>
+                <a:ea typeface="Microsoft YaHei" pitchFamily="34" charset="-122"/>
+                <a:cs typeface="Microsoft YaHei" pitchFamily="34" charset="-120"/>
+              </a:rPr>
+              <a:t>由人大产生</a:t>
+            </a:r>
+            <a:endParaRPr lang="zh-CN" sz="1800" dirty="0"/>
+          </a:p>
+        </p:txBody>
+      </p:sp>
+      <p:sp>
+        <p:nvSpPr>
+          <p:cNvPr id="14" name="Shape 12"/>
+          <p:cNvSpPr/>
+          <p:nvPr/>
+        </p:nvSpPr>
+        <p:spPr>
+          <a:xfrm>
+            <a:off x="804672" y="4553712"/>
+            <a:ext cx="3730752" cy="914400"/>
           </a:xfrm>
           <a:prstGeom prst="rect">
             <a:avLst/>
@@ -20893,14 +20969,14 @@
       </p:sp>
       <p:sp>
         <p:nvSpPr>
-          <p:cNvPr id="13" name="Text 11"/>
-          <p:cNvSpPr/>
-          <p:nvPr/>
-        </p:nvSpPr>
-        <p:spPr>
-          <a:xfrm>
-            <a:off x="969264" y="4593336"/>
-            <a:ext cx="3108960" cy="902208"/>
+          <p:cNvPr id="15" name="Text 13"/>
+          <p:cNvSpPr/>
+          <p:nvPr/>
+        </p:nvSpPr>
+        <p:spPr>
+          <a:xfrm>
+            <a:off x="969264" y="4645152"/>
+            <a:ext cx="3401568" cy="768096"/>
           </a:xfrm>
           <a:prstGeom prst="rect">
             <a:avLst/>
@@ -20927,7 +21003,7 @@
                 <a:ea typeface="Microsoft YaHei" pitchFamily="34" charset="-122"/>
                 <a:cs typeface="Microsoft YaHei" pitchFamily="34" charset="-120"/>
               </a:rPr>
-              <a:t>行政、监察、</a:t>
+              <a:t>行政、监察机关</a:t>
             </a:r>
             <a:endParaRPr lang="zh-CN" sz="2400" dirty="0"/>
           </a:p>
@@ -20955,14 +21031,14 @@
       </p:sp>
       <p:sp>
         <p:nvSpPr>
-          <p:cNvPr id="14" name="Text 12"/>
-          <p:cNvSpPr/>
-          <p:nvPr/>
-        </p:nvSpPr>
-        <p:spPr>
-          <a:xfrm>
-            <a:off x="4617720" y="4565904"/>
-            <a:ext cx="6675120" cy="966216"/>
+          <p:cNvPr id="16" name="Text 14"/>
+          <p:cNvSpPr/>
+          <p:nvPr/>
+        </p:nvSpPr>
+        <p:spPr>
+          <a:xfrm>
+            <a:off x="4919472" y="4645152"/>
+            <a:ext cx="6364224" cy="777240"/>
           </a:xfrm>
           <a:prstGeom prst="rect">
             <a:avLst/>
@@ -20989,15 +21065,35 @@
                 <a:ea typeface="Microsoft YaHei" pitchFamily="34" charset="-122"/>
                 <a:cs typeface="Microsoft YaHei" pitchFamily="34" charset="-120"/>
               </a:rPr>
-              <a:t>由人民代表大会产生，对它负责，受它监督。</a:t>
+              <a:t>这些机关对产生它的人大</a:t>
             </a:r>
             <a:endParaRPr lang="zh-CN" sz="2400" dirty="0"/>
           </a:p>
-        </p:txBody>
-      </p:sp>
-      <p:sp>
-        <p:nvSpPr>
-          <p:cNvPr id="15" name="Text 13"/>
+          <a:p>
+            <a:pPr algn="l" indent="0" marL="0">
+              <a:lnSpc>
+                <a:spcPct val="105000"/>
+              </a:lnSpc>
+              <a:buNone/>
+            </a:pPr>
+            <a:r>
+              <a:rPr lang="zh-CN" altLang="en-US" sz="2400" dirty="0">
+                <a:solidFill>
+                  <a:srgbClr val="2B302F"/>
+                </a:solidFill>
+                <a:latin typeface="Microsoft YaHei" pitchFamily="34" charset="0"/>
+                <a:ea typeface="Microsoft YaHei" pitchFamily="34" charset="-122"/>
+                <a:cs typeface="Microsoft YaHei" pitchFamily="34" charset="-120"/>
+              </a:rPr>
+              <a:t>负责，受该人大监督。</a:t>
+            </a:r>
+            <a:endParaRPr lang="zh-CN" sz="2400" dirty="0"/>
+          </a:p>
+        </p:txBody>
+      </p:sp>
+      <p:sp>
+        <p:nvSpPr>
+          <p:cNvPr id="17" name="Text 15"/>
           <p:cNvSpPr/>
           <p:nvPr/>
         </p:nvSpPr>
@@ -21031,7 +21127,7 @@
                 <a:ea typeface="Microsoft YaHei" pitchFamily="34" charset="-122"/>
                 <a:cs typeface="Microsoft YaHei" pitchFamily="34" charset="-120"/>
               </a:rPr>
-              <a:t>连线要读出产生、负责和监督，不能只认机关名称。</a:t>
+              <a:t>箭头只表产生；负责与监督看右侧明确的主客体。</a:t>
             </a:r>
             <a:endParaRPr lang="zh-CN" sz="2400" dirty="0"/>
           </a:p>
@@ -21039,7 +21135,7 @@
       </p:sp>
       <p:sp>
         <p:nvSpPr>
-          <p:cNvPr id="16" name="Text 14"/>
+          <p:cNvPr id="18" name="Text 16"/>
           <p:cNvSpPr/>
           <p:nvPr/>
         </p:nvSpPr>
@@ -21073,7 +21169,7 @@
                 <a:ea typeface="Microsoft YaHei" pitchFamily="34" charset="-122"/>
                 <a:cs typeface="Microsoft YaHei" pitchFamily="34" charset="-120"/>
               </a:rPr>
-              <a:t>现行宪法第2条、第3条前三款（图为关系提要）</a:t>
+              <a:t>宪法第2、3条；选举层级未展开，非各级均全民直选</a:t>
             </a:r>
             <a:endParaRPr lang="zh-CN" sz="1200" dirty="0"/>
           </a:p>
@@ -21081,7 +21177,7 @@
       </p:sp>
       <p:sp>
         <p:nvSpPr>
-          <p:cNvPr id="17" name="Text 15"/>
+          <p:cNvPr id="19" name="Text 17"/>
           <p:cNvSpPr/>
           <p:nvPr/>
         </p:nvSpPr>

--- a/materials/第1讲整合试讲主版本/第1讲_宪法总论_整合试讲主版本.pptx
+++ b/materials/第1讲整合试讲主版本/第1讲_宪法总论_整合试讲主版本.pptx
@@ -5,7 +5,7 @@
     <p:sldMasterId id="2147483648" r:id="rId1"/>
   </p:sldMasterIdLst>
   <p:notesMasterIdLst>
-    <p:notesMasterId r:id="rId38"/>
+    <p:notesMasterId r:id="rId40"/>
   </p:notesMasterIdLst>
   <p:sldIdLst>
     <p:sldId id="256" r:id="rId2"/>
@@ -44,6 +44,8 @@
     <p:sldId id="289" r:id="rId35"/>
     <p:sldId id="290" r:id="rId36"/>
     <p:sldId id="291" r:id="rId37"/>
+    <p:sldId id="292" r:id="rId38"/>
+    <p:sldId id="293" r:id="rId39"/>
   </p:sldIdLst>
   <p:sldSz cx="12192000" cy="6858000"/>
   <p:notesSz cx="6858000" cy="12192000"/>
@@ -538,7 +540,8 @@
             <a:r>
               <a:rPr lang="en-US" dirty="0"/>
               <a:t>01｜宪法总论
-核心/条件性安排：核心；页预算2.5分钟
+上节（本节0—45分钟）｜本节约0—2.1分钟
+页定位按180汉字/分钟与计划独立活动粗列，不是实测；口读校正、多语速、活动情景及调整路径见双45分钟容量报告。
 1. 逐字讲述
 先看这张照片。1954年9月15日，第一届全国人民代表大会第一次会议的代表走进中南海怀仁堂。五天以后，这次大会通过了新中国第一部宪法。照片记录的是入场，宪法的通过发生在9月20日。
 2. 活动，不朗读（0.5分钟）
@@ -646,7 +649,8 @@
             <a:r>
               <a:rPr lang="en-US" dirty="0"/>
               <a:t>10｜权力怎样行使，必须看见人的权利
-核心/条件性安排：核心；页预算3分钟
+上节（本节0—45分钟）｜本节约24.8—28.2分钟
+页定位按180汉字/分钟与计划独立活动粗列，不是实测；口读校正、多语速、活动情景及调整路径见双45分钟容量报告。
 1. 逐字讲述
 第33条第3款写着很短一句：国家尊重和保障人权。它并不因为短，就只是装饰性的态度。它直接对国家活动提出要求：组织权力、制定规则和具体履职，都需要认真对待人的权利。
 2. 活动，不朗读（0.5分钟）
@@ -656,6 +660,8 @@
 4. 逐字讲述
 这里也分清两个读音相同的词。国家“权力”涉及公共事务的组织与职权行使；公民“权利”涉及依法应当受到保障的利益和请求资格。机关有职权，不意味着可以任意处置人的权利；人有权利，也并非每项具体请求都无须条件。我们要看相应规范如何安排二者。
 5. 逐字讲述
+如果有人担心，只强调权利，会不会让国家机关什么都不能做，这个问题要用刚才的两个词来回答。保障人的安全、维持共同生活，本身可能需要国家积极履职；但一项工作有公共目的，还不足以说明任何手段都被允许。应当继续说明机关有什么职权、措施适用于哪些情形、怎样依法保护受影响的人。我们既不能把保障理解为国家一概退出，也不能把积极履职理解为权限无限。这个区别将在下半节的资料缺口题中用到。
+6. 逐字讲述
 后半堂的赔偿例子就是其中一种联系：国家工作人员行使职权造成法定侵害时，法律怎样回应受害人的请求。它能说明救济的一面，人权保障还有许多内容，第五讲再作系统展开。现在把它与刚才的权力归属、法治和监督放在一起。
 教师备查，不朗读
 尊重与保障为入门说明，不将义务类型作完备二分；基本权利主体、效力与限制留第5讲。
@@ -753,7 +759,8 @@
             <a:r>
               <a:rPr lang="en-US" dirty="0"/>
               <a:t>11｜五项原则，共同说明国家权力怎样运行
-核心/条件性安排：核心；页预算2.5分钟
+上节（本节0—45分钟）｜本节约28.2—30.2分钟
+页定位按180汉字/分钟与计划独立活动粗列，不是实测；口读校正、多语速、活动情景及调整路径见双45分钟容量报告。
 1. 逐字讲述
 现在可以把教材的五项基本原则连起来理解：坚持中国共产党的领导、人民主权、社会主义法治、尊重和保障人权、权力监督与制约。这些名称是对宪法内容的学理归纳，读懂它们还要回到条文和制度。
 2. 逐字讲述
@@ -858,7 +865,8 @@
             <a:r>
               <a:rPr lang="en-US" dirty="0"/>
               <a:t>12｜任务1：把两处条文连成一个解释
-核心/条件性安排：核心；页预算2.5分钟
+上节（本节0—45分钟）｜本节约30.2—32.3分钟
+页定位按180汉字/分钟与计划独立活动粗列，不是实测；口读校正、多语速、活动情景及调整路径见双45分钟容量报告。
 1. 逐字讲述
 请做任务1。选择第2、3、33条中的至少两处，解释人民通过国家机关行使权力，为什么还要规定负责、监督和人权保障。可以先写两句话，也可以画一条带动词的关系，再向同桌解释。
 2. 活动，不朗读（1.75分钟）
@@ -959,7 +967,8 @@
             <a:r>
               <a:rPr lang="en-US" dirty="0"/>
               <a:t>13｜任务1讲评：归属、组织与责任需要一起说明
-核心/条件性安排：核心；页预算2.25分钟
+上节（本节0—45分钟）｜本节约32.3—34.1分钟
+页定位按180汉字/分钟与计划独立活动粗列，不是实测；口读校正、多语速、活动情景及调整路径见双45分钟容量报告。
 1. 活动，不朗读（0.5分钟）
 邀请一名学生说明所选两处条文，约30秒。
 2. 逐字讲述
@@ -1064,7 +1073,8 @@
             <a:r>
               <a:rPr lang="en-US" dirty="0"/>
               <a:t>14｜根本规则可以改变，但修改有特别要求
-核心/条件性安排：核心；页预算3分钟
+上节（本节0—45分钟）｜本节约34.1—39.1分钟
+页定位按180汉字/分钟与计划独立活动粗列，不是实测；口读校正、多语速、活动情景及调整路径见双45分钟容量报告。
 1. 逐字讲述
 宪法具有根本地位，并不意味着永远不能修改。国家生活会发展，根本规则也保留依法调整的可能。我国第64条设置了比法律和其他议案更严格的修宪通过门槛。这里先比较同一个机关、同一个分母，不展开完整程序。
 2. 活动，不朗读（0.75分钟）
@@ -1072,11 +1082,21 @@
 3. 逐字讲述
 宪法修改由全国人大以全体代表三分之二以上的多数通过；法律和其他议案由全国人大以全体代表过半数通过。注意分母都是全体代表，并不是当天举手者或已经投票者。三分之二以上包括恰好三分之二，过半数不包括恰好一半。
 4. 逐字讲述
-修改根本规则影响国家制度和基本权利，需要更高程度的同意。这种特别程序既维护稳定，也保留调整的可能。稳定不是拒绝改变，而是让重大改变依照更严格的共同程序作出。
+为什么修改根本规则要获得更广泛的支持？一种理由是，它改变的可能不只是一项眼前安排，而是后来许多决定共同遵循的制度前提。要求更广泛同意，有助于使重大改变经过更审慎的考虑，减少规则随一时意见反复变动的风险。这里说明的是一种制度理由，不是声称我们已经证明三分之二在所有场合最优。
 5. 逐字讲述
+现在认真看另一面的理由。规则可能需要改正，社会条件也会发生变化。主张保留调整可能的人，并不必然轻视宪法；他可能恰恰担心，不合适的规则继续存在，同样会给国家活动和人的权利带来代价。提高门槛能够使改变更难，却不会自动使维持现状更正确。
+6. 逐字讲述
+只作一个明确的课堂假设：其他条件相同，把表决门槛从三分之二提高到全体一致。一方面，更少有人能在强烈反对中被迫接受改变；另一方面，即使很多代表已认为有必要调整，少数反对也足以阻止改变。这不是现实会议的故事，而是门槛条件变化后的逻辑结果。它说明选择门槛须同时面对轻率改变与难以纠正两种风险，不能只说越高越好。
+7. 逐字讲述
+回到我国条文，能够确定的是现行制度要求特别多数，同时保留依法修改的通道。支持比例解决按什么程序形成决定的问题；新内容是否有充分理由，还要阅读内容和材料。我们没有用这段一般分析替代精确比例的历史研究，也不在这里开始设计另一个比例。下面先辨认已经生效的门槛，再记录判断更高门槛时不能漏掉的另一面。
+8. 逐字讲述
 材料中还保留了修宪提议主体，便于看到完整原款。本课先用通过门槛理解程序特殊性，提议、审议和历次修改留第二讲。现在用一个很短的数字条件检查我们有没有真正看清。
 教师备查，不朗读
 不把全国人大门槛概括成所有机关立法的唯一规则；两款原文和提议条件见材料C。
+节内短讲C4：修改门槛及其两面理由
+替换本页全部口述；本页既定独立阅读/学生回应仍执行。含阅读的页先依原任务阅读，再连续讲短版，不再读主版同页讲述。
+以下短讲替换本页全部口述；不要与上面的主讲重复朗读。
+刚才对读了第64条两款。分母同为全国人大全体代表，修宪须三分之二以上，法律和其他议案须过半数。特别多数要求更广泛支持，可用以减少根本规则轻率变动的风险。但规则也可能需要纠正，提高门槛会让必要调整更难；更难改变不能独自证明维持现状更正确。只在其他条件相同的假设下，改成全体一致，会使更少的反对意见也足以阻止改变。这是条件分析，不是我国实际会议故事，更没有证明三分之二在所有制度中唯一最优。我国现行制度同时保留稳定要求和依法修改的通道。完整程序留第二讲，下面先识别已生效的门槛，并写出不能忽略的一项代价。
 本页出处
 宪法第64条两款（屏幕为通过要求节录）
 来源及定位
@@ -1171,11 +1191,12 @@
             <a:r>
               <a:rPr lang="en-US" dirty="0"/>
               <a:t>15｜任务2：同样60%赞成，结果一样吗？
-核心/条件性安排：核心；页预算1.25分钟
+上节（本节0—45分钟）｜本节约39.1—40.9分钟
+页定位按180汉字/分钟与计划独立活动粗列，不是实测；口读校正、多语速、活动情景及调整路径见双45分钟容量报告。
 1. 逐字讲述
-在均由全国人大表决、其他程序条件符合的设定下，全体代表百分之六十赞成，宪法修改与法律和其他议案能否分别通过？请直接依据两款原文说明。
-2. 活动，不朗读（0.6666667分钟）
-独立判断40秒，只记录两项结论与门槛。
+在均由全国人大表决、其他程序条件符合的设定下，全体代表百分之六十赞成，宪法修改与法律和其他议案能否分别通过？请直接依据两款原文说明。 再写一个短理由：为什么不能只凭“更难修改”，就认定一种门槛一定更好？
+2. 活动，不朗读（1.25分钟）
+独立作答75秒：先给两项门槛结论，再写出提高门槛须考虑的一项代价。
 教师备查，不朗读
 不得提前显示下一页结果。题目是教学设定，不指真实会议。
 本页出处
@@ -1272,18 +1293,20 @@
             <a:r>
               <a:rPr lang="en-US" dirty="0"/>
               <a:t>16｜回看第一学时：“根本”已经有了哪些内容？
-核心/条件性安排：核心；页预算2分钟
-本学时另有2分钟机动，可前移到实际指读、追问或补充理由处，不新增固定讲述。
+上节（本节0—45分钟）｜本节约40.9—43.1分钟
+页定位按180汉字/分钟与计划独立活动粗列，不是实测；口读校正、多语速、活动情景及调整路径见双45分钟容量报告。
 1. 逐字讲述
 在题目给定的条件下，宪法修改不能通过，法律和其他议案可以通过。关键不是笼统地说“多数赞成”，而是分清要求哪一种多数。
 2. 逐字讲述
+关于门槛的理由，能够说明避免轻率改变，同时指出必要调整可能更难，就已经把两面的判断接起来了。若有人更重视其中一种风险，还须交代所讨论的条件；不能只把另一方说成不尊重宪法。现行规则仍按第六十四条适用，评价理由不能自行改变通过门槛。
+3. 逐字讲述
 回到开场，“根本法”现在就不只是最重要三个字。我们已经看到它规定国家的根本制度和任务，组织国家权力，确认基本权利；立法本身也在这个框架内，其他规范不得抵触；修改根本规则又有特别程序。
-3. 逐字讲述
+4. 逐字讲述
 这三个方面相互联系，但各自都有依据。你若能把其中一项解释给别人，而不只列出名称，今天的概念就已经开始展开。下半堂要处理的疑问是：既然宪法有最高效力，为什么国家生活仍需要大量普通法律？我们把这个问题放到一项具体的赔偿请求中。
-4. 活动，不朗读（0.3分钟）
+5. 活动，不朗读（0.3分钟）
 学生在材料页边各写一个词，概括自己还没说清的一层关系；收回注意后下课。课间另计。
 教师备查，不朗读
-本页常规流程累计43分钟；本学时另留2分钟供实际指读、追问与回看，按需穿插，不另加内容。若每学时50分钟，此处转附页E1（第32—33页）共5分钟，再进入课间。
+上节收束后课间另计。若节内选用32—33页，须按容量报告的具体路径与检查点调用，不能超出本节45分钟。
 本页出处
 任务2讲评；第一学时收束
 来源及定位
@@ -1378,7 +1401,8 @@
             <a:r>
               <a:rPr lang="en-US" dirty="0"/>
               <a:t>17｜一个赔偿请求，为什么要读两部法律？
-核心/条件性安排：核心；页预算2.75分钟
+下节（本节0—45分钟）｜本节约0—2.2分钟
+页定位按180汉字/分钟与计划独立活动粗列，不是实测；口读校正、多语速、活动情景及调整路径见双45分钟容量报告。
 1. 逐字讲述
 上半堂从国家的根本安排走到权力的组织和约束。现在把问题放到一位公民身上：如果他受到国家机关和工作人员侵犯权利的损失，宪法怎样对待他的请求？请先不急着找办理机关，读第41条第三款。
 2. 活动，不朗读（0.75分钟）
@@ -1483,7 +1507,8 @@
             <a:r>
               <a:rPr lang="en-US" dirty="0"/>
               <a:t>18｜“根据宪法”，先告诉我们什么？
-核心/条件性安排：核心；页预算3分钟
+下节（本节0—45分钟）｜本节约2.2—4.4分钟
+页定位按180汉字/分钟与计划独立活动粗列，不是实测；口读校正、多语速、活动情景及调整路径见双45分钟容量报告。
 1. 逐字讲述
 把宪法第41条与国家赔偿法第1条并在一起。第1条写出两个目的：保障依法取得国家赔偿的权利，促进国家机关依法行使职权。最后写明根据宪法制定。赔偿不是脱离国家权力运行的另一件事，对侵害依法承担赔偿义务，也是规范权力运行的一部分。
 2. 活动，不朗读（0.75分钟）
@@ -1589,7 +1614,8 @@
             <a:r>
               <a:rPr lang="en-US" dirty="0"/>
               <a:t>19｜法律先回答：哪些情形进入这项赔偿？
-核心/条件性安排：核心；页预算4分钟
+下节（本节0—45分钟）｜本节约4.4—7.9分钟
+页定位按180汉字/分钟与计划独立活动粗列，不是实测；口读校正、多语速、活动情景及调整路径见双45分钟容量报告。
 1. 逐字讲述
 国家赔偿法第2条先把本法赔偿权与行使职权、法定侵权情形、合法权益及损害联系起来。材料D保留了这段范围说明。我们现在聚焦行政赔偿中的一项情形，请读第3条起句和第一项。
 2. 活动，不朗读（1.5分钟）
@@ -1602,6 +1628,10 @@
 把条件看清不是在回避保障权利。条件本来就是具体制度的一部分。我们要做的是把事实和规则连接起来，既不把每一个不满都直接宣布为同一种赔偿，也不在事实已经给足时一律推说无法判断。接着还有第二层：即使属于赔偿情形，由谁依法回应？
 教师备查，不朗读
 本页正文较长，允许22磅引文；不得截去行政职权条件。2010年已修改第2条表述，不能把全法一律说成违法归责。
+节内短讲C5：赔偿情形的必要条件
+替换本页全部口述；本页既定独立阅读/学生回应仍执行。含阅读的页先依原任务阅读，再连续讲短版，不再读主版同页讲述。
+以下短讲替换本页全部口述；不要与上面的主讲重复朗读。
+材料D的两处规定要连起来看。第2条把本法赔偿与行使职权、法定侵害及损害相联系；第3条这一项具体规定行政职权中的违法拘留。不能只看到公安机关就下结论，必须看职权性质和事实。本课不把行政赔偿的一项标准套到全部刑事赔偿。任务三已经给足的条件可以支持有限判断；如果关键事实未明，则应明确查什么，而非宣布任何不满都应赔。再看义务由谁承担。
 本页出处
 国家赔偿法第2条第1款、第3条起句及第1项；其他项略
 来源及定位
@@ -1696,7 +1726,8 @@
             <a:r>
               <a:rPr lang="en-US" dirty="0"/>
               <a:t>02｜从过渡安排，到持续的共同规则
-核心/条件性安排：核心；页预算3.5分钟
+上节（本节0—45分钟）｜本节约2.1—4.9分钟
+页定位按180汉字/分钟与计划独立活动粗列，不是实测；口读校正、多语速、活动情景及调整路径见双45分钟容量报告。
 1. 逐字讲述
 先把两份历史文本放在一起。1949年的共同纲领发挥了临时宪法的作用。第十三条已经考虑到全国人大召开以前怎样安排国家权力，明确由政协全体会议执行全国人大的职权。请看“以前”这个词，它告诉我们：当时的安排面对的是一个过渡阶段。
 2. 活动，不朗读（0.75分钟）
@@ -1709,6 +1740,10 @@
 这个历史对照帮助我们提出问题，但不替代对今天条文的理解。我们现在回到2018年修正的现行宪法，看看持续的共同规则具体规定了什么。完整的制宪发展过程，下一讲再展开。
 教师备查，不朗读
 屏幕第一段为历史条文提要，有简称，不冒充逐字引文；所用原句见学生材料。起草委员会与全国人大审议通过不同，若被问及据旧来源说明，不展开起草年代线。
+节内短讲C1：历史对照
+替换本页全部口述；本页既定独立阅读/学生回应仍执行。含阅读的页先依原任务阅读，再连续讲短版，不再读主版同页讲述。
+以下短讲替换本页全部口述；不要与上面的主讲重复朗读。
+共同纲领第十三条规定，在普选的全国人大召开以前，由政协全体会议执行全国人大的职权。这里已有过渡性规则。1954年全国人大召开，当年宪法第二十一条确认它是最高国家权力机关，说明过渡安排进一步展开为国家制度。宪法不是给一本更重要的书换封面，而是把根本安排写成后来国家活动应当遵循的共同规范。历史对照帮助我们提出问题，现行效力仍须回到今天的宪法，完整制宪史留下一讲。
 本页出处
 共同纲领第13条提要；1954年宪法第21条原文
 来源及定位
@@ -1806,25 +1841,42 @@
             <a:r>
               <a:rPr lang="en-US" dirty="0"/>
               <a:t>20｜法律还回答：谁依法承担赔偿义务？
-核心/条件性安排：核心；页预算3分钟
+下节（本节0—45分钟）｜本节约7.9—13.7分钟
+页定位按180汉字/分钟与计划独立活动粗列，不是实测；口读校正、多语速、活动情景及调整路径见双45分钟容量报告。
 1. 逐字讲述
 再看第7条第一款。相应行政机关成为赔偿义务机关。这个规定并不只是让我们多记一个机关名称，它给权利请求确定了制度上的承担者。
-2. 活动，不朗读（0.75分钟）
-读该款，分别标出前面的行为条件与最后的义务主体。
+2. 活动，不朗读（1.25分钟）
+先读第7条第1款标记义务主体，再对读附页第16条第1款，圈出过错条件与赔偿后的顺序，约75秒。
 3. 逐字讲述
 假设一位工作人员态度友善，愿意耐心接待，这当然值得肯定。但当相应法定条件已经成立时，受害人提出请求的根据，不能只取决于他有没有碰上一位愿意额外帮忙的人。法律把义务落实到机关，就使请求能够依据规则提出，而不是到处寻找私人照顾。
 4. 逐字讲述
 这也改变了看问题的位置。我们不只问工作人员有没有善意，还要问相应机关是否依法承担赔偿义务。即使更换了具体承办人，机关也不能因此摆脱法定义务。友善可以使办理更体贴，法定职责则使办理成为应当承担的事。
 5. 逐字讲述
+这里还可能有一个疑问：具体侵害是工作人员造成的，为什么让机关赔偿，不直接只找那个人？“谁造成侵害谁承担责任”有追究责任的合理关切。若只回答为了方便受害人，就没有充分回应这个疑问。关键还在于题设中工作人员正在以机关名义行使行政职权，这同他在私人交往中造成损害不同。
+6. 逐字讲述
+受害人面对的是国家职权的行使，法律据此把对外赔偿义务落实到相应机关。若让这种请求完全依赖个人是否愿意赔、能否赔，机关行使职权所产生的责任就可能被推回私人关系。这里是在解释第七条安排的意义，不是说任何有机关身份的人的任何行为都由国家赔偿；职权性质和法定侵害条件仍要成立。
+7. 逐字讲述
+机关承担赔偿义务，也不等于工作人员的个人责任被抹掉。附页的第十六条第一款另规定，机关赔偿损失后，对有故意或者重大过失的工作人员等，应当责令其承担部分或者全部赔偿费用。注意两个限制：这里有故意或者重大过失的条件，也有机关赔偿损失后的顺序，不能讲成只要赔偿就一律由个人全额承担。
+8. 逐字讲述
+两组规定分别处理对外保障请求和内部追究责任。将它们分开，既不会因强调受害人的请求就说责任人员一概免责，也不会因希望追究个人就取消机关已经负有的赔偿义务。公共责任和个人责任不是只能保留一个。具体追偿程序今天不展开，我们只借这一个区别看清普通法律怎样继续组织宪法上的赔偿要求。
+9. 逐字讲述
 这句话要连着前面的条件理解：依法承担赔偿义务，不等于每个请求人主张的全部事项都当然成立。现在我们已经有了情形和义务机关两项信息，给定事实以后，就能作一个有根据的有限判断。
 教师备查，不朗读
 凝练段落为课程原创，表达选择参研究/02。机关对外赔偿与第16条追偿、处分等不同，不据此说工作人员免责。
+第16条第1款只用于说明机关对外赔偿不等于工作人员一概免责；不展开追偿程序，不以个人过错作为本例赔偿权的一般前提。
+节内短讲C6：机关义务与个人责任
+替换本页全部口述；本页既定独立阅读/学生回应仍执行。含阅读的页先依原任务阅读，再连续讲短版，不再读主版同页讲述。
+以下短讲替换本页全部口述；不要与上面的主讲重复朗读。
+第7条第1款确定了义务主体。相应行政机关是赔偿义务机关，受害人的请求不取决于某个承办人是否愿意额外照顾；换人也不会取消机关义务。友善有价值，但不能替代法定义务。为什么具体人员侵害却由机关赔？本例是以机关名义行使行政职权，受害人面对的是国家职权行使，不能把对外责任全部推回私人关系。同时，机关赔偿不是个人免责：第16条第1款规定，赔偿后对有故意或者重大过失的工作人员等责令承担部分或者全部费用。条件和顺序不能省略，也不是一律个人全赔。对外保障请求与内部追究责任分别安排，不必二选一；具体追偿程序不在本讲展开。
 本页出处
-国家赔偿法第7条第1款
+国家赔偿法第7条第1款、第16条第1款；机关义务与个人责任分开说明
 来源及定位
 国家赔偿法
 https://fgk.chinatax.gov.cn/zcfgk/c100009/c5211800/content.html
-第7条第1款</a:t>
+第7条第1款
+国家赔偿法
+https://fgk.chinatax.gov.cn/zcfgk/c100009/c5211800/content.html
+第7条第1款、第16条第1款；2026-10-06核</a:t>
             </a:r>
             <a:endParaRPr lang="en-US" dirty="0"/>
           </a:p>
@@ -1913,7 +1965,8 @@
             <a:r>
               <a:rPr lang="en-US" dirty="0"/>
               <a:t>21｜把已经确认的权利，安排成可以办理的请求
-核心/条件性安排：核心；页预算2.25分钟
+下节（本节0—45分钟）｜本节约13.7—15.3分钟
+页定位按180汉字/分钟与计划独立活动粗列，不是实测；口读校正、多语速、活动情景及调整路径见双45分钟容量报告。
 1. 逐字讲述
 现在把刚才的两条接回第41条。普通法律不是把“有赔偿权”重复几次，它增加了可以据以处理请求的信息：哪些情形、谁负义务，以及请求怎样提出。
 2. 逐字讲述
@@ -2021,7 +2074,8 @@
             <a:r>
               <a:rPr lang="en-US" dirty="0"/>
               <a:t>22｜任务3：给定事实，能作哪些判断？
-核心/条件性安排：核心；页预算2.25分钟
+下节（本节0—45分钟）｜本节约15.3—17.2分钟
+页定位按180汉字/分钟与计划独立活动粗列，不是实测；口读校正、多语速、活动情景及调整路径见双45分钟容量报告。
 1. 逐字讲述
 任务3的事实已经给定：县公安局工作人员以本机关名义，在行使行政职权时违法拘留甲，造成其人身自由受到侵害。违法性在题目中已查明。请依据第3、7条判断甲的赔偿权和本例义务机关。
 2. 活动，不朗读（1.5分钟）
@@ -2122,7 +2176,8 @@
             <a:r>
               <a:rPr lang="en-US" dirty="0"/>
               <a:t>23｜任务3讲评：每一步判断都能回到依据
-核心/条件性安排：核心；页预算2分钟
+下节（本节0—45分钟）｜本节约17.2—18.8分钟
+页定位按180汉字/分钟与计划独立活动粗列，不是实测；口读校正、多语速、活动情景及调整路径见双45分钟容量报告。
 1. 活动，不朗读（0.3333333分钟）
 请一名学生简短说明两项依据，约20秒。
 2. 逐字讲述
@@ -2225,13 +2280,14 @@
             <a:r>
               <a:rPr lang="en-US" dirty="0"/>
               <a:t>24｜刚才一直在读普通法律，宪法还在哪里？
-核心/条件性安排：核心；页预算1.5分钟
+下节（本节0—45分钟）｜本节约18.8—20.6分钟
+页定位按180汉字/分钟与计划独立活动粗列，不是实测；口读校正、多语速、活动情景及调整路径见双45分钟容量报告。
 1. 逐字讲述
 刚才处理请求时，我们一直在读国家赔偿法。那么宪法是不是只剩一段背景？既然还有细节要由法律规定，宪法的效力是不是也要等法律来决定？
 2. 逐字讲述
-先不急着听教师的解释。请回到第5条、第41条，再回看刚才帮助我们找到赔偿情形和义务机关的两条法律。下一页用这些材料自己组织一个回答。
-3. 活动，不朗读（0.5分钟）
-回看指定条文，约30秒。只定位材料，不在此页先给完整关系解释。
+先不急着听教师解释。请回到第5条、第41条，再看帮助我们找到情形和义务机关的法律，并补读附页第12条。下一页用这些材料组织回答，说明办理条件和权利保障是不是只能二选一。
+3. 活动，不朗读（1分钟）
+回看第5、41条和第3、7条，再读附页第12条节录，圈出信息要求及书写确有困难时的安排，共1分钟。只定位材料，不预讲完整关系。
 教师备查，不朗读
 本页保留真实疑问及作答所需条文定位，完整关系讲解集中在学生尝试之后的第26页；不要求无材料猜答案。
 本页出处
@@ -2331,9 +2387,10 @@
             <a:r>
               <a:rPr lang="en-US" dirty="0"/>
               <a:t>25｜任务4：宪法在这里究竟还约束什么？
-核心/条件性安排：核心；页预算3.75分钟
+下节（本节0—45分钟）｜本节约20.6—24分钟
+页定位按180汉字/分钟与计划独立活动粗列，不是实测；口读校正、多语速、活动情景及调整路径见双45分钟容量报告。
 1. 逐字讲述
-用第5条和第41条说明宪法的约束，再举一项国家赔偿法增加的安排，解释为什么两种规范都需要。可以按自己的顺序写出理由。
+请先用第5条和第41条说明宪法约束，再举一项国家赔偿法增加的安排。接着回应一个备课时提出的主张：为了保障权利，申请条件越少越好。结合第12条，写出它合理的关切，以及仍需补充的理由。两部分各写一两句即可。
 2. 活动，不朗读（3分钟）
 独立写作2分30秒；同桌各读一句并指出对方是否只给结论，约30秒。不要跳到下一页。
 教师备查，不朗读
@@ -2432,28 +2489,44 @@
             <a:r>
               <a:rPr lang="en-US" dirty="0"/>
               <a:t>26｜任务4讲评：把已有约束与新增安排同时说清
-核心/条件性安排：核心；页预算3分钟
+下节（本节0—45分钟）｜本节约24—30.2分钟
+页定位按180汉字/分钟与计划独立活动粗列，不是实测；口读校正、多语速、活动情景及调整路径见双45分钟容量报告。
 1. 活动，不朗读（1分钟）
 请两名学生各给一个理由或一个制度例子，总计约1分钟。依据实际回答选择短反馈或备查展开，不虚构错误。
 2. 逐字讲述
-把刚才的回答放回两组条文：第41条已经确认相应赔偿权，第5条约束普通法律；第7条再确定谁负赔偿义务。需要补充办理制度，并不表示宪法此前无效；已有最高效力，也没有替我们写完个案条件。法律继续回答怎样保障，仍须尊重宪法已经确认的保障要求。
+先看刚才回答中的两种依据。第41条已经确认相应赔偿权，第5条要求普通法律不得同宪法抵触；第3条、第7条又补出本例赔偿情形和义务机关。已有法律约束，与全部办理事项已经写完，是两个不同判断。这解释了为什么需要具体法律，不表示宪法要等法律许可才开始有效。
 3. 逐字讲述
-这道题要说明的是已有约束与新增安排怎样并存。接下来用两个短问题，看看这个关系是否取决于法律开头有没有写根据宪法。
+但如果只停在这两句话，还有一个困难没有解决：既然条文写着依照法律规定，立法者究竟能作多少选择？一边可能担心，允许法律规定条件，权利会不会被条件一点点掏空；另一边可能担心，不允许规定任何条件，就无法核实事实，无法区分应赔与不应赔。两种担心都涉及权利怎样可靠实现，不能把任何一方简单说成不重视保障。
+4. 逐字讲述
+先说为什么要有条件。请求是否涉及国家职权，发生了什么法定侵害，是否造成损害，需要有依据地判断。对这些问题作区分，不是因为权利不重要，而是因为不能把不同情况不加区别地都当成同一项请求。刚才任务三能得出结论，正是因为有关事实和规则已经给出。若只有一个不满的结果，没有职权、行为和损害的信息，结论就还不能同样作出。
+5. 逐字讲述
+再看条件为什么仍须受约束。普通法律可以安排如何核实，不能仅凭“由法律规定”这几个字，就把是否承认宪法已经确认的赔偿要求变成随意选择。假如某项安排让符合保障要求的人根本无法提出请求，就应继续追问它的理由与宪法依据，不能只说既然写进法律便不必再问。不过，具体一条规定是否抵触宪法，还要审查完整内容和适用情形；不是课堂上觉得不方便，就自行宣布法律失效。
+6. 逐字讲述
+实际法律里可以看到一种更细的安排。附页第十二条先要求提出具体请求、事实根据和理由，让处理有可核查的内容；同一条又规定，书写申请书确有困难的，可以由他人代书，也可以口头申请，由义务机关记入笔录。这里没有为了照顾困难就放弃记录事实，也没有为了统一书面形式就让不会写的人无法提出请求。
+7. 逐字讲述
+这段材料改变了我们对具体化的理解。具体法律并非总是在权利与程序之间二选一；它可以调整办理方式，使核实所需的信息与请求人的实际困难都进入安排。我们只能据此说明这一条增加了什么，不能凭一项较周全的办法宣布整部法律所有规定都已合宪、所有人都得到救济。今天不记忆申请书的栏目，更不进入期限和管辖。
+8. 逐字讲述
+因此，判断制度选择，要先辨认宪法已经要求什么，再看具体规则怎样组织条件、主体和办理办法，遇到可能排除保障的安排继续核查理由。尊重立法的选择，并不是把选择免于宪法约束；维护宪法约束，也不是假定每个细节只有一个预先写好的答案。下一页检验这个关系会不会因法律开头的一句话改变。
 教师备查，不朗读
-常规讲评先听实际回答。上面的短反馈用于已说清两层关系的回答；不要再逐段复读本页全部备查。若仍有混淆，用下段替代短反馈中对应部分，并从第二学时3分钟机动中调配，不额外叠加两套完整讲评。
-需要展开时：最高效力回答普通法律能不能排除或背离宪法要求；具体制度回答相应要求怎样在一个领域展开。规范已经有约束力，与全部办理细节已经写完，是两个不同判断。第41条已经确认相应赔偿权，对国家机关具有约束力；国家赔偿法第3条增加具体情形，第7条明确义务机关，第9条安排提出途径。需要后者，因为办理需要具体制度，而不是前者原本没有效力。
-另一面的限度：宪法已经确认权利，并不等于个案事实和结论全部齐备，仍须核查职权性质、法定侵害及损害等。法律有形成具体制度的空间，不能说所有细节早已逐字藏在第41条，也不能把依照法律规定理解成可以任意取消该宪法要求。
-按实际缺口回应：只说宪法最高，追问第41条确认什么、具体法律增加什么；只列第7条义务机关，追问第5条怎样约束这一安排。接受第3条或第9条准确例子，不要求统一学理措辞。
-保留主讲之外的完整理由供教师按需调用。不就宪法直接裁判依据作一概结论；立法形成空间的学理区别见来源记录。不把即时回答当作独立迁移已经成功。
+本页在任务4作答后集中一次讲评；主稿内的理由比较首次在此展开，不再整段重复旧备查。根据进度只选主讲或明确短讲分支之一。
+第12条所用段落为第1款起句/第2项及第2款，材料已给；只说明可办理制度与保障条件，不增加申请路线、期限、金额和管辖考核。
+假设安排让权利无法提出属于教学问题，不指称现行法已有此规定；一项程序有局限不等于课堂可作正式违宪宣告。
+节内短讲C7：已有约束与制度选择
+替换本页全部口述；本页既定独立阅读/学生回应仍执行。含阅读的页先依原任务阅读，再连续讲短版，不再读主版同页讲述。
+以下短讲替换本页全部口述；不要与上面的主讲重复朗读。
+把刚才任务四的回答放回条文。第41条已确认相应赔偿权，第5条约束普通法律；第3、7条增加具体情形和义务主体。需要办理制度，不表示宪法此前无效。真正的困难是：规定条件会不会掏空权利，不规定条件又怎样核实请求？两种担心都值得回应。职权、侵害和损害需要查明，不能不分情况一律下结论；但法律有安排条件的空间，也不能因此任意取消宪法要求。第12条要求具体请求、事实和理由，又允许书写确有困难者代书或口头申请、由机关记入笔录。它保留核实信息，同时调整办理方式回应困难。这里没有证明全部程序都完善，更不能由某种不便直接宣布违宪。判断应回到宪法要求、具体办法及其理由，不把受约束等同没有选择，也不把有选择等同可以不受约束。下一页看起首句能证明多少。
 本页出处
-任务4参考说明｜宪法第5、41条；国家赔偿法第3、7、9条
+宪法第5、41条；国家赔偿法第3、7、9条及第12条节录
 来源及定位
 中华人民共和国宪法（2018年修正）
 https://www.mofcom.gov.cn/xxgcxjpxsdzgtsshzysx/zywj/art/2018/art_45c1e16fe351469090d53e63178268c8.html
 第5、41条
 国家赔偿法
 https://fgk.chinatax.gov.cn/zcfgk/c100009/c5211800/content.html
-第3、7、9条</a:t>
+第3、7、9条
+国家赔偿法
+https://fgk.chinatax.gov.cn/zcfgk/c100009/c5211800/content.html
+第12条第1款起句、第2项与第2款；不教授期限和管辖</a:t>
             </a:r>
             <a:endParaRPr lang="en-US" dirty="0"/>
           </a:p>
@@ -2542,7 +2615,8 @@
             <a:r>
               <a:rPr lang="en-US" dirty="0"/>
               <a:t>27｜任务5：一部法律的开头，能决定多少？
-核心/条件性安排：核心；页预算2分钟
+下节（本节0—45分钟）｜本节约30.2—31.9分钟
+页定位按180汉字/分钟与计划独立活动粗列，不是实测；口读校正、多语速、活动情景及调整路径见双45分钟容量报告。
 1. 逐字讲述
 请给这两个问题各一句理由。第一部普通法律没有写根据宪法，第二部写了。起首句的有无，分别能让我们得到什么结论？
 2. 活动，不朗读（0.6666667分钟）
@@ -2647,7 +2721,8 @@
             <a:r>
               <a:rPr lang="en-US" dirty="0"/>
               <a:t>28｜任务6：目标正当，具体措施就有依据吗？
-核心/条件性安排：核心；页预算3分钟
+下节（本节0—45分钟）｜本节约31.9—34.7分钟
+页定位按180汉字/分钟与计划独立活动粗列，不是实测；口读校正、多语速、活动情景及调整路径见双45分钟容量报告。
 1. 逐字讲述
 这一次材料没有给足。只知道某机关为了公共利益限制乙的行动，没有说明机关身份、采取的措施和具体依据。请判断现有信息是否已经证明合法授权，再写出两类你真正需要知道的事实或规范。
 2. 活动，不朗读（2分钟）
@@ -2750,7 +2825,8 @@
             <a:r>
               <a:rPr lang="en-US" dirty="0"/>
               <a:t>29｜任务6讲评：把目标、权限、条件和程序分开
-核心/条件性安排：核心；页预算3分钟
+下节（本节0—45分钟）｜本节约34.7—38.2分钟
+页定位按180汉字/分钟与计划独立活动粗列，不是实测；口读校正、多语速、活动情景及调整路径见双45分钟容量报告。
 1. 活动，不朗读（0.75分钟）
 请一名学生给出一个具体缺口，另一名补充不同类别，总计约45秒。
 2. 逐字讲述
@@ -2760,9 +2836,15 @@
 4. 逐字讲述
 原则仍有法律意义。它约束和引导立法、履职和解释，但从一般要求到具体措施，需要完成相应的权限和事实判断。我们既不能让普通法律摆脱宪法，也不能让抽象原则自动授予任何具体措施的权限。
 5. 逐字讲述
+还有一种值得注意的解释：公共任务需要及时完成，如果每一步都追问权限，会不会影响履职？及时行动可能确有必要，但紧迫需要是否存在、法律为其安排了何种权限，仍须查明。说明一个目标值得追求，与说明某个机关可以采用某种手段，证明的是不同事情。缺少后者时，不能用前者填空；如果法律已经给了相应职权，也不能因为存在限制就断言完全不得采取措施。我们要核的是具体授权和条件，不是让机关用抽象目的自行创造权限，也不是要求它一概停止履职。
+6. 逐字讲述
 带着这两端的联系，最后再看宪法要求如何进入制度和实际工作。
 教师备查，不朗读
 不作正式违宪宣告或个案执法结论；具体机关职权与救济留后续课。
+节内短讲C8：正当目的与具体权限
+替换本页全部口述；本页既定独立阅读/学生回应仍执行。含阅读的页先依原任务阅读，再连续讲短版，不再读主版同页讲述。
+以下短讲替换本页全部口述；不要与上面的主讲重复朗读。
+现有材料能确定的是：为了公共利益不足以证明具体限制已有合法授权。还要查机关职权、措施种类、法律依据、启动事实和程序。未提供授权，不等于已经证明法律没有授权，也不能直接推出乙当然应获赔偿。任务三已经给足违法行政拘留等事实，因此能够作有限判断；本题缺关键材料，所以需要继续查。及时履职可能有必要，但它不能代替具体权限依据；法律若已设相应职权，也不能因为有限制就说机关一概不能行动。原则约束并指导权力行使，却不自动授予任何措施的权限。
 本页出处
 任务6参考说明；与任务3对照
 来源及定位
@@ -2857,7 +2939,8 @@
             <a:r>
               <a:rPr lang="en-US" dirty="0"/>
               <a:t>03｜先读国家要做什么，再读怎样组织国家
-核心/条件性安排：核心；页预算3.5分钟
+上节（本节0—45分钟）｜本节约4.9—7.8分钟
+页定位按180汉字/分钟与计划独立活动粗列，不是实测；口读校正、多语速、活动情景及调整路径见双45分钟容量报告。
 1. 逐字讲述
 请翻到材料A现行宪法部分。序言明确说，国家的根本任务是沿着中国特色社会主义道路，集中力量进行社会主义现代化建设。这里回答国家发展的根本方向。序言末段又说明，宪法规定国家的根本制度和根本任务，具有最高法律效力。先把这两处各自回答的问题分开。
 2. 活动，不朗读（1.25分钟）
@@ -2960,7 +3043,8 @@
             <a:r>
               <a:rPr lang="en-US" dirty="0"/>
               <a:t>30｜从根本要求，到依法办理和权利救济
-核心/条件性安排：核心；页预算3分钟
+下节（本节0—45分钟）｜本节约38.2—40.3分钟
+页定位按180汉字/分钟与计划独立活动粗列，不是实测；口读校正、多语速、活动情景及调整路径见双45分钟容量报告。
 1. 逐字讲述
 把今天的四个位置放在一起：宪法确认和约束，普通法律在约束下形成具体制度，国家机关依事实和规则履行职责，权利通过制度获得保障。本例最后这一环表现为法定赔偿救济，是权利保障的一种方式。
 2. 逐字讲述
@@ -2972,7 +3056,7 @@
 5. 逐字讲述
 我们今天所学的根本法，不会代替所有具体法律和履职工作，却为它们提供共同要求，也使我们有依据问：国家活动是否尊重了应当遵守的规则和人的权利？
 教师备查，不朗读
-图的箭头不是自动兑现，不是全部宪法实施的唯一路径。100分钟第二学时可在本页后转E2（第34—35页）5分钟，再返回第31页收束。
+图的箭头不是自动兑现，也不是全部宪法实施的唯一路径。34—35页仅供下节内按需调用，时间从本节实际余量或等量替换取得。
 本页出处
 宪法第5、41条；国办发〔1994〕106号（历史实施背景）
 来源及定位
@@ -3070,8 +3154,8 @@
             <a:r>
               <a:rPr lang="en-US" dirty="0"/>
               <a:t>31｜任务7：把国家的制度与个人的权利接起来
-核心/条件性安排：核心；页预算3.5分钟
-本学时另有3分钟机动，可前移到实际指读、追问或补充理由处，不新增固定讲述。
+下节（本节0—45分钟）｜本节约40.3—43.2分钟
+页定位按180汉字/分钟与计划独立活动粗列，不是实测；口读校正、多语速、活动情景及调整路径见双45分钟容量报告。
 1. 逐字讲述
 最后请写两三句话，把宪法、普通法律、机关履职和个人权利放在同一个解释里。至少选择一项今天实际读到的制度作支撑，不需要复制整张关系图。
 2. 活动，不朗读（1分钟）
@@ -3083,8 +3167,7 @@
 5. 逐字讲述
 第一讲到这里。下一讲转向宪法的发展，继续解释这些根本规则怎样形成和调整。今天先把一件事说清：国家权力需要组织起来，也必须在规范和权利要求之中行使。
 教师备查，不朗读
-本学时常规流程42分钟，另留3分钟机动；优先按真实回答调用第26页必要理由、指读和回看，不虚填为固定讲述。
-90分钟核心到本页结束。后四页为100分钟条件性扩展，按指定位置插入，不在90分钟课后继续全放。没有真人试读，不预写效果评价。
+下节45分钟内保留本页收束。32—35页为默认隐藏的节内备查，不追加课时；无真人试读。
 本页出处
 任务7及第一讲收束；下一讲：宪法的发展
 来源及定位
@@ -3179,13 +3262,14 @@
             <a:r>
               <a:rPr lang="en-US" dirty="0"/>
               <a:t>32｜延伸讨论一：宪法只有抽象原则吗？
-核心/条件性安排：条件性扩展或备查；页预算2.5分钟
+节内备用页：常规放映隐藏。按本节容量报告调用，不追加课时。
+上节第14页后依次调用第32—33页；若同选E3，完成本组与第36页后返回第15页。仅用本组时直接返回第15页。
 1. 逐字讲述
 我们再看一个值得辨析的说法。请把它与第64条对照：宪法是不是只有抽象原则，普通法律才有具体规则？找到反例后，还要解释为什么不能因此把二者地位混同。
-2. 活动，不朗读（2分钟）
-各自用材料写一个反例约1分钟，同桌互相解释约1分钟。
+2. 活动，不朗读（1分钟）
+独立写出一个反例及理由，1分钟；不再额外安排同桌讨论。
 教师备查，不朗读
-在核心第16页后插入本页及第33页，共5分钟；随后课间，再回第17页。
+仅按本节容量报告调用；同一材料不与主稿重复讲述，不追加课时。
 本页出处
 扩展E1｜宪法第64条
 来源及定位
@@ -3280,7 +3364,8 @@
             <a:r>
               <a:rPr lang="en-US" dirty="0"/>
               <a:t>33｜延伸讨论一讲评：具体程度不决定效力地位
-核心/条件性安排：条件性扩展或备查；页预算2.5分钟
+节内备用页：常规放映隐藏。按本节容量报告调用，不追加课时。
+上节第14页后依次调用第32—33页；若同选E3，完成本组与第36页后返回第15页。仅用本组时直接返回第15页。
 1. 活动，不朗读（0.5分钟）
 邀请一名学生读出反例与修正后的说法，约30秒。
 2. 逐字讲述
@@ -3292,7 +3377,7 @@
 5. 逐字讲述
 请在刚才自己的概括里检查：你谈的是规范内容、具体程度，还是法律地位？将这三个问题分开，定义才不容易在遇到反例时崩塌。
 教师备查，不朗读
-回到课间，再进入第17页。两页累计5分钟，不在90分钟方案内另加。
+仅按本节容量报告调用；同一材料不与主稿重复讲述，不追加课时。
 本页出处
 扩展E1参考说明｜宪法序言、第5、64条
 来源及定位
@@ -3387,13 +3472,14 @@
             <a:r>
               <a:rPr lang="en-US" dirty="0"/>
               <a:t>34｜延伸讨论二：有条文，为什么仍要追问实施？
-核心/条件性安排：条件性扩展或备查；页预算2.5分钟
+节内备用页：常规放映隐藏。按本节容量报告调用，不追加课时。
+下节第30页后依次调用第34—35页；仅用E2时回第31页，同选E4时先到第37页，最后回第31页收束。
 1. 逐字讲述
 再讨论一个假设：规则已经明确，请求仍迟迟未得到依法处理。只是再把同一条文宣读一遍，是否已经解决问题？请指出一个还需查明的具体环节，并说明实施问题与规范效力是什么关系。
-2. 活动，不朗读（2分钟）
-独立思考1分钟，再与同桌交换一个具体实施问题约1分钟。
+2. 活动，不朗读（1分钟）
+独立写出一个待核办理环节及理由，1分钟；不再额外安排同桌讨论。
 教师备查，不朗读
-在核心第30页之后使用本页和第35页，合计5分钟；然后回第31页收束。
+仅按本节容量报告调用；同一材料不与主稿重复讲述，不追加课时。
 本页出处
 扩展E2｜教学假设
 来源及定位
@@ -3488,7 +3574,8 @@
             <a:r>
               <a:rPr lang="en-US" dirty="0"/>
               <a:t>35｜延伸讨论二讲评：规范提供要求，履职需要落实
-核心/条件性安排：条件性扩展或备查；页预算2.5分钟
+节内备用页：常规放映隐藏。按本节容量报告调用，不追加课时。
+下节第30页后依次调用第34—35页；仅用E2时回第31页，同选E4时先到第37页，最后回第31页收束。
 1. 活动，不朗读（0.5分钟）
 邀请一人说一个具体环节，约30秒。
 2. 逐字讲述
@@ -3498,9 +3585,9 @@
 4. 逐字讲述
 另一面也要保留：条文存在，不是实际保障充分的成绩单。1994年的实施通知提出机构和人员安排，就是当时已经看到法律施行还需要具体工作。这只能说明提出过这些任务，不能替今天的实际履职结果作证明。
 5. 逐字讲述
-请把讨论中的一个具体问题留在材料上。以后第八讲讨论宪法实施与监督，会把规范要求、实际活动和纠正机制接得更完整。现在回到最后的课末收束。
+请把讨论中的一个具体问题留在材料上。以后第八讲讨论宪法实施与监督，会把规范要求、实际活动和纠正机制接得更完整。把这些区别带入最后的课末收束。
 教师备查，不朗读
-随后回第31页。不要增加赔偿期限、管辖或未经查证的新个案。
+仅用E2时回第31页；同用E4时先到第37页，再回第31页收束。不追加课时，不增加金额、期限、管辖或未经查证的个案。
 本页出处
 扩展E2参考说明；国办发〔1994〕106号为历史背景
 来源及定位
@@ -3597,8 +3684,233 @@
           <a:p>
             <a:r>
               <a:rPr lang="en-US" dirty="0"/>
-              <a:t>36｜本讲主要依据与阅读入口
-核心/条件性安排：条件性扩展或备查；页预算0分钟
+              <a:t>36｜节内追问：最高国家权力机关也受约束吗？
+节内备用页：常规放映隐藏。按本节容量报告调用，不追加课时。
+上节第14页讲完第64条后调用本页；若同选E1，依容量报告完成本页及第32—33页后返回第15页。仅用本页时直接返回第15页。
+1. 逐字讲述
+再对读两处容易使人迟疑的文字。第五十七条说全国人大是最高国家权力机关，第五条又要求一切国家机关遵守宪法。最高国家权力机关怎么也受到约束，这是不是自相矛盾？请先把两处的比较对象写清。
+2. 活动，不朗读（0.75分钟）
+静默对读学生附页第57条与材料B第5条，写出两个“最高/受约束”各自在比较什么，45秒。
+3. 逐字讲述
+一种疑问是，如果最高机关也受约束，似乎就还需要找一个更高的机关。这种想法把机关在国家机构中的地位，与规范对于机关的约束合成了一张机关排名表。第五十七条回答的是国家机构的地位，第五条回答的是国家活动须遵守什么规范。遵守宪法并不要求我们在最高机关之上凭空另造一个机关。
+4. 逐字讲述
+这个区别为什么有用？因为如果仅凭机关地位最高，就推成每次决定都可以不遵守宪法，宪法规定的权限和修改程序便会被机关地位自行排除。刚才第六十四条已经提供一个具体检验：全国人大修改宪法，仍须依规定的特别多数通过。机关地位没有让程序条件消失。
+5. 逐字讲述
+另一面也不能漏掉。承认规范约束，不等于让任何个人自行撤销全国人大的决定，也不能跳过法定制度讨论谁有何种纠正职权。规范要求是否成立，与谁依什么权限实现监督，是相联系的两个问题；后者会在国家机构、宪法实施课程继续展开。
+6. 逐字讲述
+因此，我们不需要用取消其中一条来消除表面的矛盾。国家机构中的最高地位和整个法律秩序中的最高效力，比较对象不同。将二者分开，反而能同时说明权力的组织与权力的规范依据。回到本节收束时，可以用这个例子说明为什么“根本法”不是一个脱离机关运行的称号。
+教师备查，不朗读
+这是备用的完整讲述与活动，计入容量时须选择此路径，不在主线结束后追加。
+本页出处
+现行宪法第5、57、64条；机关地位与规范约束分别说明
+来源及定位
+中华人民共和国宪法（2018年修正）
+https://www.mofcom.gov.cn/xxgcxjpxsdzgtsshzysx/zywj/art/2018/art_45c1e16fe351469090d53e63178268c8.html
+第5、57、64条</a:t>
+            </a:r>
+            <a:endParaRPr lang="en-US" dirty="0"/>
+          </a:p>
+        </p:txBody>
+      </p:sp>
+      <p:sp>
+        <p:nvSpPr>
+          <p:cNvPr id="4" name="Slide Number Placeholder 3"/>
+          <p:cNvSpPr>
+            <a:spLocks noGrp="1"/>
+          </p:cNvSpPr>
+          <p:nvPr>
+            <p:ph type="sldNum" sz="quarter" idx="10"/>
+          </p:nvPr>
+        </p:nvSpPr>
+        <p:spPr/>
+        <p:txBody>
+          <a:bodyPr/>
+          <a:lstStyle/>
+          <a:p>
+            <a:fld id="{F7021451-1387-4CA6-816F-3879F97B5CBC}" type="slidenum">
+              <a:rPr lang="en-US"/>
+              <a:t>36</a:t>
+            </a:fld>
+            <a:endParaRPr lang="en-US"/>
+          </a:p>
+        </p:txBody>
+      </p:sp>
+    </p:spTree>
+    <p:extLst>
+      <p:ext uri="{BB962C8B-B14F-4D97-AF65-F5344CB8AC3E}">
+        <p14:creationId xmlns:p14="http://schemas.microsoft.com/office/powerpoint/2010/main" val="1024086991"/>
+      </p:ext>
+    </p:extLst>
+  </p:cSld>
+  <p:clrMapOvr>
+    <a:masterClrMapping/>
+  </p:clrMapOvr>
+</p:notes>
+</file>
+
+<file path=ppt/notesSlides/notesSlide37.xml><?xml version="1.0" encoding="utf-8"?>
+<p:notes xmlns:a="http://schemas.openxmlformats.org/drawingml/2006/main" xmlns:r="http://schemas.openxmlformats.org/officeDocument/2006/relationships" xmlns:p="http://schemas.openxmlformats.org/presentationml/2006/main">
+  <p:cSld>
+    <p:spTree>
+      <p:nvGrpSpPr>
+        <p:cNvPr id="1" name=""/>
+        <p:cNvGrpSpPr/>
+        <p:nvPr/>
+      </p:nvGrpSpPr>
+      <p:grpSpPr>
+        <a:xfrm>
+          <a:off x="0" y="0"/>
+          <a:ext cx="0" cy="0"/>
+          <a:chOff x="0" y="0"/>
+          <a:chExt cx="0" cy="0"/>
+        </a:xfrm>
+      </p:grpSpPr>
+      <p:sp>
+        <p:nvSpPr>
+          <p:cNvPr id="2" name="Slide Image Placeholder 1"/>
+          <p:cNvSpPr>
+            <a:spLocks noGrp="1" noRot="1" noChangeAspect="1"/>
+          </p:cNvSpPr>
+          <p:nvPr>
+            <p:ph type="sldImg"/>
+          </p:nvPr>
+        </p:nvSpPr>
+        <p:spPr/>
+      </p:sp>
+      <p:sp>
+        <p:nvSpPr>
+          <p:cNvPr id="3" name="Notes Placeholder 2"/>
+          <p:cNvSpPr>
+            <a:spLocks noGrp="1"/>
+          </p:cNvSpPr>
+          <p:nvPr>
+            <p:ph type="body" idx="1"/>
+          </p:nvPr>
+        </p:nvSpPr>
+        <p:spPr/>
+        <p:txBody>
+          <a:bodyPr/>
+          <a:lstStyle/>
+          <a:p>
+            <a:r>
+              <a:rPr lang="en-US" dirty="0"/>
+              <a:t>37｜节内追问：履行赔偿以后，哪些问题仍然存在？
+节内备用页：常规放映隐藏。按本节容量报告调用，不追加课时。
+下节第30页后调用本页；与E2同选时先完成第34—35页，再用本页，最后返回第31页收束。
+1. 逐字讲述
+再改变本课的一个条件：赔偿义务已经依法履行。有人可能认为，国家已经作出补偿，这件事对权利保障的要求是否就全部结束了？请把“这项赔偿义务已完成”和“以前的行为合法、以后不用再改进”分开判断。
+2. 活动，不朗读（0.75分钟）
+按明确教学假设独立写出两项不能直接推出的结论，45秒；不计算金额，不编造真实事件。
+3. 逐字讲述
+先承认履行赔偿的真实意义。应承担的义务已经履行，与请求无人处理并不一样。不能为了强调权利仍需保障，就把已经依法提供的救济说成毫无价值。对受害人而言，法定请求得到回应本身就是需要完成的工作。
+4. 逐字讲述
+但赔偿针对的是此前发生的法定侵害。后来履行义务，没有改变过去行为在发生时是否符合法律的条件。如果把赔偿看成事后买到的许可，便会混淆“违反后须承担责任”与“原来就允许违反”。国家赔偿法第一条把保障赔偿权与促进依法行使职权并列，也提醒我们不能只在侵害已经发生以后理解整部法律。
+5. 逐字讲述
+有必要继续查的，还包括是否依法追究相应责任，履职中有哪些条件和程序需要落实，以防止同类侵害。这里不是仅凭一个假设就认定某位人员必须承担何种处分或追偿，而是辨认还存在不同的法律问题。第十六条的故意或者重大过失等条件仍要核实，不能用“已经赔了”或“造成了损害”替代全部判断。
+6. 逐字讲述
+再把目光放回第三十三条。尊重和保障人权，既涉及侵害发生后的救济，也涉及国家如何行使职权，怎样依法防止任意侵害。完成一种救济，不能独自证明此前没有侵害，也不能保证今后永远不再发生问题；但今后的问题需要哪些改进，同样须有事实和具体制度依据。
+7. 逐字讲述
+所以，评价制度时可以同时承认已经完成的义务与仍需查明的任务。这样的判断比“赔了就全部解决”更准确，也比“赔偿改变不了过去所以毫无意义”更有依据。我们没有比较赔偿金额是否足够，只是用同一件事的不同阶段，检验宪法上的要求如何持续约束国家活动。
+教师备查，不朗读
+这是备用的完整讲述与活动，计入容量时须选择此路径，不在主线结束后追加。
+本页出处
+宪法第5、33、41条；国家赔偿法第1、7、16条；教学假设
+来源及定位
+中华人民共和国宪法（2018年修正）
+https://www.mofcom.gov.cn/xxgcxjpxsdzgtsshzysx/zywj/art/2018/art_45c1e16fe351469090d53e63178268c8.html
+第5、33、41条
+国家赔偿法
+https://fgk.chinatax.gov.cn/zcfgk/c100009/c5211800/content.html
+第1、7、16条</a:t>
+            </a:r>
+            <a:endParaRPr lang="en-US" dirty="0"/>
+          </a:p>
+        </p:txBody>
+      </p:sp>
+      <p:sp>
+        <p:nvSpPr>
+          <p:cNvPr id="4" name="Slide Number Placeholder 3"/>
+          <p:cNvSpPr>
+            <a:spLocks noGrp="1"/>
+          </p:cNvSpPr>
+          <p:nvPr>
+            <p:ph type="sldNum" sz="quarter" idx="10"/>
+          </p:nvPr>
+        </p:nvSpPr>
+        <p:spPr/>
+        <p:txBody>
+          <a:bodyPr/>
+          <a:lstStyle/>
+          <a:p>
+            <a:fld id="{F7021451-1387-4CA6-816F-3879F97B5CBC}" type="slidenum">
+              <a:rPr lang="en-US"/>
+              <a:t>37</a:t>
+            </a:fld>
+            <a:endParaRPr lang="en-US"/>
+          </a:p>
+        </p:txBody>
+      </p:sp>
+    </p:spTree>
+    <p:extLst>
+      <p:ext uri="{BB962C8B-B14F-4D97-AF65-F5344CB8AC3E}">
+        <p14:creationId xmlns:p14="http://schemas.microsoft.com/office/powerpoint/2010/main" val="1024086991"/>
+      </p:ext>
+    </p:extLst>
+  </p:cSld>
+  <p:clrMapOvr>
+    <a:masterClrMapping/>
+  </p:clrMapOvr>
+</p:notes>
+</file>
+
+<file path=ppt/notesSlides/notesSlide38.xml><?xml version="1.0" encoding="utf-8"?>
+<p:notes xmlns:a="http://schemas.openxmlformats.org/drawingml/2006/main" xmlns:r="http://schemas.openxmlformats.org/officeDocument/2006/relationships" xmlns:p="http://schemas.openxmlformats.org/presentationml/2006/main">
+  <p:cSld>
+    <p:spTree>
+      <p:nvGrpSpPr>
+        <p:cNvPr id="1" name=""/>
+        <p:cNvGrpSpPr/>
+        <p:nvPr/>
+      </p:nvGrpSpPr>
+      <p:grpSpPr>
+        <a:xfrm>
+          <a:off x="0" y="0"/>
+          <a:ext cx="0" cy="0"/>
+          <a:chOff x="0" y="0"/>
+          <a:chExt cx="0" cy="0"/>
+        </a:xfrm>
+      </p:grpSpPr>
+      <p:sp>
+        <p:nvSpPr>
+          <p:cNvPr id="2" name="Slide Image Placeholder 1"/>
+          <p:cNvSpPr>
+            <a:spLocks noGrp="1" noRot="1" noChangeAspect="1"/>
+          </p:cNvSpPr>
+          <p:nvPr>
+            <p:ph type="sldImg"/>
+          </p:nvPr>
+        </p:nvSpPr>
+        <p:spPr/>
+      </p:sp>
+      <p:sp>
+        <p:nvSpPr>
+          <p:cNvPr id="3" name="Notes Placeholder 2"/>
+          <p:cNvSpPr>
+            <a:spLocks noGrp="1"/>
+          </p:cNvSpPr>
+          <p:nvPr>
+            <p:ph type="body" idx="1"/>
+          </p:nvPr>
+        </p:nvSpPr>
+        <p:spPr/>
+        <p:txBody>
+          <a:bodyPr/>
+          <a:lstStyle/>
+          <a:p>
+            <a:r>
+              <a:rPr lang="en-US" dirty="0"/>
+              <a:t>38｜本讲主要依据与阅读入口
+课后来源页，不计主线口述。
 教师备查，不朗读
 来源页不占核心讲授时间。中文原作是备课表达研究对象，不是本讲法律论据，详见研究目录。
 本页出处
@@ -3632,7 +3944,7 @@
           <a:p>
             <a:fld id="{F7021451-1387-4CA6-816F-3879F97B5CBC}" type="slidenum">
               <a:rPr lang="en-US"/>
-              <a:t>36</a:t>
+              <a:t>38</a:t>
             </a:fld>
             <a:endParaRPr lang="en-US"/>
           </a:p>
@@ -3698,7 +4010,8 @@
             <a:r>
               <a:rPr lang="en-US" dirty="0"/>
               <a:t>04｜国家的根本安排，先回答哪些问题？
-核心/条件性安排：核心；页预算2.25分钟
+上节（本节0—45分钟）｜本节约7.8—9.6分钟
+页定位按180汉字/分钟与计划独立活动粗列，不是实测；口读校正、多语速、活动情景及调整路径见双45分钟容量报告。
 1. 逐字讲述
 第一条规定我国是工人阶级领导的、以工农联盟为基础的人民民主专政的社会主义国家；社会主义制度是根本制度，中国共产党领导是中国特色社会主义最本质的特征。第二条随即明确，一切权力属于人民。这里既有国家性质和根本制度，也有国家权力归属。
 2. 逐字讲述
@@ -3801,7 +4114,8 @@
             <a:r>
               <a:rPr lang="en-US" dirty="0"/>
               <a:t>05｜现在，把“宪法”说完整
-核心/条件性安排：核心；页预算1.75分钟
+上节（本节0—45分钟）｜本节约9.6—10.8分钟
+页定位按180汉字/分钟与计划独立活动粗列，不是实测；口读校正、多语速、活动情景及调整路径见双45分钟容量报告。
 1. 逐字讲述
 我们可以作这样的概括：宪法是规定国家根本制度和根本任务、公民基本权利和义务、国家权力组织运行等根本问题，具有最高法律效力的国家根本法。这是本课根据教材和条文作的概括，便于把刚才看到的内容连起来。
 2. 逐字讲述
@@ -3904,7 +4218,8 @@
             <a:r>
               <a:rPr lang="en-US" dirty="0"/>
               <a:t>06｜制定法律的人和机关，也处在宪法之内
-核心/条件性安排：核心；页预算3.5分钟
+上节（本节0—45分钟）｜本节约10.8—15.5分钟
+页定位按180汉字/分钟与计划独立活动粗列，不是实测；口读校正、多语速、活动情景及调整路径见双45分钟容量报告。
 1. 逐字讲述
 我们刚才说，宪法规定国家权力归属和机关安排。现在把立法放进这个框架：制定法律本身也是行使国家权力。立法机关的地位和权限并不在宪法之外，因此它形成的具体规则也不能取得排除宪法约束的权力。
 2. 活动，不朗读（0.5分钟）
@@ -3914,9 +4229,19 @@
 4. 逐字讲述
 我们可以作一个简短的设想。如果每个领域的法律都能说“在我这里，宪法要求可以不算”，共同的国家制度和基本权利就会被分领域逐项排除。最终剩下的只是宪法的名称，失去的是它作为共同规范的作用。普通法律可以在一个领域作具体选择，但具体选择要在共同约束下形成。
 5. 逐字讲述
+这里有一个值得认真对待的疑问：立法机关需要回应现实问题，如果始终受一部宪法约束，岂不是只能照抄，失去了作出新安排的能力？这个担心抓住了立法的一项真实工作。社会中哪些情况应当区别对待，义务由谁承担，什么程序既可靠又可行，都需要判断；宪法没有预先替立法者完成所有调查和选择。
+6. 逐字讲述
+但是，从需要作判断，不能直接推出可以不受约束。请分清两件事：一件是某种安排不能越过共同规则，另一件是在共同规则允许的范围内选择哪种具体办法。前者给判断设定依据，后者才有继续讨论不同办法的空间。如果把具体选择全部取消，立法就难以回应新的生活问题；如果把约束全部取消，所谓具体选择又能把基本权利和国家制度逐项排除。
+7. 逐字讲述
+判断一种新规定时，因此至少要追问两层。先问它有没有触及宪法已经规定的权限、程序和权利要求；再问在这些要求之内，它根据什么事实作出具体安排。不能只因有新的细节就说它违背宪法，也不能只因它要解决一个实际问题就免除宪法上的追问。最高效力不是替所有部门写好全部答案，而是使它们不能各自决定哪些根本要求还算数。
+8. 逐字讲述
 你将来适用具体职权规定，仍在这个规范关系之中。后半堂用国家赔偿法观察具体安排。现在先追问：权力既然属于人民，怎样被组织成能够运行的国家机构？
 教师备查，不朗读
 不由本页推出任何个人可自行宣布法律普遍失效，纠正机制留第8讲；规范结构说明不冒充完整的宪法权威历史解释。
+节内短讲C2：立法受约束与作选择
+替换本页全部口述；本页既定独立阅读/学生回应仍执行。含阅读的页先依原任务阅读，再连续讲短版，不再读主版同页讲述。
+以下短讲替换本页全部口述；不要与上面的主讲重复朗读。
+刚才读到的第5条第3款要求法律不得抵触宪法。立法本身也是国家权力的行使，其他法律不得抵触宪法；不是规则越详细，效力越高。有人担心，这样会不会把立法变成照抄？需要回应：受约束与没有选择是两回事。宪法没有预先写完所有生活领域的办法，立法仍要根据事实安排条件、主体和程序。但是，需要解决实际问题，也不能成为排除宪法要求的理由。判断一项新规则，既要问有没有越过宪法的权限、程序和权利要求，也要问范围内的具体选择依据什么。取消选择，难以回应现实；取消约束，根本要求又会被逐项排除。接着看国家权力怎样组织，后半节再用赔偿条文检验这些关系。
 本页出处
 宪法第5条第3款；教材印刷19—20页
 来源及定位
@@ -4011,7 +4336,8 @@
             <a:r>
               <a:rPr lang="en-US" dirty="0"/>
               <a:t>07｜“属于人民”，怎样进入国家机构？
-核心/条件性安排：核心；页预算4分钟
+上节（本节0—45分钟）｜本节约15.5—19.1分钟
+页定位按180汉字/分钟与计划独立活动粗列，不是实测；口读校正、多语速、活动情景及调整路径见双45分钟容量报告。
 1. 逐字讲述
 请把第2条与第3条连续读。第2条先说明权力属于人民，再说明人民行使国家权力的机关是全国人大和地方各级人大。第3条则写出民主选举、负责和监督，并说明行政、监察、审判、检察机关同人大的关系。
 2. 活动，不朗读（1.25分钟）
@@ -4118,17 +4444,28 @@
             <a:r>
               <a:rPr lang="en-US" dirty="0"/>
               <a:t>08｜机关依法产生，为什么还要依法履职？
-核心/条件性安排：核心；页预算2.75分钟
+上节（本节0—45分钟）｜本节约19.1—22.9分钟
+页定位按180汉字/分钟与计划独立活动粗列，不是实测；口读校正、多语速、活动情景及调整路径见双45分钟容量报告。
 1. 逐字讲述
 有同学可能会问：既然机关已经依照制度产生，为什么还要不断强调依法履职和监督？因为机关怎样产生，与它每次怎样行使职权，是两个相连却不同的问题。具有法定地位，不等于每项具体行为都已经得到证明。
 2. 逐字讲述
 例如，第3条不是只写“由人大产生”便结束，还写“对它负责，受它监督”。这说明责任并不是等到我们怀疑某个人品质时才临时加上的要求，它本来就是机关关系的一部分。产生赋予机关履职的制度位置，负责和监督又持续约束履职。
 3. 逐字讲述
+也可以提出一个更有力的理由：机关要完成公共任务，专业人员需要信任和行动空间。如果所有决定都重新讨论一遍，可能拖延工作。不能把这个理由简单斥为不愿受监督；国家机关确实必须能够履职。问题在于，给予履职空间与取消说明责任，是不是同一件事？
+4. 逐字讲述
+仍看第三条。它同时写产生、负责和监督，没有把其中一项设成另一项的替代。我们可以承认机关依法作出决定的地位，同时要求它说明行为依据并依法接受监督。具体监督怎样避免重复、怎样保证专业判断，由相应制度继续安排；这一节不预设某一种监督方式永远最好。
+5. 逐字讲述
+因此，信任不能独自证明某次行为正确，监督也不等于把每次决定交给没有权限的人重做。我们需要的论证是：谁依法作出决定，谁承担说明和改正的责任，监督者又按什么权限行使监督。效率的要求没有消失，但它不能把宪法已经写下的负责和监督删掉。
+6. 逐字讲述
 教材用“民主制度化、法律化”说明宪法本质的一个重要方面。制度化，就是把人民当家作主组织为相应机关、程序和关系；法律化，就是用规范确认这些安排，使其成为应当遵守的要求。它使“人民当家作主”能够被进一步追问：通过什么制度，对谁负责，怎样受到监督。
-4. 逐字讲述
+7. 逐字讲述
 因此，我们理解权力属于人民，不能停在权力从哪里来的第一句话。还要看这份权力在行使中怎样对人民负责。把权力的归属写清楚，还要把行使权力的责任写清楚。后面讲基本原则和赔偿权，都会继续回答这一层问题。
 教师备查，不朗读
 本质还有政治力量对比关系集中体现等教材论述。本页选择民主制度化、法律化作为必要入口，不声称穷尽本质理论。收束句为课程原创概括。
+节内短讲C3：依法产生与履职责任
+替换本页全部口述；本页既定独立阅读/学生回应仍执行。含阅读的页先依原任务阅读，再连续讲短版，不再读主版同页讲述。
+以下短讲替换本页全部口述；不要与上面的主讲重复朗读。
+机关依法产生，说明它具有相应制度地位，却不能独自证明每一次行为正确。第3条在产生之后仍写负责和监督。有人担心监督妨碍专业判断和及时行动，这种效率关切值得认真对待；但给予依法履职的空间，不等于取消说明责任。监督本身也应依法进行，不能变成任何人重做所有决定。要问的是谁作决定、依据什么、向谁负责、怎样纠正。教材所说民主制度化、法律化，就使人民当家作主进入机关、程序和责任关系，而非只停在权力属于谁。把权力的归属写清楚，还要把行使权力的责任写清楚。
 本页出处
 宪法第2、3条；教材印刷20—21页
 来源及定位
@@ -4223,7 +4560,8 @@
             <a:r>
               <a:rPr lang="en-US" dirty="0"/>
               <a:t>09｜党的领导与依法活动，怎样连起来理解？
-核心/条件性安排：核心；页预算2.75分钟
+上节（本节0—45分钟）｜本节约22.9—24.8分钟
+页定位按180汉字/分钟与计划独立活动粗列，不是实测；口读校正、多语速、活动情景及调整路径见双45分钟容量报告。
 1. 逐字讲述
 现在看基本原则。先把党的领导与社会主义法治放在一起。第1条确认中国共产党领导的宪法地位；第5条同时规定各政党和国家机关都必须遵守宪法和法律。这两处不是互相取消的命题，而是同一宪法中需要共同理解的要求。
 2. 逐字讲述
@@ -4648,7 +4986,7 @@
                 <a:ea typeface="Microsoft YaHei" pitchFamily="34" charset="-122"/>
                 <a:cs typeface="Microsoft YaHei" pitchFamily="34" charset="-120"/>
               </a:rPr>
-              <a:t>一 国家生活的根本规则</a:t>
+              <a:t>上节｜一 国家生活的根本规则</a:t>
             </a:r>
             <a:endParaRPr lang="zh-CN" sz="2000" dirty="0"/>
           </a:p>
@@ -4924,7 +5262,7 @@
                 <a:ea typeface="Microsoft YaHei" pitchFamily="34" charset="-122"/>
                 <a:cs typeface="Microsoft YaHei" pitchFamily="34" charset="-120"/>
               </a:rPr>
-              <a:t>1 / 36</a:t>
+              <a:t>1 / 38</a:t>
             </a:r>
             <a:endParaRPr lang="zh-CN" sz="1200" dirty="0"/>
           </a:p>
@@ -4998,7 +5336,7 @@
                 <a:ea typeface="Microsoft YaHei" pitchFamily="34" charset="-122"/>
                 <a:cs typeface="Microsoft YaHei" pitchFamily="34" charset="-120"/>
               </a:rPr>
-              <a:t>一 国家生活的根本规则</a:t>
+              <a:t>上节｜一 国家生活的根本规则</a:t>
             </a:r>
             <a:endParaRPr lang="zh-CN" sz="1700" dirty="0"/>
           </a:p>
@@ -5354,7 +5692,7 @@
                 <a:ea typeface="Microsoft YaHei" pitchFamily="34" charset="-122"/>
                 <a:cs typeface="Microsoft YaHei" pitchFamily="34" charset="-120"/>
               </a:rPr>
-              <a:t>10 / 36</a:t>
+              <a:t>10 / 38</a:t>
             </a:r>
             <a:endParaRPr lang="zh-CN" sz="1200" dirty="0"/>
           </a:p>
@@ -5428,7 +5766,7 @@
                 <a:ea typeface="Microsoft YaHei" pitchFamily="34" charset="-122"/>
                 <a:cs typeface="Microsoft YaHei" pitchFamily="34" charset="-120"/>
               </a:rPr>
-              <a:t>一 国家生活的根本规则</a:t>
+              <a:t>上节｜一 国家生活的根本规则</a:t>
             </a:r>
             <a:endParaRPr lang="zh-CN" sz="1700" dirty="0"/>
           </a:p>
@@ -6128,7 +6466,7 @@
                 <a:ea typeface="Microsoft YaHei" pitchFamily="34" charset="-122"/>
                 <a:cs typeface="Microsoft YaHei" pitchFamily="34" charset="-120"/>
               </a:rPr>
-              <a:t>11 / 36</a:t>
+              <a:t>11 / 38</a:t>
             </a:r>
             <a:endParaRPr lang="zh-CN" sz="1200" dirty="0"/>
           </a:p>
@@ -6202,7 +6540,7 @@
                 <a:ea typeface="Microsoft YaHei" pitchFamily="34" charset="-122"/>
                 <a:cs typeface="Microsoft YaHei" pitchFamily="34" charset="-120"/>
               </a:rPr>
-              <a:t>一 国家生活的根本规则</a:t>
+              <a:t>上节｜一 国家生活的根本规则</a:t>
             </a:r>
             <a:endParaRPr lang="zh-CN" sz="1700" dirty="0"/>
           </a:p>
@@ -6558,7 +6896,7 @@
                 <a:ea typeface="Microsoft YaHei" pitchFamily="34" charset="-122"/>
                 <a:cs typeface="Microsoft YaHei" pitchFamily="34" charset="-120"/>
               </a:rPr>
-              <a:t>12 / 36</a:t>
+              <a:t>12 / 38</a:t>
             </a:r>
             <a:endParaRPr lang="zh-CN" sz="1200" dirty="0"/>
           </a:p>
@@ -6632,7 +6970,7 @@
                 <a:ea typeface="Microsoft YaHei" pitchFamily="34" charset="-122"/>
                 <a:cs typeface="Microsoft YaHei" pitchFamily="34" charset="-120"/>
               </a:rPr>
-              <a:t>一 国家生活的根本规则</a:t>
+              <a:t>上节｜一 国家生活的根本规则</a:t>
             </a:r>
             <a:endParaRPr lang="zh-CN" sz="1700" dirty="0"/>
           </a:p>
@@ -7042,7 +7380,7 @@
                 <a:ea typeface="Microsoft YaHei" pitchFamily="34" charset="-122"/>
                 <a:cs typeface="Microsoft YaHei" pitchFamily="34" charset="-120"/>
               </a:rPr>
-              <a:t>13 / 36</a:t>
+              <a:t>13 / 38</a:t>
             </a:r>
             <a:endParaRPr lang="zh-CN" sz="1200" dirty="0"/>
           </a:p>
@@ -7116,7 +7454,7 @@
                 <a:ea typeface="Microsoft YaHei" pitchFamily="34" charset="-122"/>
                 <a:cs typeface="Microsoft YaHei" pitchFamily="34" charset="-120"/>
               </a:rPr>
-              <a:t>一 国家生活的根本规则</a:t>
+              <a:t>上节｜一 国家生活的根本规则</a:t>
             </a:r>
             <a:endParaRPr lang="zh-CN" sz="1700" dirty="0"/>
           </a:p>
@@ -7173,7 +7511,7 @@
         <p:spPr>
           <a:xfrm>
             <a:off x="713232" y="1901952"/>
-            <a:ext cx="5175504" cy="3657600"/>
+            <a:ext cx="5175504" cy="2304288"/>
           </a:xfrm>
           <a:prstGeom prst="rect">
             <a:avLst/>
@@ -7242,7 +7580,7 @@
         <p:spPr>
           <a:xfrm>
             <a:off x="914400" y="2798064"/>
-            <a:ext cx="4773168" cy="2606040"/>
+            <a:ext cx="4773168" cy="1252728"/>
           </a:xfrm>
           <a:prstGeom prst="rect">
             <a:avLst/>
@@ -7269,7 +7607,7 @@
                 <a:ea typeface="Microsoft YaHei" pitchFamily="34" charset="-122"/>
                 <a:cs typeface="Microsoft YaHei" pitchFamily="34" charset="-120"/>
               </a:rPr>
-              <a:t>由全国人大以全体代表的三分之</a:t>
+              <a:t>由全国人大以全体代表的</a:t>
             </a:r>
             <a:endParaRPr lang="zh-CN" sz="2400" dirty="0"/>
           </a:p>
@@ -7289,7 +7627,7 @@
                 <a:ea typeface="Microsoft YaHei" pitchFamily="34" charset="-122"/>
                 <a:cs typeface="Microsoft YaHei" pitchFamily="34" charset="-120"/>
               </a:rPr>
-              <a:t>二以上的多数通过。</a:t>
+              <a:t>三分之二以上的多数通过。</a:t>
             </a:r>
             <a:endParaRPr lang="zh-CN" sz="2400" dirty="0"/>
           </a:p>
@@ -7304,7 +7642,7 @@
         <p:spPr>
           <a:xfrm>
             <a:off x="6327648" y="1901952"/>
-            <a:ext cx="5175504" cy="3657600"/>
+            <a:ext cx="5175504" cy="2304288"/>
           </a:xfrm>
           <a:prstGeom prst="rect">
             <a:avLst/>
@@ -7373,7 +7711,7 @@
         <p:spPr>
           <a:xfrm>
             <a:off x="6528816" y="2798064"/>
-            <a:ext cx="4773168" cy="2606040"/>
+            <a:ext cx="4773168" cy="1252728"/>
           </a:xfrm>
           <a:prstGeom prst="rect">
             <a:avLst/>
@@ -7400,7 +7738,7 @@
                 <a:ea typeface="Microsoft YaHei" pitchFamily="34" charset="-122"/>
                 <a:cs typeface="Microsoft YaHei" pitchFamily="34" charset="-120"/>
               </a:rPr>
-              <a:t>由全国人大以全体</a:t>
+              <a:t>由全国人大以全体代表的</a:t>
             </a:r>
             <a:endParaRPr lang="zh-CN" sz="2400" dirty="0"/>
           </a:p>
@@ -7420,7 +7758,7 @@
                 <a:ea typeface="Microsoft YaHei" pitchFamily="34" charset="-122"/>
                 <a:cs typeface="Microsoft YaHei" pitchFamily="34" charset="-120"/>
               </a:rPr>
-              <a:t>代表的过半数通过。</a:t>
+              <a:t>过半数通过。</a:t>
             </a:r>
             <a:endParaRPr lang="zh-CN" sz="2400" dirty="0"/>
           </a:p>
@@ -7429,6 +7767,110 @@
       <p:sp>
         <p:nvSpPr>
           <p:cNvPr id="10" name="Text 8"/>
+          <p:cNvSpPr/>
+          <p:nvPr/>
+        </p:nvSpPr>
+        <p:spPr>
+          <a:xfrm>
+            <a:off x="768096" y="4480560"/>
+            <a:ext cx="1920240" cy="777240"/>
+          </a:xfrm>
+          <a:prstGeom prst="rect">
+            <a:avLst/>
+          </a:prstGeom>
+          <a:noFill/>
+          <a:ln/>
+        </p:spPr>
+        <p:txBody>
+          <a:bodyPr wrap="none" lIns="0" tIns="0" rIns="0" bIns="0" rtlCol="0" anchor="t"/>
+          <a:lstStyle/>
+          <a:p>
+            <a:pPr algn="l" indent="0" marL="0">
+              <a:lnSpc>
+                <a:spcPct val="105000"/>
+              </a:lnSpc>
+              <a:buNone/>
+            </a:pPr>
+            <a:r>
+              <a:rPr lang="zh-CN" altLang="en-US" sz="2400" b="1" dirty="0">
+                <a:solidFill>
+                  <a:srgbClr val="9B3D32"/>
+                </a:solidFill>
+                <a:latin typeface="Microsoft YaHei" pitchFamily="34" charset="0"/>
+                <a:ea typeface="Microsoft YaHei" pitchFamily="34" charset="-122"/>
+                <a:cs typeface="Microsoft YaHei" pitchFamily="34" charset="-120"/>
+              </a:rPr>
+              <a:t>理由比较</a:t>
+            </a:r>
+            <a:endParaRPr lang="zh-CN" sz="2400" dirty="0"/>
+          </a:p>
+        </p:txBody>
+      </p:sp>
+      <p:sp>
+        <p:nvSpPr>
+          <p:cNvPr id="11" name="Text 9"/>
+          <p:cNvSpPr/>
+          <p:nvPr/>
+        </p:nvSpPr>
+        <p:spPr>
+          <a:xfrm>
+            <a:off x="2743200" y="4480560"/>
+            <a:ext cx="8622792" cy="1051560"/>
+          </a:xfrm>
+          <a:prstGeom prst="rect">
+            <a:avLst/>
+          </a:prstGeom>
+          <a:noFill/>
+          <a:ln/>
+        </p:spPr>
+        <p:txBody>
+          <a:bodyPr wrap="none" lIns="0" tIns="0" rIns="0" bIns="0" rtlCol="0" anchor="t"/>
+          <a:lstStyle/>
+          <a:p>
+            <a:pPr algn="l" indent="0" marL="0">
+              <a:lnSpc>
+                <a:spcPct val="105000"/>
+              </a:lnSpc>
+              <a:buNone/>
+            </a:pPr>
+            <a:r>
+              <a:rPr lang="zh-CN" altLang="en-US" sz="2400" dirty="0">
+                <a:solidFill>
+                  <a:srgbClr val="2B302F"/>
+                </a:solidFill>
+                <a:latin typeface="Microsoft YaHei" pitchFamily="34" charset="0"/>
+                <a:ea typeface="Microsoft YaHei" pitchFamily="34" charset="-122"/>
+                <a:cs typeface="Microsoft YaHei" pitchFamily="34" charset="-120"/>
+              </a:rPr>
+              <a:t>更广泛同意保护稳定；提高门槛</a:t>
+            </a:r>
+            <a:endParaRPr lang="zh-CN" sz="2400" dirty="0"/>
+          </a:p>
+          <a:p>
+            <a:pPr algn="l" indent="0" marL="0">
+              <a:lnSpc>
+                <a:spcPct val="105000"/>
+              </a:lnSpc>
+              <a:buNone/>
+            </a:pPr>
+            <a:r>
+              <a:rPr lang="zh-CN" altLang="en-US" sz="2400" dirty="0">
+                <a:solidFill>
+                  <a:srgbClr val="2B302F"/>
+                </a:solidFill>
+                <a:latin typeface="Microsoft YaHei" pitchFamily="34" charset="0"/>
+                <a:ea typeface="Microsoft YaHei" pitchFamily="34" charset="-122"/>
+                <a:cs typeface="Microsoft YaHei" pitchFamily="34" charset="-120"/>
+              </a:rPr>
+              <a:t>也可能增加依法调整的困难。</a:t>
+            </a:r>
+            <a:endParaRPr lang="zh-CN" sz="2400" dirty="0"/>
+          </a:p>
+        </p:txBody>
+      </p:sp>
+      <p:sp>
+        <p:nvSpPr>
+          <p:cNvPr id="12" name="Text 10"/>
           <p:cNvSpPr/>
           <p:nvPr/>
         </p:nvSpPr>
@@ -7462,15 +7904,15 @@
                 <a:ea typeface="Microsoft YaHei" pitchFamily="34" charset="-122"/>
                 <a:cs typeface="Microsoft YaHei" pitchFamily="34" charset="-120"/>
               </a:rPr>
-              <a:t>同一机关、同一分母，比较两种通过门槛。</a:t>
-            </a:r>
-            <a:endParaRPr lang="zh-CN" sz="2400" dirty="0"/>
-          </a:p>
-        </p:txBody>
-      </p:sp>
-      <p:sp>
-        <p:nvSpPr>
-          <p:cNvPr id="11" name="Text 9"/>
+              <a:t>现行门槛有确定答案；门槛越高是否越好，需要另给理由。</a:t>
+            </a:r>
+            <a:endParaRPr lang="zh-CN" sz="2400" dirty="0"/>
+          </a:p>
+        </p:txBody>
+      </p:sp>
+      <p:sp>
+        <p:nvSpPr>
+          <p:cNvPr id="13" name="Text 11"/>
           <p:cNvSpPr/>
           <p:nvPr/>
         </p:nvSpPr>
@@ -7512,7 +7954,7 @@
       </p:sp>
       <p:sp>
         <p:nvSpPr>
-          <p:cNvPr id="12" name="Text 10"/>
+          <p:cNvPr id="14" name="Text 12"/>
           <p:cNvSpPr/>
           <p:nvPr/>
         </p:nvSpPr>
@@ -7546,7 +7988,7 @@
                 <a:ea typeface="Microsoft YaHei" pitchFamily="34" charset="-122"/>
                 <a:cs typeface="Microsoft YaHei" pitchFamily="34" charset="-120"/>
               </a:rPr>
-              <a:t>14 / 36</a:t>
+              <a:t>14 / 38</a:t>
             </a:r>
             <a:endParaRPr lang="zh-CN" sz="1200" dirty="0"/>
           </a:p>
@@ -7620,7 +8062,7 @@
                 <a:ea typeface="Microsoft YaHei" pitchFamily="34" charset="-122"/>
                 <a:cs typeface="Microsoft YaHei" pitchFamily="34" charset="-120"/>
               </a:rPr>
-              <a:t>一 国家生活的根本规则</a:t>
+              <a:t>上节｜一 国家生活的根本规则</a:t>
             </a:r>
             <a:endParaRPr lang="zh-CN" sz="1700" dirty="0"/>
           </a:p>
@@ -7676,8 +8118,8 @@
         </p:nvSpPr>
         <p:spPr>
           <a:xfrm>
-            <a:off x="795528" y="1920240"/>
-            <a:ext cx="10533888" cy="457200"/>
+            <a:off x="758952" y="1965960"/>
+            <a:ext cx="2194560" cy="1246632"/>
           </a:xfrm>
           <a:prstGeom prst="rect">
             <a:avLst/>
@@ -7718,27 +8160,27 @@
         </p:nvSpPr>
         <p:spPr>
           <a:xfrm>
-            <a:off x="795528" y="2450592"/>
-            <a:ext cx="10533888" cy="1165860"/>
-          </a:xfrm>
-          <a:prstGeom prst="rect">
-            <a:avLst/>
-          </a:prstGeom>
-          <a:noFill/>
-          <a:ln/>
-        </p:spPr>
-        <p:txBody>
-          <a:bodyPr wrap="none" lIns="0" tIns="0" rIns="0" bIns="0" rtlCol="0" anchor="t"/>
-          <a:lstStyle/>
-          <a:p>
-            <a:pPr algn="l" indent="0" marL="0">
-              <a:lnSpc>
-                <a:spcPct val="105000"/>
-              </a:lnSpc>
-              <a:buNone/>
-            </a:pPr>
-            <a:r>
-              <a:rPr lang="zh-CN" altLang="en-US" sz="2600" dirty="0">
+            <a:off x="3410712" y="1965960"/>
+            <a:ext cx="8019288" cy="1246632"/>
+          </a:xfrm>
+          <a:prstGeom prst="rect">
+            <a:avLst/>
+          </a:prstGeom>
+          <a:noFill/>
+          <a:ln/>
+        </p:spPr>
+        <p:txBody>
+          <a:bodyPr wrap="none" lIns="0" tIns="0" rIns="0" bIns="0" rtlCol="0" anchor="t"/>
+          <a:lstStyle/>
+          <a:p>
+            <a:pPr algn="l" indent="0" marL="0">
+              <a:lnSpc>
+                <a:spcPct val="105000"/>
+              </a:lnSpc>
+              <a:buNone/>
+            </a:pPr>
+            <a:r>
+              <a:rPr lang="zh-CN" altLang="en-US" sz="2400" dirty="0">
                 <a:solidFill>
                   <a:srgbClr val="2B302F"/>
                 </a:solidFill>
@@ -7746,22 +8188,65 @@
                 <a:ea typeface="Microsoft YaHei" pitchFamily="34" charset="-122"/>
                 <a:cs typeface="Microsoft YaHei" pitchFamily="34" charset="-120"/>
               </a:rPr>
-              <a:t>均由全国人大表决；其他程序条件符合；全体代表60%赞成。</a:t>
-            </a:r>
-            <a:endParaRPr lang="zh-CN" sz="2600" dirty="0"/>
-          </a:p>
-        </p:txBody>
-      </p:sp>
-      <p:sp>
-        <p:nvSpPr>
-          <p:cNvPr id="6" name="Text 4"/>
-          <p:cNvSpPr/>
-          <p:nvPr/>
-        </p:nvSpPr>
-        <p:spPr>
-          <a:xfrm>
-            <a:off x="795528" y="3854196"/>
-            <a:ext cx="10533888" cy="457200"/>
+              <a:t>均由全国人大表决；其他程序</a:t>
+            </a:r>
+            <a:endParaRPr lang="zh-CN" sz="2400" dirty="0"/>
+          </a:p>
+          <a:p>
+            <a:pPr algn="l" indent="0" marL="0">
+              <a:lnSpc>
+                <a:spcPct val="105000"/>
+              </a:lnSpc>
+              <a:buNone/>
+            </a:pPr>
+            <a:r>
+              <a:rPr lang="zh-CN" altLang="en-US" sz="2400" dirty="0">
+                <a:solidFill>
+                  <a:srgbClr val="2B302F"/>
+                </a:solidFill>
+                <a:latin typeface="Microsoft YaHei" pitchFamily="34" charset="0"/>
+                <a:ea typeface="Microsoft YaHei" pitchFamily="34" charset="-122"/>
+                <a:cs typeface="Microsoft YaHei" pitchFamily="34" charset="-120"/>
+              </a:rPr>
+              <a:t>条件符合；全体代表60%赞成。</a:t>
+            </a:r>
+            <a:endParaRPr lang="zh-CN" sz="2400" dirty="0"/>
+          </a:p>
+        </p:txBody>
+      </p:sp>
+      <p:sp>
+        <p:nvSpPr>
+          <p:cNvPr id="6" name="Shape 4"/>
+          <p:cNvSpPr/>
+          <p:nvPr/>
+        </p:nvSpPr>
+        <p:spPr>
+          <a:xfrm>
+            <a:off x="758952" y="3336036"/>
+            <a:ext cx="10671048" cy="0"/>
+          </a:xfrm>
+          <a:prstGeom prst="line">
+            <a:avLst/>
+          </a:prstGeom>
+          <a:noFill/>
+          <a:ln w="16510">
+            <a:solidFill>
+              <a:srgbClr val="CBCDC5"/>
+            </a:solidFill>
+            <a:prstDash val="solid"/>
+          </a:ln>
+        </p:spPr>
+      </p:sp>
+      <p:sp>
+        <p:nvSpPr>
+          <p:cNvPr id="7" name="Text 5"/>
+          <p:cNvSpPr/>
+          <p:nvPr/>
+        </p:nvSpPr>
+        <p:spPr>
+          <a:xfrm>
+            <a:off x="758952" y="3505200"/>
+            <a:ext cx="2194560" cy="880872"/>
           </a:xfrm>
           <a:prstGeom prst="rect">
             <a:avLst/>
@@ -7796,33 +8281,33 @@
       </p:sp>
       <p:sp>
         <p:nvSpPr>
-          <p:cNvPr id="7" name="Text 5"/>
-          <p:cNvSpPr/>
-          <p:nvPr/>
-        </p:nvSpPr>
-        <p:spPr>
-          <a:xfrm>
-            <a:off x="795528" y="4384548"/>
-            <a:ext cx="10533888" cy="1165860"/>
-          </a:xfrm>
-          <a:prstGeom prst="rect">
-            <a:avLst/>
-          </a:prstGeom>
-          <a:noFill/>
-          <a:ln/>
-        </p:spPr>
-        <p:txBody>
-          <a:bodyPr wrap="none" lIns="0" tIns="0" rIns="0" bIns="0" rtlCol="0" anchor="t"/>
-          <a:lstStyle/>
-          <a:p>
-            <a:pPr algn="l" indent="0" marL="0">
-              <a:lnSpc>
-                <a:spcPct val="105000"/>
-              </a:lnSpc>
-              <a:buNone/>
-            </a:pPr>
-            <a:r>
-              <a:rPr lang="zh-CN" altLang="en-US" sz="2600" dirty="0">
+          <p:cNvPr id="8" name="Text 6"/>
+          <p:cNvSpPr/>
+          <p:nvPr/>
+        </p:nvSpPr>
+        <p:spPr>
+          <a:xfrm>
+            <a:off x="3410712" y="3505200"/>
+            <a:ext cx="8019288" cy="880872"/>
+          </a:xfrm>
+          <a:prstGeom prst="rect">
+            <a:avLst/>
+          </a:prstGeom>
+          <a:noFill/>
+          <a:ln/>
+        </p:spPr>
+        <p:txBody>
+          <a:bodyPr wrap="none" lIns="0" tIns="0" rIns="0" bIns="0" rtlCol="0" anchor="t"/>
+          <a:lstStyle/>
+          <a:p>
+            <a:pPr algn="l" indent="0" marL="0">
+              <a:lnSpc>
+                <a:spcPct val="105000"/>
+              </a:lnSpc>
+              <a:buNone/>
+            </a:pPr>
+            <a:r>
+              <a:rPr lang="zh-CN" altLang="en-US" sz="2400" dirty="0">
                 <a:solidFill>
                   <a:srgbClr val="2B302F"/>
                 </a:solidFill>
@@ -7832,13 +8317,120 @@
               </a:rPr>
               <a:t>①宪法修改　②法律和其他议案</a:t>
             </a:r>
-            <a:endParaRPr lang="zh-CN" sz="2600" dirty="0"/>
-          </a:p>
-        </p:txBody>
-      </p:sp>
-      <p:sp>
-        <p:nvSpPr>
-          <p:cNvPr id="8" name="Text 6"/>
+            <a:endParaRPr lang="zh-CN" sz="2400" dirty="0"/>
+          </a:p>
+        </p:txBody>
+      </p:sp>
+      <p:sp>
+        <p:nvSpPr>
+          <p:cNvPr id="9" name="Shape 7"/>
+          <p:cNvSpPr/>
+          <p:nvPr/>
+        </p:nvSpPr>
+        <p:spPr>
+          <a:xfrm>
+            <a:off x="758952" y="4509516"/>
+            <a:ext cx="10671048" cy="0"/>
+          </a:xfrm>
+          <a:prstGeom prst="line">
+            <a:avLst/>
+          </a:prstGeom>
+          <a:noFill/>
+          <a:ln w="16510">
+            <a:solidFill>
+              <a:srgbClr val="CBCDC5"/>
+            </a:solidFill>
+            <a:prstDash val="solid"/>
+          </a:ln>
+        </p:spPr>
+      </p:sp>
+      <p:sp>
+        <p:nvSpPr>
+          <p:cNvPr id="10" name="Text 8"/>
+          <p:cNvSpPr/>
+          <p:nvPr/>
+        </p:nvSpPr>
+        <p:spPr>
+          <a:xfrm>
+            <a:off x="758952" y="4678680"/>
+            <a:ext cx="2194560" cy="880872"/>
+          </a:xfrm>
+          <a:prstGeom prst="rect">
+            <a:avLst/>
+          </a:prstGeom>
+          <a:noFill/>
+          <a:ln/>
+        </p:spPr>
+        <p:txBody>
+          <a:bodyPr wrap="none" lIns="0" tIns="0" rIns="0" bIns="0" rtlCol="0" anchor="t"/>
+          <a:lstStyle/>
+          <a:p>
+            <a:pPr algn="l" indent="0" marL="0">
+              <a:lnSpc>
+                <a:spcPct val="105000"/>
+              </a:lnSpc>
+              <a:buNone/>
+            </a:pPr>
+            <a:r>
+              <a:rPr lang="zh-CN" altLang="en-US" sz="2400" b="1" dirty="0">
+                <a:solidFill>
+                  <a:srgbClr val="9B3D32"/>
+                </a:solidFill>
+                <a:latin typeface="Microsoft YaHei" pitchFamily="34" charset="0"/>
+                <a:ea typeface="Microsoft YaHei" pitchFamily="34" charset="-122"/>
+                <a:cs typeface="Microsoft YaHei" pitchFamily="34" charset="-120"/>
+              </a:rPr>
+              <a:t>进一步判断</a:t>
+            </a:r>
+            <a:endParaRPr lang="zh-CN" sz="2400" dirty="0"/>
+          </a:p>
+        </p:txBody>
+      </p:sp>
+      <p:sp>
+        <p:nvSpPr>
+          <p:cNvPr id="11" name="Text 9"/>
+          <p:cNvSpPr/>
+          <p:nvPr/>
+        </p:nvSpPr>
+        <p:spPr>
+          <a:xfrm>
+            <a:off x="3410712" y="4678680"/>
+            <a:ext cx="8019288" cy="880872"/>
+          </a:xfrm>
+          <a:prstGeom prst="rect">
+            <a:avLst/>
+          </a:prstGeom>
+          <a:noFill/>
+          <a:ln/>
+        </p:spPr>
+        <p:txBody>
+          <a:bodyPr wrap="none" lIns="0" tIns="0" rIns="0" bIns="0" rtlCol="0" anchor="t"/>
+          <a:lstStyle/>
+          <a:p>
+            <a:pPr algn="l" indent="0" marL="0">
+              <a:lnSpc>
+                <a:spcPct val="105000"/>
+              </a:lnSpc>
+              <a:buNone/>
+            </a:pPr>
+            <a:r>
+              <a:rPr lang="zh-CN" altLang="en-US" sz="2400" dirty="0">
+                <a:solidFill>
+                  <a:srgbClr val="2B302F"/>
+                </a:solidFill>
+                <a:latin typeface="Microsoft YaHei" pitchFamily="34" charset="0"/>
+                <a:ea typeface="Microsoft YaHei" pitchFamily="34" charset="-122"/>
+                <a:cs typeface="Microsoft YaHei" pitchFamily="34" charset="-120"/>
+              </a:rPr>
+              <a:t>提高修改门槛，还需要考虑什么代价？</a:t>
+            </a:r>
+            <a:endParaRPr lang="zh-CN" sz="2400" dirty="0"/>
+          </a:p>
+        </p:txBody>
+      </p:sp>
+      <p:sp>
+        <p:nvSpPr>
+          <p:cNvPr id="12" name="Text 10"/>
           <p:cNvSpPr/>
           <p:nvPr/>
         </p:nvSpPr>
@@ -7880,7 +8472,7 @@
       </p:sp>
       <p:sp>
         <p:nvSpPr>
-          <p:cNvPr id="9" name="Text 7"/>
+          <p:cNvPr id="13" name="Text 11"/>
           <p:cNvSpPr/>
           <p:nvPr/>
         </p:nvSpPr>
@@ -7922,7 +8514,7 @@
       </p:sp>
       <p:sp>
         <p:nvSpPr>
-          <p:cNvPr id="10" name="Text 8"/>
+          <p:cNvPr id="14" name="Text 12"/>
           <p:cNvSpPr/>
           <p:nvPr/>
         </p:nvSpPr>
@@ -7956,7 +8548,7 @@
                 <a:ea typeface="Microsoft YaHei" pitchFamily="34" charset="-122"/>
                 <a:cs typeface="Microsoft YaHei" pitchFamily="34" charset="-120"/>
               </a:rPr>
-              <a:t>15 / 36</a:t>
+              <a:t>15 / 38</a:t>
             </a:r>
             <a:endParaRPr lang="zh-CN" sz="1200" dirty="0"/>
           </a:p>
@@ -8030,7 +8622,7 @@
                 <a:ea typeface="Microsoft YaHei" pitchFamily="34" charset="-122"/>
                 <a:cs typeface="Microsoft YaHei" pitchFamily="34" charset="-120"/>
               </a:rPr>
-              <a:t>一 国家生活的根本规则</a:t>
+              <a:t>上节｜一 国家生活的根本规则</a:t>
             </a:r>
             <a:endParaRPr lang="zh-CN" sz="1700" dirty="0"/>
           </a:p>
@@ -8420,7 +9012,7 @@
                 <a:ea typeface="Microsoft YaHei" pitchFamily="34" charset="-122"/>
                 <a:cs typeface="Microsoft YaHei" pitchFamily="34" charset="-120"/>
               </a:rPr>
-              <a:t>16 / 36</a:t>
+              <a:t>16 / 38</a:t>
             </a:r>
             <a:endParaRPr lang="zh-CN" sz="1200" dirty="0"/>
           </a:p>
@@ -8494,7 +9086,7 @@
                 <a:ea typeface="Microsoft YaHei" pitchFamily="34" charset="-122"/>
                 <a:cs typeface="Microsoft YaHei" pitchFamily="34" charset="-120"/>
               </a:rPr>
-              <a:t>二 根本要求怎样进入具体制度</a:t>
+              <a:t>下节｜二 根本要求怎样进入具体制度</a:t>
             </a:r>
             <a:endParaRPr lang="zh-CN" sz="1700" dirty="0"/>
           </a:p>
@@ -8766,7 +9358,7 @@
                 <a:ea typeface="Microsoft YaHei" pitchFamily="34" charset="-122"/>
                 <a:cs typeface="Microsoft YaHei" pitchFamily="34" charset="-120"/>
               </a:rPr>
-              <a:t>17 / 36</a:t>
+              <a:t>17 / 38</a:t>
             </a:r>
             <a:endParaRPr lang="zh-CN" sz="1200" dirty="0"/>
           </a:p>
@@ -8840,7 +9432,7 @@
                 <a:ea typeface="Microsoft YaHei" pitchFamily="34" charset="-122"/>
                 <a:cs typeface="Microsoft YaHei" pitchFamily="34" charset="-120"/>
               </a:rPr>
-              <a:t>二 根本要求怎样进入具体制度</a:t>
+              <a:t>下节｜二 根本要求怎样进入具体制度</a:t>
             </a:r>
             <a:endParaRPr lang="zh-CN" sz="1700" dirty="0"/>
           </a:p>
@@ -9330,7 +9922,7 @@
                 <a:ea typeface="Microsoft YaHei" pitchFamily="34" charset="-122"/>
                 <a:cs typeface="Microsoft YaHei" pitchFamily="34" charset="-120"/>
               </a:rPr>
-              <a:t>18 / 36</a:t>
+              <a:t>18 / 38</a:t>
             </a:r>
             <a:endParaRPr lang="zh-CN" sz="1200" dirty="0"/>
           </a:p>
@@ -9404,7 +9996,7 @@
                 <a:ea typeface="Microsoft YaHei" pitchFamily="34" charset="-122"/>
                 <a:cs typeface="Microsoft YaHei" pitchFamily="34" charset="-120"/>
               </a:rPr>
-              <a:t>二 根本要求怎样进入具体制度</a:t>
+              <a:t>下节｜二 根本要求怎样进入具体制度</a:t>
             </a:r>
             <a:endParaRPr lang="zh-CN" sz="1700" dirty="0"/>
           </a:p>
@@ -9780,7 +10372,7 @@
                 <a:ea typeface="Microsoft YaHei" pitchFamily="34" charset="-122"/>
                 <a:cs typeface="Microsoft YaHei" pitchFamily="34" charset="-120"/>
               </a:rPr>
-              <a:t>19 / 36</a:t>
+              <a:t>19 / 38</a:t>
             </a:r>
             <a:endParaRPr lang="zh-CN" sz="1200" dirty="0"/>
           </a:p>
@@ -9854,7 +10446,7 @@
                 <a:ea typeface="Microsoft YaHei" pitchFamily="34" charset="-122"/>
                 <a:cs typeface="Microsoft YaHei" pitchFamily="34" charset="-120"/>
               </a:rPr>
-              <a:t>一 国家生活的根本规则</a:t>
+              <a:t>上节｜一 国家生活的根本规则</a:t>
             </a:r>
             <a:endParaRPr lang="zh-CN" sz="1700" dirty="0"/>
           </a:p>
@@ -10314,7 +10906,7 @@
                 <a:ea typeface="Microsoft YaHei" pitchFamily="34" charset="-122"/>
                 <a:cs typeface="Microsoft YaHei" pitchFamily="34" charset="-120"/>
               </a:rPr>
-              <a:t>2 / 36</a:t>
+              <a:t>2 / 38</a:t>
             </a:r>
             <a:endParaRPr lang="zh-CN" sz="1200" dirty="0"/>
           </a:p>
@@ -10388,7 +10980,7 @@
                 <a:ea typeface="Microsoft YaHei" pitchFamily="34" charset="-122"/>
                 <a:cs typeface="Microsoft YaHei" pitchFamily="34" charset="-120"/>
               </a:rPr>
-              <a:t>二 根本要求怎样进入具体制度</a:t>
+              <a:t>下节｜二 根本要求怎样进入具体制度</a:t>
             </a:r>
             <a:endParaRPr lang="zh-CN" sz="1700" dirty="0"/>
           </a:p>
@@ -10618,7 +11210,7 @@
                 <a:ea typeface="Microsoft YaHei" pitchFamily="34" charset="-122"/>
                 <a:cs typeface="Microsoft YaHei" pitchFamily="34" charset="-120"/>
               </a:rPr>
-              <a:t>国家赔偿法第7条第1款</a:t>
+              <a:t>国家赔偿法第7条第1款、第16条第1款；机关义务与个人责任分开说明</a:t>
             </a:r>
             <a:endParaRPr lang="zh-CN" sz="1200" dirty="0"/>
           </a:p>
@@ -10660,7 +11252,7 @@
                 <a:ea typeface="Microsoft YaHei" pitchFamily="34" charset="-122"/>
                 <a:cs typeface="Microsoft YaHei" pitchFamily="34" charset="-120"/>
               </a:rPr>
-              <a:t>20 / 36</a:t>
+              <a:t>20 / 38</a:t>
             </a:r>
             <a:endParaRPr lang="zh-CN" sz="1200" dirty="0"/>
           </a:p>
@@ -10734,7 +11326,7 @@
                 <a:ea typeface="Microsoft YaHei" pitchFamily="34" charset="-122"/>
                 <a:cs typeface="Microsoft YaHei" pitchFamily="34" charset="-120"/>
               </a:rPr>
-              <a:t>二 根本要求怎样进入具体制度</a:t>
+              <a:t>下节｜二 根本要求怎样进入具体制度</a:t>
             </a:r>
             <a:endParaRPr lang="zh-CN" sz="1700" dirty="0"/>
           </a:p>
@@ -11164,7 +11756,7 @@
                 <a:ea typeface="Microsoft YaHei" pitchFamily="34" charset="-122"/>
                 <a:cs typeface="Microsoft YaHei" pitchFamily="34" charset="-120"/>
               </a:rPr>
-              <a:t>21 / 36</a:t>
+              <a:t>21 / 38</a:t>
             </a:r>
             <a:endParaRPr lang="zh-CN" sz="1200" dirty="0"/>
           </a:p>
@@ -11238,7 +11830,7 @@
                 <a:ea typeface="Microsoft YaHei" pitchFamily="34" charset="-122"/>
                 <a:cs typeface="Microsoft YaHei" pitchFamily="34" charset="-120"/>
               </a:rPr>
-              <a:t>二 根本要求怎样进入具体制度</a:t>
+              <a:t>下节｜二 根本要求怎样进入具体制度</a:t>
             </a:r>
             <a:endParaRPr lang="zh-CN" sz="1700" dirty="0"/>
           </a:p>
@@ -11614,7 +12206,7 @@
                 <a:ea typeface="Microsoft YaHei" pitchFamily="34" charset="-122"/>
                 <a:cs typeface="Microsoft YaHei" pitchFamily="34" charset="-120"/>
               </a:rPr>
-              <a:t>22 / 36</a:t>
+              <a:t>22 / 38</a:t>
             </a:r>
             <a:endParaRPr lang="zh-CN" sz="1200" dirty="0"/>
           </a:p>
@@ -11688,7 +12280,7 @@
                 <a:ea typeface="Microsoft YaHei" pitchFamily="34" charset="-122"/>
                 <a:cs typeface="Microsoft YaHei" pitchFamily="34" charset="-120"/>
               </a:rPr>
-              <a:t>二 根本要求怎样进入具体制度</a:t>
+              <a:t>下节｜二 根本要求怎样进入具体制度</a:t>
             </a:r>
             <a:endParaRPr lang="zh-CN" sz="1700" dirty="0"/>
           </a:p>
@@ -12078,7 +12670,7 @@
                 <a:ea typeface="Microsoft YaHei" pitchFamily="34" charset="-122"/>
                 <a:cs typeface="Microsoft YaHei" pitchFamily="34" charset="-120"/>
               </a:rPr>
-              <a:t>23 / 36</a:t>
+              <a:t>23 / 38</a:t>
             </a:r>
             <a:endParaRPr lang="zh-CN" sz="1200" dirty="0"/>
           </a:p>
@@ -12152,7 +12744,7 @@
                 <a:ea typeface="Microsoft YaHei" pitchFamily="34" charset="-122"/>
                 <a:cs typeface="Microsoft YaHei" pitchFamily="34" charset="-120"/>
               </a:rPr>
-              <a:t>二 根本要求怎样进入具体制度</a:t>
+              <a:t>下节｜二 根本要求怎样进入具体制度</a:t>
             </a:r>
             <a:endParaRPr lang="zh-CN" sz="1700" dirty="0"/>
           </a:p>
@@ -12582,7 +13174,7 @@
                 <a:ea typeface="Microsoft YaHei" pitchFamily="34" charset="-122"/>
                 <a:cs typeface="Microsoft YaHei" pitchFamily="34" charset="-120"/>
               </a:rPr>
-              <a:t>24 / 36</a:t>
+              <a:t>24 / 38</a:t>
             </a:r>
             <a:endParaRPr lang="zh-CN" sz="1200" dirty="0"/>
           </a:p>
@@ -12656,7 +13248,7 @@
                 <a:ea typeface="Microsoft YaHei" pitchFamily="34" charset="-122"/>
                 <a:cs typeface="Microsoft YaHei" pitchFamily="34" charset="-120"/>
               </a:rPr>
-              <a:t>二 根本要求怎样进入具体制度</a:t>
+              <a:t>下节｜二 根本要求怎样进入具体制度</a:t>
             </a:r>
             <a:endParaRPr lang="zh-CN" sz="1700" dirty="0"/>
           </a:p>
@@ -12712,8 +13304,8 @@
         </p:nvSpPr>
         <p:spPr>
           <a:xfrm>
-            <a:off x="795528" y="1920240"/>
-            <a:ext cx="10533888" cy="457200"/>
+            <a:off x="758952" y="1965960"/>
+            <a:ext cx="2926080" cy="1002792"/>
           </a:xfrm>
           <a:prstGeom prst="rect">
             <a:avLst/>
@@ -12740,7 +13332,27 @@
                 <a:ea typeface="Microsoft YaHei" pitchFamily="34" charset="-122"/>
                 <a:cs typeface="Microsoft YaHei" pitchFamily="34" charset="-120"/>
               </a:rPr>
-              <a:t>继续刚才的疑问｜教学设定</a:t>
+              <a:t>继续刚才的疑问｜</a:t>
+            </a:r>
+            <a:endParaRPr lang="zh-CN" sz="2400" dirty="0"/>
+          </a:p>
+          <a:p>
+            <a:pPr algn="l" indent="0" marL="0">
+              <a:lnSpc>
+                <a:spcPct val="105000"/>
+              </a:lnSpc>
+              <a:buNone/>
+            </a:pPr>
+            <a:r>
+              <a:rPr lang="zh-CN" altLang="en-US" sz="2400" b="1" dirty="0">
+                <a:solidFill>
+                  <a:srgbClr val="9B3D32"/>
+                </a:solidFill>
+                <a:latin typeface="Microsoft YaHei" pitchFamily="34" charset="0"/>
+                <a:ea typeface="Microsoft YaHei" pitchFamily="34" charset="-122"/>
+                <a:cs typeface="Microsoft YaHei" pitchFamily="34" charset="-120"/>
+              </a:rPr>
+              <a:t>教学设定</a:t>
             </a:r>
             <a:endParaRPr lang="zh-CN" sz="2400" dirty="0"/>
           </a:p>
@@ -12754,27 +13366,27 @@
         </p:nvSpPr>
         <p:spPr>
           <a:xfrm>
-            <a:off x="795528" y="2450592"/>
-            <a:ext cx="10533888" cy="1165860"/>
-          </a:xfrm>
-          <a:prstGeom prst="rect">
-            <a:avLst/>
-          </a:prstGeom>
-          <a:noFill/>
-          <a:ln/>
-        </p:spPr>
-        <p:txBody>
-          <a:bodyPr wrap="none" lIns="0" tIns="0" rIns="0" bIns="0" rtlCol="0" anchor="t"/>
-          <a:lstStyle/>
-          <a:p>
-            <a:pPr algn="l" indent="0" marL="0">
-              <a:lnSpc>
-                <a:spcPct val="105000"/>
-              </a:lnSpc>
-              <a:buNone/>
-            </a:pPr>
-            <a:r>
-              <a:rPr lang="zh-CN" altLang="en-US" sz="2600" dirty="0">
+            <a:off x="4142232" y="1965960"/>
+            <a:ext cx="7287768" cy="1002792"/>
+          </a:xfrm>
+          <a:prstGeom prst="rect">
+            <a:avLst/>
+          </a:prstGeom>
+          <a:noFill/>
+          <a:ln/>
+        </p:spPr>
+        <p:txBody>
+          <a:bodyPr wrap="none" lIns="0" tIns="0" rIns="0" bIns="0" rtlCol="0" anchor="t"/>
+          <a:lstStyle/>
+          <a:p>
+            <a:pPr algn="l" indent="0" marL="0">
+              <a:lnSpc>
+                <a:spcPct val="105000"/>
+              </a:lnSpc>
+              <a:buNone/>
+            </a:pPr>
+            <a:r>
+              <a:rPr lang="zh-CN" altLang="en-US" sz="2400" dirty="0">
                 <a:solidFill>
                   <a:srgbClr val="2B302F"/>
                 </a:solidFill>
@@ -12784,17 +13396,17 @@
               </a:rPr>
               <a:t>赔偿情形和义务机关都由普通法律规定，</a:t>
             </a:r>
-            <a:endParaRPr lang="zh-CN" sz="2600" dirty="0"/>
-          </a:p>
-          <a:p>
-            <a:pPr algn="l" indent="0" marL="0">
-              <a:lnSpc>
-                <a:spcPct val="105000"/>
-              </a:lnSpc>
-              <a:buNone/>
-            </a:pPr>
-            <a:r>
-              <a:rPr lang="zh-CN" altLang="en-US" sz="2600" dirty="0">
+            <a:endParaRPr lang="zh-CN" sz="2400" dirty="0"/>
+          </a:p>
+          <a:p>
+            <a:pPr algn="l" indent="0" marL="0">
+              <a:lnSpc>
+                <a:spcPct val="105000"/>
+              </a:lnSpc>
+              <a:buNone/>
+            </a:pPr>
+            <a:r>
+              <a:rPr lang="zh-CN" altLang="en-US" sz="2400" dirty="0">
                 <a:solidFill>
                   <a:srgbClr val="2B302F"/>
                 </a:solidFill>
@@ -12804,20 +13416,43 @@
               </a:rPr>
               <a:t>宪法在这里究竟还约束什么？</a:t>
             </a:r>
-            <a:endParaRPr lang="zh-CN" sz="2600" dirty="0"/>
-          </a:p>
-        </p:txBody>
-      </p:sp>
-      <p:sp>
-        <p:nvSpPr>
-          <p:cNvPr id="6" name="Text 4"/>
-          <p:cNvSpPr/>
-          <p:nvPr/>
-        </p:nvSpPr>
-        <p:spPr>
-          <a:xfrm>
-            <a:off x="795528" y="3854196"/>
-            <a:ext cx="10533888" cy="457200"/>
+            <a:endParaRPr lang="zh-CN" sz="2400" dirty="0"/>
+          </a:p>
+        </p:txBody>
+      </p:sp>
+      <p:sp>
+        <p:nvSpPr>
+          <p:cNvPr id="6" name="Shape 4"/>
+          <p:cNvSpPr/>
+          <p:nvPr/>
+        </p:nvSpPr>
+        <p:spPr>
+          <a:xfrm>
+            <a:off x="758952" y="3092196"/>
+            <a:ext cx="10671048" cy="0"/>
+          </a:xfrm>
+          <a:prstGeom prst="line">
+            <a:avLst/>
+          </a:prstGeom>
+          <a:noFill/>
+          <a:ln w="16510">
+            <a:solidFill>
+              <a:srgbClr val="CBCDC5"/>
+            </a:solidFill>
+            <a:prstDash val="solid"/>
+          </a:ln>
+        </p:spPr>
+      </p:sp>
+      <p:sp>
+        <p:nvSpPr>
+          <p:cNvPr id="7" name="Text 5"/>
+          <p:cNvSpPr/>
+          <p:nvPr/>
+        </p:nvSpPr>
+        <p:spPr>
+          <a:xfrm>
+            <a:off x="758952" y="3261360"/>
+            <a:ext cx="2926080" cy="1002792"/>
           </a:xfrm>
           <a:prstGeom prst="rect">
             <a:avLst/>
@@ -12852,33 +13487,33 @@
       </p:sp>
       <p:sp>
         <p:nvSpPr>
-          <p:cNvPr id="7" name="Text 5"/>
-          <p:cNvSpPr/>
-          <p:nvPr/>
-        </p:nvSpPr>
-        <p:spPr>
-          <a:xfrm>
-            <a:off x="795528" y="4384548"/>
-            <a:ext cx="10533888" cy="1165860"/>
-          </a:xfrm>
-          <a:prstGeom prst="rect">
-            <a:avLst/>
-          </a:prstGeom>
-          <a:noFill/>
-          <a:ln/>
-        </p:spPr>
-        <p:txBody>
-          <a:bodyPr wrap="none" lIns="0" tIns="0" rIns="0" bIns="0" rtlCol="0" anchor="t"/>
-          <a:lstStyle/>
-          <a:p>
-            <a:pPr algn="l" indent="0" marL="0">
-              <a:lnSpc>
-                <a:spcPct val="105000"/>
-              </a:lnSpc>
-              <a:buNone/>
-            </a:pPr>
-            <a:r>
-              <a:rPr lang="zh-CN" altLang="en-US" sz="2600" dirty="0">
+          <p:cNvPr id="8" name="Text 6"/>
+          <p:cNvSpPr/>
+          <p:nvPr/>
+        </p:nvSpPr>
+        <p:spPr>
+          <a:xfrm>
+            <a:off x="4142232" y="3261360"/>
+            <a:ext cx="7287768" cy="1002792"/>
+          </a:xfrm>
+          <a:prstGeom prst="rect">
+            <a:avLst/>
+          </a:prstGeom>
+          <a:noFill/>
+          <a:ln/>
+        </p:spPr>
+        <p:txBody>
+          <a:bodyPr wrap="none" lIns="0" tIns="0" rIns="0" bIns="0" rtlCol="0" anchor="t"/>
+          <a:lstStyle/>
+          <a:p>
+            <a:pPr algn="l" indent="0" marL="0">
+              <a:lnSpc>
+                <a:spcPct val="105000"/>
+              </a:lnSpc>
+              <a:buNone/>
+            </a:pPr>
+            <a:r>
+              <a:rPr lang="zh-CN" altLang="en-US" sz="2400" dirty="0">
                 <a:solidFill>
                   <a:srgbClr val="2B302F"/>
                 </a:solidFill>
@@ -12886,19 +13521,19 @@
                 <a:ea typeface="Microsoft YaHei" pitchFamily="34" charset="-122"/>
                 <a:cs typeface="Microsoft YaHei" pitchFamily="34" charset="-120"/>
               </a:rPr>
-              <a:t>用第5条与第41条回应；再举国家赔偿法的一项具体安排，说明为何</a:t>
-            </a:r>
-            <a:endParaRPr lang="zh-CN" sz="2600" dirty="0"/>
-          </a:p>
-          <a:p>
-            <a:pPr algn="l" indent="0" marL="0">
-              <a:lnSpc>
-                <a:spcPct val="105000"/>
-              </a:lnSpc>
-              <a:buNone/>
-            </a:pPr>
-            <a:r>
-              <a:rPr lang="zh-CN" altLang="en-US" sz="2600" dirty="0">
+              <a:t>用第5条与第41条回应；再举国家赔偿法的一项具</a:t>
+            </a:r>
+            <a:endParaRPr lang="zh-CN" sz="2400" dirty="0"/>
+          </a:p>
+          <a:p>
+            <a:pPr algn="l" indent="0" marL="0">
+              <a:lnSpc>
+                <a:spcPct val="105000"/>
+              </a:lnSpc>
+              <a:buNone/>
+            </a:pPr>
+            <a:r>
+              <a:rPr lang="zh-CN" altLang="en-US" sz="2400" dirty="0">
                 <a:solidFill>
                   <a:srgbClr val="2B302F"/>
                 </a:solidFill>
@@ -12906,15 +13541,142 @@
                 <a:ea typeface="Microsoft YaHei" pitchFamily="34" charset="-122"/>
                 <a:cs typeface="Microsoft YaHei" pitchFamily="34" charset="-120"/>
               </a:rPr>
-              <a:t>仍需普通法律。</a:t>
-            </a:r>
-            <a:endParaRPr lang="zh-CN" sz="2600" dirty="0"/>
-          </a:p>
-        </p:txBody>
-      </p:sp>
-      <p:sp>
-        <p:nvSpPr>
-          <p:cNvPr id="8" name="Text 6"/>
+              <a:t>体安排，说明为何仍需普通法律。</a:t>
+            </a:r>
+            <a:endParaRPr lang="zh-CN" sz="2400" dirty="0"/>
+          </a:p>
+        </p:txBody>
+      </p:sp>
+      <p:sp>
+        <p:nvSpPr>
+          <p:cNvPr id="9" name="Shape 7"/>
+          <p:cNvSpPr/>
+          <p:nvPr/>
+        </p:nvSpPr>
+        <p:spPr>
+          <a:xfrm>
+            <a:off x="758952" y="4387596"/>
+            <a:ext cx="10671048" cy="0"/>
+          </a:xfrm>
+          <a:prstGeom prst="line">
+            <a:avLst/>
+          </a:prstGeom>
+          <a:noFill/>
+          <a:ln w="16510">
+            <a:solidFill>
+              <a:srgbClr val="CBCDC5"/>
+            </a:solidFill>
+            <a:prstDash val="solid"/>
+          </a:ln>
+        </p:spPr>
+      </p:sp>
+      <p:sp>
+        <p:nvSpPr>
+          <p:cNvPr id="10" name="Text 8"/>
+          <p:cNvSpPr/>
+          <p:nvPr/>
+        </p:nvSpPr>
+        <p:spPr>
+          <a:xfrm>
+            <a:off x="758952" y="4556760"/>
+            <a:ext cx="2926080" cy="1002792"/>
+          </a:xfrm>
+          <a:prstGeom prst="rect">
+            <a:avLst/>
+          </a:prstGeom>
+          <a:noFill/>
+          <a:ln/>
+        </p:spPr>
+        <p:txBody>
+          <a:bodyPr wrap="none" lIns="0" tIns="0" rIns="0" bIns="0" rtlCol="0" anchor="t"/>
+          <a:lstStyle/>
+          <a:p>
+            <a:pPr algn="l" indent="0" marL="0">
+              <a:lnSpc>
+                <a:spcPct val="105000"/>
+              </a:lnSpc>
+              <a:buNone/>
+            </a:pPr>
+            <a:r>
+              <a:rPr lang="zh-CN" altLang="en-US" sz="2400" b="1" dirty="0">
+                <a:solidFill>
+                  <a:srgbClr val="9B3D32"/>
+                </a:solidFill>
+                <a:latin typeface="Microsoft YaHei" pitchFamily="34" charset="0"/>
+                <a:ea typeface="Microsoft YaHei" pitchFamily="34" charset="-122"/>
+                <a:cs typeface="Microsoft YaHei" pitchFamily="34" charset="-120"/>
+              </a:rPr>
+              <a:t>再比较一项主张</a:t>
+            </a:r>
+            <a:endParaRPr lang="zh-CN" sz="2400" dirty="0"/>
+          </a:p>
+        </p:txBody>
+      </p:sp>
+      <p:sp>
+        <p:nvSpPr>
+          <p:cNvPr id="11" name="Text 9"/>
+          <p:cNvSpPr/>
+          <p:nvPr/>
+        </p:nvSpPr>
+        <p:spPr>
+          <a:xfrm>
+            <a:off x="4142232" y="4556760"/>
+            <a:ext cx="7287768" cy="1002792"/>
+          </a:xfrm>
+          <a:prstGeom prst="rect">
+            <a:avLst/>
+          </a:prstGeom>
+          <a:noFill/>
+          <a:ln/>
+        </p:spPr>
+        <p:txBody>
+          <a:bodyPr wrap="none" lIns="0" tIns="0" rIns="0" bIns="0" rtlCol="0" anchor="t"/>
+          <a:lstStyle/>
+          <a:p>
+            <a:pPr algn="l" indent="0" marL="0">
+              <a:lnSpc>
+                <a:spcPct val="105000"/>
+              </a:lnSpc>
+              <a:buNone/>
+            </a:pPr>
+            <a:r>
+              <a:rPr lang="zh-CN" altLang="en-US" sz="2400" dirty="0">
+                <a:solidFill>
+                  <a:srgbClr val="2B302F"/>
+                </a:solidFill>
+                <a:latin typeface="Microsoft YaHei" pitchFamily="34" charset="0"/>
+                <a:ea typeface="Microsoft YaHei" pitchFamily="34" charset="-122"/>
+                <a:cs typeface="Microsoft YaHei" pitchFamily="34" charset="-120"/>
+              </a:rPr>
+              <a:t>“为保障权利，申请条件越少越好。”第12条提供</a:t>
+            </a:r>
+            <a:endParaRPr lang="zh-CN" sz="2400" dirty="0"/>
+          </a:p>
+          <a:p>
+            <a:pPr algn="l" indent="0" marL="0">
+              <a:lnSpc>
+                <a:spcPct val="105000"/>
+              </a:lnSpc>
+              <a:buNone/>
+            </a:pPr>
+            <a:r>
+              <a:rPr lang="zh-CN" altLang="en-US" sz="2400" dirty="0">
+                <a:solidFill>
+                  <a:srgbClr val="2B302F"/>
+                </a:solidFill>
+                <a:latin typeface="Microsoft YaHei" pitchFamily="34" charset="0"/>
+                <a:ea typeface="Microsoft YaHei" pitchFamily="34" charset="-122"/>
+                <a:cs typeface="Microsoft YaHei" pitchFamily="34" charset="-120"/>
+              </a:rPr>
+              <a:t>了什么支持或反例？</a:t>
+            </a:r>
+            <a:endParaRPr lang="zh-CN" sz="2400" dirty="0"/>
+          </a:p>
+        </p:txBody>
+      </p:sp>
+      <p:sp>
+        <p:nvSpPr>
+          <p:cNvPr id="12" name="Text 10"/>
           <p:cNvSpPr/>
           <p:nvPr/>
         </p:nvSpPr>
@@ -12956,7 +13718,7 @@
       </p:sp>
       <p:sp>
         <p:nvSpPr>
-          <p:cNvPr id="9" name="Text 7"/>
+          <p:cNvPr id="13" name="Text 11"/>
           <p:cNvSpPr/>
           <p:nvPr/>
         </p:nvSpPr>
@@ -12998,7 +13760,7 @@
       </p:sp>
       <p:sp>
         <p:nvSpPr>
-          <p:cNvPr id="10" name="Text 8"/>
+          <p:cNvPr id="14" name="Text 12"/>
           <p:cNvSpPr/>
           <p:nvPr/>
         </p:nvSpPr>
@@ -13032,7 +13794,7 @@
                 <a:ea typeface="Microsoft YaHei" pitchFamily="34" charset="-122"/>
                 <a:cs typeface="Microsoft YaHei" pitchFamily="34" charset="-120"/>
               </a:rPr>
-              <a:t>25 / 36</a:t>
+              <a:t>25 / 38</a:t>
             </a:r>
             <a:endParaRPr lang="zh-CN" sz="1200" dirty="0"/>
           </a:p>
@@ -13106,7 +13868,7 @@
                 <a:ea typeface="Microsoft YaHei" pitchFamily="34" charset="-122"/>
                 <a:cs typeface="Microsoft YaHei" pitchFamily="34" charset="-120"/>
               </a:rPr>
-              <a:t>二 根本要求怎样进入具体制度</a:t>
+              <a:t>下节｜二 根本要求怎样进入具体制度</a:t>
             </a:r>
             <a:endParaRPr lang="zh-CN" sz="1700" dirty="0"/>
           </a:p>
@@ -13163,7 +13925,7 @@
         <p:spPr>
           <a:xfrm>
             <a:off x="713232" y="1920240"/>
-            <a:ext cx="73152" cy="1696212"/>
+            <a:ext cx="73152" cy="1048512"/>
           </a:xfrm>
           <a:prstGeom prst="rect">
             <a:avLst/>
@@ -13190,7 +13952,7 @@
         <p:spPr>
           <a:xfrm>
             <a:off x="923544" y="1965960"/>
-            <a:ext cx="2194560" cy="1650492"/>
+            <a:ext cx="2926080" cy="1002792"/>
           </a:xfrm>
           <a:prstGeom prst="rect">
             <a:avLst/>
@@ -13217,27 +13979,7 @@
                 <a:ea typeface="Microsoft YaHei" pitchFamily="34" charset="-122"/>
                 <a:cs typeface="Microsoft YaHei" pitchFamily="34" charset="-120"/>
               </a:rPr>
-              <a:t>已经有的</a:t>
-            </a:r>
-            <a:endParaRPr lang="zh-CN" sz="2400" dirty="0"/>
-          </a:p>
-          <a:p>
-            <a:pPr algn="l" indent="0" marL="0">
-              <a:lnSpc>
-                <a:spcPct val="105000"/>
-              </a:lnSpc>
-              <a:buNone/>
-            </a:pPr>
-            <a:r>
-              <a:rPr lang="zh-CN" altLang="en-US" sz="2400" b="1" dirty="0">
-                <a:solidFill>
-                  <a:srgbClr val="9B3D32"/>
-                </a:solidFill>
-                <a:latin typeface="Microsoft YaHei" pitchFamily="34" charset="0"/>
-                <a:ea typeface="Microsoft YaHei" pitchFamily="34" charset="-122"/>
-                <a:cs typeface="Microsoft YaHei" pitchFamily="34" charset="-120"/>
-              </a:rPr>
-              <a:t>宪法要求</a:t>
+              <a:t>宪法已有要求</a:t>
             </a:r>
             <a:endParaRPr lang="zh-CN" sz="2400" dirty="0"/>
           </a:p>
@@ -13251,8 +13993,8 @@
         </p:nvSpPr>
         <p:spPr>
           <a:xfrm>
-            <a:off x="3410712" y="1965960"/>
-            <a:ext cx="8019288" cy="1650492"/>
+            <a:off x="4142232" y="1965960"/>
+            <a:ext cx="7287768" cy="1002792"/>
           </a:xfrm>
           <a:prstGeom prst="rect">
             <a:avLst/>
@@ -13279,7 +14021,27 @@
                 <a:ea typeface="Microsoft YaHei" pitchFamily="34" charset="-122"/>
                 <a:cs typeface="Microsoft YaHei" pitchFamily="34" charset="-120"/>
               </a:rPr>
-              <a:t>相应赔偿权已获确认；普通法律不得抵触宪法。</a:t>
+              <a:t>第41条确认相应赔偿权；第5条要求普通法律不得</a:t>
+            </a:r>
+            <a:endParaRPr lang="zh-CN" sz="2400" dirty="0"/>
+          </a:p>
+          <a:p>
+            <a:pPr algn="l" indent="0" marL="0">
+              <a:lnSpc>
+                <a:spcPct val="105000"/>
+              </a:lnSpc>
+              <a:buNone/>
+            </a:pPr>
+            <a:r>
+              <a:rPr lang="zh-CN" altLang="en-US" sz="2400" dirty="0">
+                <a:solidFill>
+                  <a:srgbClr val="2B302F"/>
+                </a:solidFill>
+                <a:latin typeface="Microsoft YaHei" pitchFamily="34" charset="0"/>
+                <a:ea typeface="Microsoft YaHei" pitchFamily="34" charset="-122"/>
+                <a:cs typeface="Microsoft YaHei" pitchFamily="34" charset="-120"/>
+              </a:rPr>
+              <a:t>抵触宪法。</a:t>
             </a:r>
             <a:endParaRPr lang="zh-CN" sz="2400" dirty="0"/>
           </a:p>
@@ -13293,8 +14055,8 @@
         </p:nvSpPr>
         <p:spPr>
           <a:xfrm>
-            <a:off x="713232" y="3863340"/>
-            <a:ext cx="73152" cy="1696212"/>
+            <a:off x="713232" y="3215640"/>
+            <a:ext cx="73152" cy="1048512"/>
           </a:xfrm>
           <a:prstGeom prst="rect">
             <a:avLst/>
@@ -13314,14 +14076,37 @@
       </p:sp>
       <p:sp>
         <p:nvSpPr>
-          <p:cNvPr id="8" name="Text 6"/>
-          <p:cNvSpPr/>
-          <p:nvPr/>
-        </p:nvSpPr>
-        <p:spPr>
-          <a:xfrm>
-            <a:off x="923544" y="3909060"/>
-            <a:ext cx="2194560" cy="1650492"/>
+          <p:cNvPr id="8" name="Shape 6"/>
+          <p:cNvSpPr/>
+          <p:nvPr/>
+        </p:nvSpPr>
+        <p:spPr>
+          <a:xfrm>
+            <a:off x="758952" y="3092196"/>
+            <a:ext cx="10671048" cy="0"/>
+          </a:xfrm>
+          <a:prstGeom prst="line">
+            <a:avLst/>
+          </a:prstGeom>
+          <a:noFill/>
+          <a:ln w="16510">
+            <a:solidFill>
+              <a:srgbClr val="CBCDC5"/>
+            </a:solidFill>
+            <a:prstDash val="solid"/>
+          </a:ln>
+        </p:spPr>
+      </p:sp>
+      <p:sp>
+        <p:nvSpPr>
+          <p:cNvPr id="9" name="Text 7"/>
+          <p:cNvSpPr/>
+          <p:nvPr/>
+        </p:nvSpPr>
+        <p:spPr>
+          <a:xfrm>
+            <a:off x="923544" y="3261360"/>
+            <a:ext cx="2926080" cy="1002792"/>
           </a:xfrm>
           <a:prstGeom prst="rect">
             <a:avLst/>
@@ -13348,10 +14133,144 @@
                 <a:ea typeface="Microsoft YaHei" pitchFamily="34" charset="-122"/>
                 <a:cs typeface="Microsoft YaHei" pitchFamily="34" charset="-120"/>
               </a:rPr>
-              <a:t>法律仍须</a:t>
-            </a:r>
-            <a:endParaRPr lang="zh-CN" sz="2400" dirty="0"/>
-          </a:p>
+              <a:t>具体化须作选择</a:t>
+            </a:r>
+            <a:endParaRPr lang="zh-CN" sz="2400" dirty="0"/>
+          </a:p>
+        </p:txBody>
+      </p:sp>
+      <p:sp>
+        <p:nvSpPr>
+          <p:cNvPr id="10" name="Text 8"/>
+          <p:cNvSpPr/>
+          <p:nvPr/>
+        </p:nvSpPr>
+        <p:spPr>
+          <a:xfrm>
+            <a:off x="4142232" y="3261360"/>
+            <a:ext cx="7287768" cy="1002792"/>
+          </a:xfrm>
+          <a:prstGeom prst="rect">
+            <a:avLst/>
+          </a:prstGeom>
+          <a:noFill/>
+          <a:ln/>
+        </p:spPr>
+        <p:txBody>
+          <a:bodyPr wrap="none" lIns="0" tIns="0" rIns="0" bIns="0" rtlCol="0" anchor="t"/>
+          <a:lstStyle/>
+          <a:p>
+            <a:pPr algn="l" indent="0" marL="0">
+              <a:lnSpc>
+                <a:spcPct val="105000"/>
+              </a:lnSpc>
+              <a:buNone/>
+            </a:pPr>
+            <a:r>
+              <a:rPr lang="zh-CN" altLang="en-US" sz="2400" dirty="0">
+                <a:solidFill>
+                  <a:srgbClr val="2B302F"/>
+                </a:solidFill>
+                <a:latin typeface="Microsoft YaHei" pitchFamily="34" charset="0"/>
+                <a:ea typeface="Microsoft YaHei" pitchFamily="34" charset="-122"/>
+                <a:cs typeface="Microsoft YaHei" pitchFamily="34" charset="-120"/>
+              </a:rPr>
+              <a:t>核实请求所需事实，同时回应</a:t>
+            </a:r>
+            <a:endParaRPr lang="zh-CN" sz="2400" dirty="0"/>
+          </a:p>
+          <a:p>
+            <a:pPr algn="l" indent="0" marL="0">
+              <a:lnSpc>
+                <a:spcPct val="105000"/>
+              </a:lnSpc>
+              <a:buNone/>
+            </a:pPr>
+            <a:r>
+              <a:rPr lang="zh-CN" altLang="en-US" sz="2400" dirty="0">
+                <a:solidFill>
+                  <a:srgbClr val="2B302F"/>
+                </a:solidFill>
+                <a:latin typeface="Microsoft YaHei" pitchFamily="34" charset="0"/>
+                <a:ea typeface="Microsoft YaHei" pitchFamily="34" charset="-122"/>
+                <a:cs typeface="Microsoft YaHei" pitchFamily="34" charset="-120"/>
+              </a:rPr>
+              <a:t>请求人书写确有困难的情形。</a:t>
+            </a:r>
+            <a:endParaRPr lang="zh-CN" sz="2400" dirty="0"/>
+          </a:p>
+        </p:txBody>
+      </p:sp>
+      <p:sp>
+        <p:nvSpPr>
+          <p:cNvPr id="11" name="Shape 9"/>
+          <p:cNvSpPr/>
+          <p:nvPr/>
+        </p:nvSpPr>
+        <p:spPr>
+          <a:xfrm>
+            <a:off x="713232" y="4511040"/>
+            <a:ext cx="73152" cy="1048512"/>
+          </a:xfrm>
+          <a:prstGeom prst="rect">
+            <a:avLst/>
+          </a:prstGeom>
+          <a:solidFill>
+            <a:srgbClr val="9B3D32"/>
+          </a:solidFill>
+          <a:ln w="12700">
+            <a:solidFill>
+              <a:srgbClr val="9B3D32">
+                <a:alpha val="0"/>
+              </a:srgbClr>
+            </a:solidFill>
+            <a:prstDash val="solid"/>
+          </a:ln>
+        </p:spPr>
+      </p:sp>
+      <p:sp>
+        <p:nvSpPr>
+          <p:cNvPr id="12" name="Shape 10"/>
+          <p:cNvSpPr/>
+          <p:nvPr/>
+        </p:nvSpPr>
+        <p:spPr>
+          <a:xfrm>
+            <a:off x="758952" y="4387596"/>
+            <a:ext cx="10671048" cy="0"/>
+          </a:xfrm>
+          <a:prstGeom prst="line">
+            <a:avLst/>
+          </a:prstGeom>
+          <a:noFill/>
+          <a:ln w="16510">
+            <a:solidFill>
+              <a:srgbClr val="CBCDC5"/>
+            </a:solidFill>
+            <a:prstDash val="solid"/>
+          </a:ln>
+        </p:spPr>
+      </p:sp>
+      <p:sp>
+        <p:nvSpPr>
+          <p:cNvPr id="13" name="Text 11"/>
+          <p:cNvSpPr/>
+          <p:nvPr/>
+        </p:nvSpPr>
+        <p:spPr>
+          <a:xfrm>
+            <a:off x="923544" y="4556760"/>
+            <a:ext cx="2926080" cy="1002792"/>
+          </a:xfrm>
+          <a:prstGeom prst="rect">
+            <a:avLst/>
+          </a:prstGeom>
+          <a:noFill/>
+          <a:ln/>
+        </p:spPr>
+        <p:txBody>
+          <a:bodyPr wrap="none" lIns="0" tIns="0" rIns="0" bIns="0" rtlCol="0" anchor="t"/>
+          <a:lstStyle/>
           <a:p>
             <a:pPr algn="l" indent="0" marL="0">
               <a:lnSpc>
@@ -13368,22 +14287,42 @@
                 <a:ea typeface="Microsoft YaHei" pitchFamily="34" charset="-122"/>
                 <a:cs typeface="Microsoft YaHei" pitchFamily="34" charset="-120"/>
               </a:rPr>
-              <a:t>形成的安排</a:t>
-            </a:r>
-            <a:endParaRPr lang="zh-CN" sz="2400" dirty="0"/>
-          </a:p>
-        </p:txBody>
-      </p:sp>
-      <p:sp>
-        <p:nvSpPr>
-          <p:cNvPr id="9" name="Text 7"/>
-          <p:cNvSpPr/>
-          <p:nvPr/>
-        </p:nvSpPr>
-        <p:spPr>
-          <a:xfrm>
-            <a:off x="3410712" y="3909060"/>
-            <a:ext cx="8019288" cy="1650492"/>
+              <a:t>国家赔偿法第12条</a:t>
+            </a:r>
+            <a:endParaRPr lang="zh-CN" sz="2400" dirty="0"/>
+          </a:p>
+          <a:p>
+            <a:pPr algn="l" indent="0" marL="0">
+              <a:lnSpc>
+                <a:spcPct val="105000"/>
+              </a:lnSpc>
+              <a:buNone/>
+            </a:pPr>
+            <a:r>
+              <a:rPr lang="zh-CN" altLang="en-US" sz="2400" b="1" dirty="0">
+                <a:solidFill>
+                  <a:srgbClr val="9B3D32"/>
+                </a:solidFill>
+                <a:latin typeface="Microsoft YaHei" pitchFamily="34" charset="0"/>
+                <a:ea typeface="Microsoft YaHei" pitchFamily="34" charset="-122"/>
+                <a:cs typeface="Microsoft YaHei" pitchFamily="34" charset="-120"/>
+              </a:rPr>
+              <a:t>（教学提要）</a:t>
+            </a:r>
+            <a:endParaRPr lang="zh-CN" sz="2400" dirty="0"/>
+          </a:p>
+        </p:txBody>
+      </p:sp>
+      <p:sp>
+        <p:nvSpPr>
+          <p:cNvPr id="14" name="Text 12"/>
+          <p:cNvSpPr/>
+          <p:nvPr/>
+        </p:nvSpPr>
+        <p:spPr>
+          <a:xfrm>
+            <a:off x="4142232" y="4556760"/>
+            <a:ext cx="7287768" cy="1002792"/>
           </a:xfrm>
           <a:prstGeom prst="rect">
             <a:avLst/>
@@ -13410,7 +14349,7 @@
                 <a:ea typeface="Microsoft YaHei" pitchFamily="34" charset="-122"/>
                 <a:cs typeface="Microsoft YaHei" pitchFamily="34" charset="-120"/>
               </a:rPr>
-              <a:t>例如第7条确定赔偿义务机关，</a:t>
+              <a:t>要求事实根据和理由；书写确有困难时允许代书或</a:t>
             </a:r>
             <a:endParaRPr lang="zh-CN" sz="2400" dirty="0"/>
           </a:p>
@@ -13430,15 +14369,15 @@
                 <a:ea typeface="Microsoft YaHei" pitchFamily="34" charset="-122"/>
                 <a:cs typeface="Microsoft YaHei" pitchFamily="34" charset="-120"/>
               </a:rPr>
-              <a:t>供请求人与办理者据以判断。</a:t>
-            </a:r>
-            <a:endParaRPr lang="zh-CN" sz="2400" dirty="0"/>
-          </a:p>
-        </p:txBody>
-      </p:sp>
-      <p:sp>
-        <p:nvSpPr>
-          <p:cNvPr id="10" name="Text 8"/>
+              <a:t>口头申请、记入笔录。</a:t>
+            </a:r>
+            <a:endParaRPr lang="zh-CN" sz="2400" dirty="0"/>
+          </a:p>
+        </p:txBody>
+      </p:sp>
+      <p:sp>
+        <p:nvSpPr>
+          <p:cNvPr id="15" name="Text 13"/>
           <p:cNvSpPr/>
           <p:nvPr/>
         </p:nvSpPr>
@@ -13472,15 +14411,15 @@
                 <a:ea typeface="Microsoft YaHei" pitchFamily="34" charset="-122"/>
                 <a:cs typeface="Microsoft YaHei" pitchFamily="34" charset="-120"/>
               </a:rPr>
-              <a:t>解释具体化，应同时说明“增加了什么”和“受什么约束”。</a:t>
-            </a:r>
-            <a:endParaRPr lang="zh-CN" sz="2400" dirty="0"/>
-          </a:p>
-        </p:txBody>
-      </p:sp>
-      <p:sp>
-        <p:nvSpPr>
-          <p:cNvPr id="11" name="Text 9"/>
+              <a:t>程序需要理由；办理方式也应回应保障要求。</a:t>
+            </a:r>
+            <a:endParaRPr lang="zh-CN" sz="2400" dirty="0"/>
+          </a:p>
+        </p:txBody>
+      </p:sp>
+      <p:sp>
+        <p:nvSpPr>
+          <p:cNvPr id="16" name="Text 14"/>
           <p:cNvSpPr/>
           <p:nvPr/>
         </p:nvSpPr>
@@ -13514,7 +14453,7 @@
                 <a:ea typeface="Microsoft YaHei" pitchFamily="34" charset="-122"/>
                 <a:cs typeface="Microsoft YaHei" pitchFamily="34" charset="-120"/>
               </a:rPr>
-              <a:t>任务4参考说明｜宪法第5、41条；国家赔偿法第3、7、9条</a:t>
+              <a:t>宪法第5、41条；国家赔偿法第3、7、9条及第12条节录</a:t>
             </a:r>
             <a:endParaRPr lang="zh-CN" sz="1200" dirty="0"/>
           </a:p>
@@ -13522,7 +14461,7 @@
       </p:sp>
       <p:sp>
         <p:nvSpPr>
-          <p:cNvPr id="12" name="Text 10"/>
+          <p:cNvPr id="17" name="Text 15"/>
           <p:cNvSpPr/>
           <p:nvPr/>
         </p:nvSpPr>
@@ -13556,7 +14495,7 @@
                 <a:ea typeface="Microsoft YaHei" pitchFamily="34" charset="-122"/>
                 <a:cs typeface="Microsoft YaHei" pitchFamily="34" charset="-120"/>
               </a:rPr>
-              <a:t>26 / 36</a:t>
+              <a:t>26 / 38</a:t>
             </a:r>
             <a:endParaRPr lang="zh-CN" sz="1200" dirty="0"/>
           </a:p>
@@ -13630,7 +14569,7 @@
                 <a:ea typeface="Microsoft YaHei" pitchFamily="34" charset="-122"/>
                 <a:cs typeface="Microsoft YaHei" pitchFamily="34" charset="-120"/>
               </a:rPr>
-              <a:t>二 根本要求怎样进入具体制度</a:t>
+              <a:t>下节｜二 根本要求怎样进入具体制度</a:t>
             </a:r>
             <a:endParaRPr lang="zh-CN" sz="1700" dirty="0"/>
           </a:p>
@@ -13966,7 +14905,7 @@
                 <a:ea typeface="Microsoft YaHei" pitchFamily="34" charset="-122"/>
                 <a:cs typeface="Microsoft YaHei" pitchFamily="34" charset="-120"/>
               </a:rPr>
-              <a:t>27 / 36</a:t>
+              <a:t>27 / 38</a:t>
             </a:r>
             <a:endParaRPr lang="zh-CN" sz="1200" dirty="0"/>
           </a:p>
@@ -14040,7 +14979,7 @@
                 <a:ea typeface="Microsoft YaHei" pitchFamily="34" charset="-122"/>
                 <a:cs typeface="Microsoft YaHei" pitchFamily="34" charset="-120"/>
               </a:rPr>
-              <a:t>二 根本要求怎样进入具体制度</a:t>
+              <a:t>下节｜二 根本要求怎样进入具体制度</a:t>
             </a:r>
             <a:endParaRPr lang="zh-CN" sz="1700" dirty="0"/>
           </a:p>
@@ -14396,7 +15335,7 @@
                 <a:ea typeface="Microsoft YaHei" pitchFamily="34" charset="-122"/>
                 <a:cs typeface="Microsoft YaHei" pitchFamily="34" charset="-120"/>
               </a:rPr>
-              <a:t>28 / 36</a:t>
+              <a:t>28 / 38</a:t>
             </a:r>
             <a:endParaRPr lang="zh-CN" sz="1200" dirty="0"/>
           </a:p>
@@ -14470,7 +15409,7 @@
                 <a:ea typeface="Microsoft YaHei" pitchFamily="34" charset="-122"/>
                 <a:cs typeface="Microsoft YaHei" pitchFamily="34" charset="-120"/>
               </a:rPr>
-              <a:t>二 根本要求怎样进入具体制度</a:t>
+              <a:t>下节｜二 根本要求怎样进入具体制度</a:t>
             </a:r>
             <a:endParaRPr lang="zh-CN" sz="1700" dirty="0"/>
           </a:p>
@@ -14900,7 +15839,7 @@
                 <a:ea typeface="Microsoft YaHei" pitchFamily="34" charset="-122"/>
                 <a:cs typeface="Microsoft YaHei" pitchFamily="34" charset="-120"/>
               </a:rPr>
-              <a:t>29 / 36</a:t>
+              <a:t>29 / 38</a:t>
             </a:r>
             <a:endParaRPr lang="zh-CN" sz="1200" dirty="0"/>
           </a:p>
@@ -14974,7 +15913,7 @@
                 <a:ea typeface="Microsoft YaHei" pitchFamily="34" charset="-122"/>
                 <a:cs typeface="Microsoft YaHei" pitchFamily="34" charset="-120"/>
               </a:rPr>
-              <a:t>一 国家生活的根本规则</a:t>
+              <a:t>上节｜一 国家生活的根本规则</a:t>
             </a:r>
             <a:endParaRPr lang="zh-CN" sz="1700" dirty="0"/>
           </a:p>
@@ -15390,7 +16329,7 @@
                 <a:ea typeface="Microsoft YaHei" pitchFamily="34" charset="-122"/>
                 <a:cs typeface="Microsoft YaHei" pitchFamily="34" charset="-120"/>
               </a:rPr>
-              <a:t>3 / 36</a:t>
+              <a:t>3 / 38</a:t>
             </a:r>
             <a:endParaRPr lang="zh-CN" sz="1200" dirty="0"/>
           </a:p>
@@ -15464,7 +16403,7 @@
                 <a:ea typeface="Microsoft YaHei" pitchFamily="34" charset="-122"/>
                 <a:cs typeface="Microsoft YaHei" pitchFamily="34" charset="-120"/>
               </a:rPr>
-              <a:t>二 根本要求怎样进入具体制度</a:t>
+              <a:t>下节｜二 根本要求怎样进入具体制度</a:t>
             </a:r>
             <a:endParaRPr lang="zh-CN" sz="1700" dirty="0"/>
           </a:p>
@@ -16148,7 +17087,7 @@
                 <a:ea typeface="Microsoft YaHei" pitchFamily="34" charset="-122"/>
                 <a:cs typeface="Microsoft YaHei" pitchFamily="34" charset="-120"/>
               </a:rPr>
-              <a:t>30 / 36</a:t>
+              <a:t>30 / 38</a:t>
             </a:r>
             <a:endParaRPr lang="zh-CN" sz="1200" dirty="0"/>
           </a:p>
@@ -16222,7 +17161,7 @@
                 <a:ea typeface="Microsoft YaHei" pitchFamily="34" charset="-122"/>
                 <a:cs typeface="Microsoft YaHei" pitchFamily="34" charset="-120"/>
               </a:rPr>
-              <a:t>二 根本要求怎样进入具体制度</a:t>
+              <a:t>下节｜二 根本要求怎样进入具体制度</a:t>
             </a:r>
             <a:endParaRPr lang="zh-CN" sz="1700" dirty="0"/>
           </a:p>
@@ -16638,7 +17577,7 @@
                 <a:ea typeface="Microsoft YaHei" pitchFamily="34" charset="-122"/>
                 <a:cs typeface="Microsoft YaHei" pitchFamily="34" charset="-120"/>
               </a:rPr>
-              <a:t>31 / 36</a:t>
+              <a:t>31 / 38</a:t>
             </a:r>
             <a:endParaRPr lang="zh-CN" sz="1200" dirty="0"/>
           </a:p>
@@ -16653,7 +17592,7 @@
 </file>
 
 <file path=ppt/slides/slide32.xml><?xml version="1.0" encoding="utf-8"?>
-<p:sld xmlns:a="http://schemas.openxmlformats.org/drawingml/2006/main" xmlns:r="http://schemas.openxmlformats.org/officeDocument/2006/relationships" xmlns:p="http://schemas.openxmlformats.org/presentationml/2006/main">
+<p:sld xmlns:a="http://schemas.openxmlformats.org/drawingml/2006/main" xmlns:r="http://schemas.openxmlformats.org/officeDocument/2006/relationships" xmlns:p="http://schemas.openxmlformats.org/presentationml/2006/main" show="0">
   <p:cSld name="Slide 32">
     <p:bg>
       <p:bgPr>
@@ -16712,7 +17651,7 @@
                 <a:ea typeface="Microsoft YaHei" pitchFamily="34" charset="-122"/>
                 <a:cs typeface="Microsoft YaHei" pitchFamily="34" charset="-120"/>
               </a:rPr>
-              <a:t>100分钟条件性扩展｜第一学时增加5分钟</a:t>
+              <a:t>节内备查｜上节按需调用</a:t>
             </a:r>
             <a:endParaRPr lang="zh-CN" sz="1700" dirty="0"/>
           </a:p>
@@ -17048,7 +17987,7 @@
                 <a:ea typeface="Microsoft YaHei" pitchFamily="34" charset="-122"/>
                 <a:cs typeface="Microsoft YaHei" pitchFamily="34" charset="-120"/>
               </a:rPr>
-              <a:t>32 / 36</a:t>
+              <a:t>32 / 38</a:t>
             </a:r>
             <a:endParaRPr lang="zh-CN" sz="1200" dirty="0"/>
           </a:p>
@@ -17063,7 +18002,7 @@
 </file>
 
 <file path=ppt/slides/slide33.xml><?xml version="1.0" encoding="utf-8"?>
-<p:sld xmlns:a="http://schemas.openxmlformats.org/drawingml/2006/main" xmlns:r="http://schemas.openxmlformats.org/officeDocument/2006/relationships" xmlns:p="http://schemas.openxmlformats.org/presentationml/2006/main">
+<p:sld xmlns:a="http://schemas.openxmlformats.org/drawingml/2006/main" xmlns:r="http://schemas.openxmlformats.org/officeDocument/2006/relationships" xmlns:p="http://schemas.openxmlformats.org/presentationml/2006/main" show="0">
   <p:cSld name="Slide 33">
     <p:bg>
       <p:bgPr>
@@ -17122,7 +18061,7 @@
                 <a:ea typeface="Microsoft YaHei" pitchFamily="34" charset="-122"/>
                 <a:cs typeface="Microsoft YaHei" pitchFamily="34" charset="-120"/>
               </a:rPr>
-              <a:t>100分钟条件性扩展｜第一学时增加5分钟</a:t>
+              <a:t>节内备查｜上节按需调用</a:t>
             </a:r>
             <a:endParaRPr lang="zh-CN" sz="1700" dirty="0"/>
           </a:p>
@@ -17530,7 +18469,7 @@
                 <a:ea typeface="Microsoft YaHei" pitchFamily="34" charset="-122"/>
                 <a:cs typeface="Microsoft YaHei" pitchFamily="34" charset="-120"/>
               </a:rPr>
-              <a:t>33 / 36</a:t>
+              <a:t>33 / 38</a:t>
             </a:r>
             <a:endParaRPr lang="zh-CN" sz="1200" dirty="0"/>
           </a:p>
@@ -17545,7 +18484,7 @@
 </file>
 
 <file path=ppt/slides/slide34.xml><?xml version="1.0" encoding="utf-8"?>
-<p:sld xmlns:a="http://schemas.openxmlformats.org/drawingml/2006/main" xmlns:r="http://schemas.openxmlformats.org/officeDocument/2006/relationships" xmlns:p="http://schemas.openxmlformats.org/presentationml/2006/main">
+<p:sld xmlns:a="http://schemas.openxmlformats.org/drawingml/2006/main" xmlns:r="http://schemas.openxmlformats.org/officeDocument/2006/relationships" xmlns:p="http://schemas.openxmlformats.org/presentationml/2006/main" show="0">
   <p:cSld name="Slide 34">
     <p:bg>
       <p:bgPr>
@@ -17604,7 +18543,7 @@
                 <a:ea typeface="Microsoft YaHei" pitchFamily="34" charset="-122"/>
                 <a:cs typeface="Microsoft YaHei" pitchFamily="34" charset="-120"/>
               </a:rPr>
-              <a:t>100分钟条件性扩展｜第二学时增加5分钟</a:t>
+              <a:t>节内备查｜下节按需调用</a:t>
             </a:r>
             <a:endParaRPr lang="zh-CN" sz="1700" dirty="0"/>
           </a:p>
@@ -17960,7 +18899,7 @@
                 <a:ea typeface="Microsoft YaHei" pitchFamily="34" charset="-122"/>
                 <a:cs typeface="Microsoft YaHei" pitchFamily="34" charset="-120"/>
               </a:rPr>
-              <a:t>34 / 36</a:t>
+              <a:t>34 / 38</a:t>
             </a:r>
             <a:endParaRPr lang="zh-CN" sz="1200" dirty="0"/>
           </a:p>
@@ -17975,7 +18914,7 @@
 </file>
 
 <file path=ppt/slides/slide35.xml><?xml version="1.0" encoding="utf-8"?>
-<p:sld xmlns:a="http://schemas.openxmlformats.org/drawingml/2006/main" xmlns:r="http://schemas.openxmlformats.org/officeDocument/2006/relationships" xmlns:p="http://schemas.openxmlformats.org/presentationml/2006/main">
+<p:sld xmlns:a="http://schemas.openxmlformats.org/drawingml/2006/main" xmlns:r="http://schemas.openxmlformats.org/officeDocument/2006/relationships" xmlns:p="http://schemas.openxmlformats.org/presentationml/2006/main" show="0">
   <p:cSld name="Slide 35">
     <p:bg>
       <p:bgPr>
@@ -18034,7 +18973,7 @@
                 <a:ea typeface="Microsoft YaHei" pitchFamily="34" charset="-122"/>
                 <a:cs typeface="Microsoft YaHei" pitchFamily="34" charset="-120"/>
               </a:rPr>
-              <a:t>100分钟条件性扩展｜第二学时增加5分钟</a:t>
+              <a:t>节内备查｜下节按需调用</a:t>
             </a:r>
             <a:endParaRPr lang="zh-CN" sz="1700" dirty="0"/>
           </a:p>
@@ -18422,7 +19361,7 @@
                 <a:ea typeface="Microsoft YaHei" pitchFamily="34" charset="-122"/>
                 <a:cs typeface="Microsoft YaHei" pitchFamily="34" charset="-120"/>
               </a:rPr>
-              <a:t>35 / 36</a:t>
+              <a:t>35 / 38</a:t>
             </a:r>
             <a:endParaRPr lang="zh-CN" sz="1200" dirty="0"/>
           </a:p>
@@ -18437,7 +19376,7 @@
 </file>
 
 <file path=ppt/slides/slide36.xml><?xml version="1.0" encoding="utf-8"?>
-<p:sld xmlns:a="http://schemas.openxmlformats.org/drawingml/2006/main" xmlns:r="http://schemas.openxmlformats.org/officeDocument/2006/relationships" xmlns:p="http://schemas.openxmlformats.org/presentationml/2006/main">
+<p:sld xmlns:a="http://schemas.openxmlformats.org/drawingml/2006/main" xmlns:r="http://schemas.openxmlformats.org/officeDocument/2006/relationships" xmlns:p="http://schemas.openxmlformats.org/presentationml/2006/main" show="0">
   <p:cSld name="Slide 36">
     <p:bg>
       <p:bgPr>
@@ -18496,6 +19435,846 @@
                 <a:ea typeface="Microsoft YaHei" pitchFamily="34" charset="-122"/>
                 <a:cs typeface="Microsoft YaHei" pitchFamily="34" charset="-120"/>
               </a:rPr>
+              <a:t>节内备查｜上节</a:t>
+            </a:r>
+            <a:endParaRPr lang="zh-CN" sz="1700" dirty="0"/>
+          </a:p>
+        </p:txBody>
+      </p:sp>
+      <p:sp>
+        <p:nvSpPr>
+          <p:cNvPr id="3" name="Text 1"/>
+          <p:cNvSpPr/>
+          <p:nvPr/>
+        </p:nvSpPr>
+        <p:spPr>
+          <a:xfrm>
+            <a:off x="694944" y="859536"/>
+            <a:ext cx="10808208" cy="987552"/>
+          </a:xfrm>
+          <a:prstGeom prst="rect">
+            <a:avLst/>
+          </a:prstGeom>
+          <a:noFill/>
+          <a:ln/>
+        </p:spPr>
+        <p:txBody>
+          <a:bodyPr wrap="none" lIns="0" tIns="0" rIns="0" bIns="0" rtlCol="0" anchor="t"/>
+          <a:lstStyle/>
+          <a:p>
+            <a:pPr algn="l" indent="0" marL="0">
+              <a:lnSpc>
+                <a:spcPct val="105000"/>
+              </a:lnSpc>
+              <a:buNone/>
+            </a:pPr>
+            <a:r>
+              <a:rPr lang="zh-CN" altLang="en-US" sz="3600" b="1" dirty="0">
+                <a:solidFill>
+                  <a:srgbClr val="343E3B"/>
+                </a:solidFill>
+                <a:latin typeface="Microsoft YaHei" pitchFamily="34" charset="0"/>
+                <a:ea typeface="Microsoft YaHei" pitchFamily="34" charset="-122"/>
+                <a:cs typeface="Microsoft YaHei" pitchFamily="34" charset="-120"/>
+              </a:rPr>
+              <a:t>节内追问：最高国家权力机关也受约束吗？</a:t>
+            </a:r>
+            <a:endParaRPr lang="zh-CN" sz="3600" dirty="0"/>
+          </a:p>
+        </p:txBody>
+      </p:sp>
+      <p:sp>
+        <p:nvSpPr>
+          <p:cNvPr id="4" name="Text 2"/>
+          <p:cNvSpPr/>
+          <p:nvPr/>
+        </p:nvSpPr>
+        <p:spPr>
+          <a:xfrm>
+            <a:off x="795528" y="1920240"/>
+            <a:ext cx="10533888" cy="457200"/>
+          </a:xfrm>
+          <a:prstGeom prst="rect">
+            <a:avLst/>
+          </a:prstGeom>
+          <a:noFill/>
+          <a:ln/>
+        </p:spPr>
+        <p:txBody>
+          <a:bodyPr wrap="none" lIns="0" tIns="0" rIns="0" bIns="0" rtlCol="0" anchor="t"/>
+          <a:lstStyle/>
+          <a:p>
+            <a:pPr algn="l" indent="0" marL="0">
+              <a:lnSpc>
+                <a:spcPct val="105000"/>
+              </a:lnSpc>
+              <a:buNone/>
+            </a:pPr>
+            <a:r>
+              <a:rPr lang="zh-CN" altLang="en-US" sz="2400" b="1" dirty="0">
+                <a:solidFill>
+                  <a:srgbClr val="9B3D32"/>
+                </a:solidFill>
+                <a:latin typeface="Microsoft YaHei" pitchFamily="34" charset="0"/>
+                <a:ea typeface="Microsoft YaHei" pitchFamily="34" charset="-122"/>
+                <a:cs typeface="Microsoft YaHei" pitchFamily="34" charset="-120"/>
+              </a:rPr>
+              <a:t>现行宪法第57条第一句</a:t>
+            </a:r>
+            <a:endParaRPr lang="zh-CN" sz="2400" dirty="0"/>
+          </a:p>
+        </p:txBody>
+      </p:sp>
+      <p:sp>
+        <p:nvSpPr>
+          <p:cNvPr id="5" name="Text 3"/>
+          <p:cNvSpPr/>
+          <p:nvPr/>
+        </p:nvSpPr>
+        <p:spPr>
+          <a:xfrm>
+            <a:off x="795528" y="2450592"/>
+            <a:ext cx="10533888" cy="1165860"/>
+          </a:xfrm>
+          <a:prstGeom prst="rect">
+            <a:avLst/>
+          </a:prstGeom>
+          <a:noFill/>
+          <a:ln/>
+        </p:spPr>
+        <p:txBody>
+          <a:bodyPr wrap="none" lIns="0" tIns="0" rIns="0" bIns="0" rtlCol="0" anchor="t"/>
+          <a:lstStyle/>
+          <a:p>
+            <a:pPr algn="l" indent="0" marL="0">
+              <a:lnSpc>
+                <a:spcPct val="105000"/>
+              </a:lnSpc>
+              <a:buNone/>
+            </a:pPr>
+            <a:r>
+              <a:rPr lang="zh-CN" altLang="en-US" sz="2600" dirty="0">
+                <a:solidFill>
+                  <a:srgbClr val="2B302F"/>
+                </a:solidFill>
+                <a:latin typeface="Microsoft YaHei" pitchFamily="34" charset="0"/>
+                <a:ea typeface="Microsoft YaHei" pitchFamily="34" charset="-122"/>
+                <a:cs typeface="Microsoft YaHei" pitchFamily="34" charset="-120"/>
+              </a:rPr>
+              <a:t>中华人民共和国全国人民代表大会是最高国家权力机关。</a:t>
+            </a:r>
+            <a:endParaRPr lang="zh-CN" sz="2600" dirty="0"/>
+          </a:p>
+        </p:txBody>
+      </p:sp>
+      <p:sp>
+        <p:nvSpPr>
+          <p:cNvPr id="6" name="Text 4"/>
+          <p:cNvSpPr/>
+          <p:nvPr/>
+        </p:nvSpPr>
+        <p:spPr>
+          <a:xfrm>
+            <a:off x="795528" y="3854196"/>
+            <a:ext cx="10533888" cy="457200"/>
+          </a:xfrm>
+          <a:prstGeom prst="rect">
+            <a:avLst/>
+          </a:prstGeom>
+          <a:noFill/>
+          <a:ln/>
+        </p:spPr>
+        <p:txBody>
+          <a:bodyPr wrap="none" lIns="0" tIns="0" rIns="0" bIns="0" rtlCol="0" anchor="t"/>
+          <a:lstStyle/>
+          <a:p>
+            <a:pPr algn="l" indent="0" marL="0">
+              <a:lnSpc>
+                <a:spcPct val="105000"/>
+              </a:lnSpc>
+              <a:buNone/>
+            </a:pPr>
+            <a:r>
+              <a:rPr lang="zh-CN" altLang="en-US" sz="2400" b="1" dirty="0">
+                <a:solidFill>
+                  <a:srgbClr val="9B3D32"/>
+                </a:solidFill>
+                <a:latin typeface="Microsoft YaHei" pitchFamily="34" charset="0"/>
+                <a:ea typeface="Microsoft YaHei" pitchFamily="34" charset="-122"/>
+                <a:cs typeface="Microsoft YaHei" pitchFamily="34" charset="-120"/>
+              </a:rPr>
+              <a:t>与第5条合读</a:t>
+            </a:r>
+            <a:endParaRPr lang="zh-CN" sz="2400" dirty="0"/>
+          </a:p>
+        </p:txBody>
+      </p:sp>
+      <p:sp>
+        <p:nvSpPr>
+          <p:cNvPr id="7" name="Text 5"/>
+          <p:cNvSpPr/>
+          <p:nvPr/>
+        </p:nvSpPr>
+        <p:spPr>
+          <a:xfrm>
+            <a:off x="795528" y="4384548"/>
+            <a:ext cx="10533888" cy="1165860"/>
+          </a:xfrm>
+          <a:prstGeom prst="rect">
+            <a:avLst/>
+          </a:prstGeom>
+          <a:noFill/>
+          <a:ln/>
+        </p:spPr>
+        <p:txBody>
+          <a:bodyPr wrap="none" lIns="0" tIns="0" rIns="0" bIns="0" rtlCol="0" anchor="t"/>
+          <a:lstStyle/>
+          <a:p>
+            <a:pPr algn="l" indent="0" marL="0">
+              <a:lnSpc>
+                <a:spcPct val="105000"/>
+              </a:lnSpc>
+              <a:buNone/>
+            </a:pPr>
+            <a:r>
+              <a:rPr lang="zh-CN" altLang="en-US" sz="2600" dirty="0">
+                <a:solidFill>
+                  <a:srgbClr val="2B302F"/>
+                </a:solidFill>
+                <a:latin typeface="Microsoft YaHei" pitchFamily="34" charset="0"/>
+                <a:ea typeface="Microsoft YaHei" pitchFamily="34" charset="-122"/>
+                <a:cs typeface="Microsoft YaHei" pitchFamily="34" charset="-120"/>
+              </a:rPr>
+              <a:t>最高国家权力机关，为什么仍受宪法约束？“最高”在比较什么？</a:t>
+            </a:r>
+            <a:endParaRPr lang="zh-CN" sz="2600" dirty="0"/>
+          </a:p>
+        </p:txBody>
+      </p:sp>
+      <p:sp>
+        <p:nvSpPr>
+          <p:cNvPr id="8" name="Text 6"/>
+          <p:cNvSpPr/>
+          <p:nvPr/>
+        </p:nvSpPr>
+        <p:spPr>
+          <a:xfrm>
+            <a:off x="722376" y="5815584"/>
+            <a:ext cx="10753344" cy="429768"/>
+          </a:xfrm>
+          <a:prstGeom prst="rect">
+            <a:avLst/>
+          </a:prstGeom>
+          <a:noFill/>
+          <a:ln/>
+        </p:spPr>
+        <p:txBody>
+          <a:bodyPr wrap="none" lIns="0" tIns="0" rIns="0" bIns="0" rtlCol="0" anchor="t"/>
+          <a:lstStyle/>
+          <a:p>
+            <a:pPr algn="l" indent="0" marL="0">
+              <a:lnSpc>
+                <a:spcPct val="105000"/>
+              </a:lnSpc>
+              <a:buNone/>
+            </a:pPr>
+            <a:r>
+              <a:rPr lang="zh-CN" altLang="en-US" sz="2400" b="1" dirty="0">
+                <a:solidFill>
+                  <a:srgbClr val="9B3D32"/>
+                </a:solidFill>
+                <a:latin typeface="Microsoft YaHei" pitchFamily="34" charset="0"/>
+                <a:ea typeface="Microsoft YaHei" pitchFamily="34" charset="-122"/>
+                <a:cs typeface="Microsoft YaHei" pitchFamily="34" charset="-120"/>
+              </a:rPr>
+              <a:t>按本节进度调用，仍在45分钟内收束。</a:t>
+            </a:r>
+            <a:endParaRPr lang="zh-CN" sz="2400" dirty="0"/>
+          </a:p>
+        </p:txBody>
+      </p:sp>
+      <p:sp>
+        <p:nvSpPr>
+          <p:cNvPr id="9" name="Text 7"/>
+          <p:cNvSpPr/>
+          <p:nvPr/>
+        </p:nvSpPr>
+        <p:spPr>
+          <a:xfrm>
+            <a:off x="713232" y="6419088"/>
+            <a:ext cx="9646920" cy="283464"/>
+          </a:xfrm>
+          <a:prstGeom prst="rect">
+            <a:avLst/>
+          </a:prstGeom>
+          <a:noFill/>
+          <a:ln/>
+        </p:spPr>
+        <p:txBody>
+          <a:bodyPr wrap="none" lIns="0" tIns="0" rIns="0" bIns="0" rtlCol="0" anchor="t"/>
+          <a:lstStyle/>
+          <a:p>
+            <a:pPr algn="l" indent="0" marL="0">
+              <a:lnSpc>
+                <a:spcPct val="105000"/>
+              </a:lnSpc>
+              <a:buNone/>
+            </a:pPr>
+            <a:r>
+              <a:rPr lang="zh-CN" altLang="en-US" sz="1200" dirty="0">
+                <a:solidFill>
+                  <a:srgbClr val="616966"/>
+                </a:solidFill>
+                <a:latin typeface="Microsoft YaHei" pitchFamily="34" charset="0"/>
+                <a:ea typeface="Microsoft YaHei" pitchFamily="34" charset="-122"/>
+                <a:cs typeface="Microsoft YaHei" pitchFamily="34" charset="-120"/>
+              </a:rPr>
+              <a:t>现行宪法第5、57、64条；机关地位与规范约束分别说明</a:t>
+            </a:r>
+            <a:endParaRPr lang="zh-CN" sz="1200" dirty="0"/>
+          </a:p>
+        </p:txBody>
+      </p:sp>
+      <p:sp>
+        <p:nvSpPr>
+          <p:cNvPr id="10" name="Text 8"/>
+          <p:cNvSpPr/>
+          <p:nvPr/>
+        </p:nvSpPr>
+        <p:spPr>
+          <a:xfrm>
+            <a:off x="10588752" y="6419088"/>
+            <a:ext cx="896112" cy="283464"/>
+          </a:xfrm>
+          <a:prstGeom prst="rect">
+            <a:avLst/>
+          </a:prstGeom>
+          <a:noFill/>
+          <a:ln/>
+        </p:spPr>
+        <p:txBody>
+          <a:bodyPr wrap="none" lIns="0" tIns="0" rIns="0" bIns="0" rtlCol="0" anchor="t"/>
+          <a:lstStyle/>
+          <a:p>
+            <a:pPr algn="r" indent="0" marL="0">
+              <a:lnSpc>
+                <a:spcPct val="105000"/>
+              </a:lnSpc>
+              <a:buNone/>
+            </a:pPr>
+            <a:r>
+              <a:rPr lang="zh-CN" altLang="en-US" sz="1200" dirty="0">
+                <a:solidFill>
+                  <a:srgbClr val="616966"/>
+                </a:solidFill>
+                <a:latin typeface="Microsoft YaHei" pitchFamily="34" charset="0"/>
+                <a:ea typeface="Microsoft YaHei" pitchFamily="34" charset="-122"/>
+                <a:cs typeface="Microsoft YaHei" pitchFamily="34" charset="-120"/>
+              </a:rPr>
+              <a:t>36 / 38</a:t>
+            </a:r>
+            <a:endParaRPr lang="zh-CN" sz="1200" dirty="0"/>
+          </a:p>
+        </p:txBody>
+      </p:sp>
+    </p:spTree>
+  </p:cSld>
+  <p:clrMapOvr>
+    <a:masterClrMapping/>
+  </p:clrMapOvr>
+</p:sld>
+</file>
+
+<file path=ppt/slides/slide37.xml><?xml version="1.0" encoding="utf-8"?>
+<p:sld xmlns:a="http://schemas.openxmlformats.org/drawingml/2006/main" xmlns:r="http://schemas.openxmlformats.org/officeDocument/2006/relationships" xmlns:p="http://schemas.openxmlformats.org/presentationml/2006/main" show="0">
+  <p:cSld name="Slide 37">
+    <p:bg>
+      <p:bgPr>
+        <a:solidFill>
+          <a:srgbClr val="F7F4ED"/>
+        </a:solidFill>
+      </p:bgPr>
+    </p:bg>
+    <p:spTree>
+      <p:nvGrpSpPr>
+        <p:cNvPr id="1" name=""/>
+        <p:cNvGrpSpPr/>
+        <p:nvPr/>
+      </p:nvGrpSpPr>
+      <p:grpSpPr>
+        <a:xfrm>
+          <a:off x="0" y="0"/>
+          <a:ext cx="0" cy="0"/>
+          <a:chOff x="0" y="0"/>
+          <a:chExt cx="0" cy="0"/>
+        </a:xfrm>
+      </p:grpSpPr>
+      <p:sp>
+        <p:nvSpPr>
+          <p:cNvPr id="2" name="Text 0"/>
+          <p:cNvSpPr/>
+          <p:nvPr/>
+        </p:nvSpPr>
+        <p:spPr>
+          <a:xfrm>
+            <a:off x="713232" y="320040"/>
+            <a:ext cx="10789920" cy="329184"/>
+          </a:xfrm>
+          <a:prstGeom prst="rect">
+            <a:avLst/>
+          </a:prstGeom>
+          <a:noFill/>
+          <a:ln/>
+        </p:spPr>
+        <p:txBody>
+          <a:bodyPr wrap="none" lIns="0" tIns="0" rIns="0" bIns="0" rtlCol="0" anchor="t"/>
+          <a:lstStyle/>
+          <a:p>
+            <a:pPr algn="l" indent="0" marL="0">
+              <a:lnSpc>
+                <a:spcPct val="105000"/>
+              </a:lnSpc>
+              <a:buNone/>
+            </a:pPr>
+            <a:r>
+              <a:rPr lang="zh-CN" altLang="en-US" sz="1700" b="1" dirty="0">
+                <a:solidFill>
+                  <a:srgbClr val="9B3D32"/>
+                </a:solidFill>
+                <a:latin typeface="Microsoft YaHei" pitchFamily="34" charset="0"/>
+                <a:ea typeface="Microsoft YaHei" pitchFamily="34" charset="-122"/>
+                <a:cs typeface="Microsoft YaHei" pitchFamily="34" charset="-120"/>
+              </a:rPr>
+              <a:t>节内备查｜下节</a:t>
+            </a:r>
+            <a:endParaRPr lang="zh-CN" sz="1700" dirty="0"/>
+          </a:p>
+        </p:txBody>
+      </p:sp>
+      <p:sp>
+        <p:nvSpPr>
+          <p:cNvPr id="3" name="Text 1"/>
+          <p:cNvSpPr/>
+          <p:nvPr/>
+        </p:nvSpPr>
+        <p:spPr>
+          <a:xfrm>
+            <a:off x="694944" y="859536"/>
+            <a:ext cx="10808208" cy="987552"/>
+          </a:xfrm>
+          <a:prstGeom prst="rect">
+            <a:avLst/>
+          </a:prstGeom>
+          <a:noFill/>
+          <a:ln/>
+        </p:spPr>
+        <p:txBody>
+          <a:bodyPr wrap="none" lIns="0" tIns="0" rIns="0" bIns="0" rtlCol="0" anchor="t"/>
+          <a:lstStyle/>
+          <a:p>
+            <a:pPr algn="l" indent="0" marL="0">
+              <a:lnSpc>
+                <a:spcPct val="105000"/>
+              </a:lnSpc>
+              <a:buNone/>
+            </a:pPr>
+            <a:r>
+              <a:rPr lang="zh-CN" altLang="en-US" sz="3600" b="1" dirty="0">
+                <a:solidFill>
+                  <a:srgbClr val="343E3B"/>
+                </a:solidFill>
+                <a:latin typeface="Microsoft YaHei" pitchFamily="34" charset="0"/>
+                <a:ea typeface="Microsoft YaHei" pitchFamily="34" charset="-122"/>
+                <a:cs typeface="Microsoft YaHei" pitchFamily="34" charset="-120"/>
+              </a:rPr>
+              <a:t>节内追问：履行赔偿以后，哪些问题仍然存在？</a:t>
+            </a:r>
+            <a:endParaRPr lang="zh-CN" sz="3600" dirty="0"/>
+          </a:p>
+        </p:txBody>
+      </p:sp>
+      <p:sp>
+        <p:nvSpPr>
+          <p:cNvPr id="4" name="Text 2"/>
+          <p:cNvSpPr/>
+          <p:nvPr/>
+        </p:nvSpPr>
+        <p:spPr>
+          <a:xfrm>
+            <a:off x="795528" y="1920240"/>
+            <a:ext cx="10533888" cy="457200"/>
+          </a:xfrm>
+          <a:prstGeom prst="rect">
+            <a:avLst/>
+          </a:prstGeom>
+          <a:noFill/>
+          <a:ln/>
+        </p:spPr>
+        <p:txBody>
+          <a:bodyPr wrap="none" lIns="0" tIns="0" rIns="0" bIns="0" rtlCol="0" anchor="t"/>
+          <a:lstStyle/>
+          <a:p>
+            <a:pPr algn="l" indent="0" marL="0">
+              <a:lnSpc>
+                <a:spcPct val="105000"/>
+              </a:lnSpc>
+              <a:buNone/>
+            </a:pPr>
+            <a:r>
+              <a:rPr lang="zh-CN" altLang="en-US" sz="2400" b="1" dirty="0">
+                <a:solidFill>
+                  <a:srgbClr val="9B3D32"/>
+                </a:solidFill>
+                <a:latin typeface="Microsoft YaHei" pitchFamily="34" charset="0"/>
+                <a:ea typeface="Microsoft YaHei" pitchFamily="34" charset="-122"/>
+                <a:cs typeface="Microsoft YaHei" pitchFamily="34" charset="-120"/>
+              </a:rPr>
+              <a:t>教学假设</a:t>
+            </a:r>
+            <a:endParaRPr lang="zh-CN" sz="2400" dirty="0"/>
+          </a:p>
+        </p:txBody>
+      </p:sp>
+      <p:sp>
+        <p:nvSpPr>
+          <p:cNvPr id="5" name="Text 3"/>
+          <p:cNvSpPr/>
+          <p:nvPr/>
+        </p:nvSpPr>
+        <p:spPr>
+          <a:xfrm>
+            <a:off x="795528" y="2450592"/>
+            <a:ext cx="10533888" cy="1165860"/>
+          </a:xfrm>
+          <a:prstGeom prst="rect">
+            <a:avLst/>
+          </a:prstGeom>
+          <a:noFill/>
+          <a:ln/>
+        </p:spPr>
+        <p:txBody>
+          <a:bodyPr wrap="none" lIns="0" tIns="0" rIns="0" bIns="0" rtlCol="0" anchor="t"/>
+          <a:lstStyle/>
+          <a:p>
+            <a:pPr algn="l" indent="0" marL="0">
+              <a:lnSpc>
+                <a:spcPct val="105000"/>
+              </a:lnSpc>
+              <a:buNone/>
+            </a:pPr>
+            <a:r>
+              <a:rPr lang="zh-CN" altLang="en-US" sz="2600" dirty="0">
+                <a:solidFill>
+                  <a:srgbClr val="2B302F"/>
+                </a:solidFill>
+                <a:latin typeface="Microsoft YaHei" pitchFamily="34" charset="0"/>
+                <a:ea typeface="Microsoft YaHei" pitchFamily="34" charset="-122"/>
+                <a:cs typeface="Microsoft YaHei" pitchFamily="34" charset="-120"/>
+              </a:rPr>
+              <a:t>本课违法行政拘留事实成立，法定赔偿义务已经履行。</a:t>
+            </a:r>
+            <a:endParaRPr lang="zh-CN" sz="2600" dirty="0"/>
+          </a:p>
+        </p:txBody>
+      </p:sp>
+      <p:sp>
+        <p:nvSpPr>
+          <p:cNvPr id="6" name="Text 4"/>
+          <p:cNvSpPr/>
+          <p:nvPr/>
+        </p:nvSpPr>
+        <p:spPr>
+          <a:xfrm>
+            <a:off x="795528" y="3854196"/>
+            <a:ext cx="10533888" cy="457200"/>
+          </a:xfrm>
+          <a:prstGeom prst="rect">
+            <a:avLst/>
+          </a:prstGeom>
+          <a:noFill/>
+          <a:ln/>
+        </p:spPr>
+        <p:txBody>
+          <a:bodyPr wrap="none" lIns="0" tIns="0" rIns="0" bIns="0" rtlCol="0" anchor="t"/>
+          <a:lstStyle/>
+          <a:p>
+            <a:pPr algn="l" indent="0" marL="0">
+              <a:lnSpc>
+                <a:spcPct val="105000"/>
+              </a:lnSpc>
+              <a:buNone/>
+            </a:pPr>
+            <a:r>
+              <a:rPr lang="zh-CN" altLang="en-US" sz="2400" b="1" dirty="0">
+                <a:solidFill>
+                  <a:srgbClr val="9B3D32"/>
+                </a:solidFill>
+                <a:latin typeface="Microsoft YaHei" pitchFamily="34" charset="0"/>
+                <a:ea typeface="Microsoft YaHei" pitchFamily="34" charset="-122"/>
+                <a:cs typeface="Microsoft YaHei" pitchFamily="34" charset="-120"/>
+              </a:rPr>
+              <a:t>分别判断</a:t>
+            </a:r>
+            <a:endParaRPr lang="zh-CN" sz="2400" dirty="0"/>
+          </a:p>
+        </p:txBody>
+      </p:sp>
+      <p:sp>
+        <p:nvSpPr>
+          <p:cNvPr id="7" name="Text 5"/>
+          <p:cNvSpPr/>
+          <p:nvPr/>
+        </p:nvSpPr>
+        <p:spPr>
+          <a:xfrm>
+            <a:off x="795528" y="4384548"/>
+            <a:ext cx="10533888" cy="1165860"/>
+          </a:xfrm>
+          <a:prstGeom prst="rect">
+            <a:avLst/>
+          </a:prstGeom>
+          <a:noFill/>
+          <a:ln/>
+        </p:spPr>
+        <p:txBody>
+          <a:bodyPr wrap="none" lIns="0" tIns="0" rIns="0" bIns="0" rtlCol="0" anchor="t"/>
+          <a:lstStyle/>
+          <a:p>
+            <a:pPr algn="l" indent="0" marL="0">
+              <a:lnSpc>
+                <a:spcPct val="105000"/>
+              </a:lnSpc>
+              <a:buNone/>
+            </a:pPr>
+            <a:r>
+              <a:rPr lang="zh-CN" altLang="en-US" sz="2600" dirty="0">
+                <a:solidFill>
+                  <a:srgbClr val="2B302F"/>
+                </a:solidFill>
+                <a:latin typeface="Microsoft YaHei" pitchFamily="34" charset="0"/>
+                <a:ea typeface="Microsoft YaHei" pitchFamily="34" charset="-122"/>
+                <a:cs typeface="Microsoft YaHei" pitchFamily="34" charset="-120"/>
+              </a:rPr>
+              <a:t>能否因此说过去的拘留合法？能否</a:t>
+            </a:r>
+            <a:endParaRPr lang="zh-CN" sz="2600" dirty="0"/>
+          </a:p>
+          <a:p>
+            <a:pPr algn="l" indent="0" marL="0">
+              <a:lnSpc>
+                <a:spcPct val="105000"/>
+              </a:lnSpc>
+              <a:buNone/>
+            </a:pPr>
+            <a:r>
+              <a:rPr lang="zh-CN" altLang="en-US" sz="2600" dirty="0">
+                <a:solidFill>
+                  <a:srgbClr val="2B302F"/>
+                </a:solidFill>
+                <a:latin typeface="Microsoft YaHei" pitchFamily="34" charset="0"/>
+                <a:ea typeface="Microsoft YaHei" pitchFamily="34" charset="-122"/>
+                <a:cs typeface="Microsoft YaHei" pitchFamily="34" charset="-120"/>
+              </a:rPr>
+              <a:t>说权利保障已经不再有任何问题？</a:t>
+            </a:r>
+            <a:endParaRPr lang="zh-CN" sz="2600" dirty="0"/>
+          </a:p>
+        </p:txBody>
+      </p:sp>
+      <p:sp>
+        <p:nvSpPr>
+          <p:cNvPr id="8" name="Text 6"/>
+          <p:cNvSpPr/>
+          <p:nvPr/>
+        </p:nvSpPr>
+        <p:spPr>
+          <a:xfrm>
+            <a:off x="722376" y="5815584"/>
+            <a:ext cx="10753344" cy="429768"/>
+          </a:xfrm>
+          <a:prstGeom prst="rect">
+            <a:avLst/>
+          </a:prstGeom>
+          <a:noFill/>
+          <a:ln/>
+        </p:spPr>
+        <p:txBody>
+          <a:bodyPr wrap="none" lIns="0" tIns="0" rIns="0" bIns="0" rtlCol="0" anchor="t"/>
+          <a:lstStyle/>
+          <a:p>
+            <a:pPr algn="l" indent="0" marL="0">
+              <a:lnSpc>
+                <a:spcPct val="105000"/>
+              </a:lnSpc>
+              <a:buNone/>
+            </a:pPr>
+            <a:r>
+              <a:rPr lang="zh-CN" altLang="en-US" sz="2400" b="1" dirty="0">
+                <a:solidFill>
+                  <a:srgbClr val="9B3D32"/>
+                </a:solidFill>
+                <a:latin typeface="Microsoft YaHei" pitchFamily="34" charset="0"/>
+                <a:ea typeface="Microsoft YaHei" pitchFamily="34" charset="-122"/>
+                <a:cs typeface="Microsoft YaHei" pitchFamily="34" charset="-120"/>
+              </a:rPr>
+              <a:t>按本节进度调用，仍在45分钟内收束。</a:t>
+            </a:r>
+            <a:endParaRPr lang="zh-CN" sz="2400" dirty="0"/>
+          </a:p>
+        </p:txBody>
+      </p:sp>
+      <p:sp>
+        <p:nvSpPr>
+          <p:cNvPr id="9" name="Text 7"/>
+          <p:cNvSpPr/>
+          <p:nvPr/>
+        </p:nvSpPr>
+        <p:spPr>
+          <a:xfrm>
+            <a:off x="713232" y="6419088"/>
+            <a:ext cx="9646920" cy="283464"/>
+          </a:xfrm>
+          <a:prstGeom prst="rect">
+            <a:avLst/>
+          </a:prstGeom>
+          <a:noFill/>
+          <a:ln/>
+        </p:spPr>
+        <p:txBody>
+          <a:bodyPr wrap="none" lIns="0" tIns="0" rIns="0" bIns="0" rtlCol="0" anchor="t"/>
+          <a:lstStyle/>
+          <a:p>
+            <a:pPr algn="l" indent="0" marL="0">
+              <a:lnSpc>
+                <a:spcPct val="105000"/>
+              </a:lnSpc>
+              <a:buNone/>
+            </a:pPr>
+            <a:r>
+              <a:rPr lang="zh-CN" altLang="en-US" sz="1200" dirty="0">
+                <a:solidFill>
+                  <a:srgbClr val="616966"/>
+                </a:solidFill>
+                <a:latin typeface="Microsoft YaHei" pitchFamily="34" charset="0"/>
+                <a:ea typeface="Microsoft YaHei" pitchFamily="34" charset="-122"/>
+                <a:cs typeface="Microsoft YaHei" pitchFamily="34" charset="-120"/>
+              </a:rPr>
+              <a:t>宪法第5、33、41条；国家赔偿法第1、7、16条；教学假设</a:t>
+            </a:r>
+            <a:endParaRPr lang="zh-CN" sz="1200" dirty="0"/>
+          </a:p>
+        </p:txBody>
+      </p:sp>
+      <p:sp>
+        <p:nvSpPr>
+          <p:cNvPr id="10" name="Text 8"/>
+          <p:cNvSpPr/>
+          <p:nvPr/>
+        </p:nvSpPr>
+        <p:spPr>
+          <a:xfrm>
+            <a:off x="10588752" y="6419088"/>
+            <a:ext cx="896112" cy="283464"/>
+          </a:xfrm>
+          <a:prstGeom prst="rect">
+            <a:avLst/>
+          </a:prstGeom>
+          <a:noFill/>
+          <a:ln/>
+        </p:spPr>
+        <p:txBody>
+          <a:bodyPr wrap="none" lIns="0" tIns="0" rIns="0" bIns="0" rtlCol="0" anchor="t"/>
+          <a:lstStyle/>
+          <a:p>
+            <a:pPr algn="r" indent="0" marL="0">
+              <a:lnSpc>
+                <a:spcPct val="105000"/>
+              </a:lnSpc>
+              <a:buNone/>
+            </a:pPr>
+            <a:r>
+              <a:rPr lang="zh-CN" altLang="en-US" sz="1200" dirty="0">
+                <a:solidFill>
+                  <a:srgbClr val="616966"/>
+                </a:solidFill>
+                <a:latin typeface="Microsoft YaHei" pitchFamily="34" charset="0"/>
+                <a:ea typeface="Microsoft YaHei" pitchFamily="34" charset="-122"/>
+                <a:cs typeface="Microsoft YaHei" pitchFamily="34" charset="-120"/>
+              </a:rPr>
+              <a:t>37 / 38</a:t>
+            </a:r>
+            <a:endParaRPr lang="zh-CN" sz="1200" dirty="0"/>
+          </a:p>
+        </p:txBody>
+      </p:sp>
+    </p:spTree>
+  </p:cSld>
+  <p:clrMapOvr>
+    <a:masterClrMapping/>
+  </p:clrMapOvr>
+</p:sld>
+</file>
+
+<file path=ppt/slides/slide38.xml><?xml version="1.0" encoding="utf-8"?>
+<p:sld xmlns:a="http://schemas.openxmlformats.org/drawingml/2006/main" xmlns:r="http://schemas.openxmlformats.org/officeDocument/2006/relationships" xmlns:p="http://schemas.openxmlformats.org/presentationml/2006/main">
+  <p:cSld name="Slide 38">
+    <p:bg>
+      <p:bgPr>
+        <a:solidFill>
+          <a:srgbClr val="F7F4ED"/>
+        </a:solidFill>
+      </p:bgPr>
+    </p:bg>
+    <p:spTree>
+      <p:nvGrpSpPr>
+        <p:cNvPr id="1" name=""/>
+        <p:cNvGrpSpPr/>
+        <p:nvPr/>
+      </p:nvGrpSpPr>
+      <p:grpSpPr>
+        <a:xfrm>
+          <a:off x="0" y="0"/>
+          <a:ext cx="0" cy="0"/>
+          <a:chOff x="0" y="0"/>
+          <a:chExt cx="0" cy="0"/>
+        </a:xfrm>
+      </p:grpSpPr>
+      <p:sp>
+        <p:nvSpPr>
+          <p:cNvPr id="2" name="Text 0"/>
+          <p:cNvSpPr/>
+          <p:nvPr/>
+        </p:nvSpPr>
+        <p:spPr>
+          <a:xfrm>
+            <a:off x="713232" y="320040"/>
+            <a:ext cx="10789920" cy="329184"/>
+          </a:xfrm>
+          <a:prstGeom prst="rect">
+            <a:avLst/>
+          </a:prstGeom>
+          <a:noFill/>
+          <a:ln/>
+        </p:spPr>
+        <p:txBody>
+          <a:bodyPr wrap="none" lIns="0" tIns="0" rIns="0" bIns="0" rtlCol="0" anchor="t"/>
+          <a:lstStyle/>
+          <a:p>
+            <a:pPr algn="l" indent="0" marL="0">
+              <a:lnSpc>
+                <a:spcPct val="105000"/>
+              </a:lnSpc>
+              <a:buNone/>
+            </a:pPr>
+            <a:r>
+              <a:rPr lang="zh-CN" altLang="en-US" sz="1700" b="1" dirty="0">
+                <a:solidFill>
+                  <a:srgbClr val="9B3D32"/>
+                </a:solidFill>
+                <a:latin typeface="Microsoft YaHei" pitchFamily="34" charset="0"/>
+                <a:ea typeface="Microsoft YaHei" pitchFamily="34" charset="-122"/>
+                <a:cs typeface="Microsoft YaHei" pitchFamily="34" charset="-120"/>
+              </a:rPr>
               <a:t>课后查读</a:t>
             </a:r>
             <a:endParaRPr lang="zh-CN" sz="1700" dirty="0"/>
@@ -19020,7 +20799,7 @@
                 <a:ea typeface="Microsoft YaHei" pitchFamily="34" charset="-122"/>
                 <a:cs typeface="Microsoft YaHei" pitchFamily="34" charset="-120"/>
               </a:rPr>
-              <a:t>36 / 36</a:t>
+              <a:t>38 / 38</a:t>
             </a:r>
             <a:endParaRPr lang="zh-CN" sz="1200" dirty="0"/>
           </a:p>
@@ -19094,7 +20873,7 @@
                 <a:ea typeface="Microsoft YaHei" pitchFamily="34" charset="-122"/>
                 <a:cs typeface="Microsoft YaHei" pitchFamily="34" charset="-120"/>
               </a:rPr>
-              <a:t>一 国家生活的根本规则</a:t>
+              <a:t>上节｜一 国家生活的根本规则</a:t>
             </a:r>
             <a:endParaRPr lang="zh-CN" sz="1700" dirty="0"/>
           </a:p>
@@ -19544,7 +21323,7 @@
                 <a:ea typeface="Microsoft YaHei" pitchFamily="34" charset="-122"/>
                 <a:cs typeface="Microsoft YaHei" pitchFamily="34" charset="-120"/>
               </a:rPr>
-              <a:t>4 / 36</a:t>
+              <a:t>4 / 38</a:t>
             </a:r>
             <a:endParaRPr lang="zh-CN" sz="1200" dirty="0"/>
           </a:p>
@@ -19618,7 +21397,7 @@
                 <a:ea typeface="Microsoft YaHei" pitchFamily="34" charset="-122"/>
                 <a:cs typeface="Microsoft YaHei" pitchFamily="34" charset="-120"/>
               </a:rPr>
-              <a:t>一 国家生活的根本规则</a:t>
+              <a:t>上节｜一 国家生活的根本规则</a:t>
             </a:r>
             <a:endParaRPr lang="zh-CN" sz="1700" dirty="0"/>
           </a:p>
@@ -19994,7 +21773,7 @@
                 <a:ea typeface="Microsoft YaHei" pitchFamily="34" charset="-122"/>
                 <a:cs typeface="Microsoft YaHei" pitchFamily="34" charset="-120"/>
               </a:rPr>
-              <a:t>5 / 36</a:t>
+              <a:t>5 / 38</a:t>
             </a:r>
             <a:endParaRPr lang="zh-CN" sz="1200" dirty="0"/>
           </a:p>
@@ -20068,7 +21847,7 @@
                 <a:ea typeface="Microsoft YaHei" pitchFamily="34" charset="-122"/>
                 <a:cs typeface="Microsoft YaHei" pitchFamily="34" charset="-120"/>
               </a:rPr>
-              <a:t>一 国家生活的根本规则</a:t>
+              <a:t>上节｜一 国家生活的根本规则</a:t>
             </a:r>
             <a:endParaRPr lang="zh-CN" sz="1700" dirty="0"/>
           </a:p>
@@ -20125,7 +21904,7 @@
         <p:spPr>
           <a:xfrm>
             <a:off x="758952" y="1965960"/>
-            <a:ext cx="2194560" cy="1650492"/>
+            <a:ext cx="2194560" cy="1002792"/>
           </a:xfrm>
           <a:prstGeom prst="rect">
             <a:avLst/>
@@ -20152,6 +21931,26 @@
                 <a:ea typeface="Microsoft YaHei" pitchFamily="34" charset="-122"/>
                 <a:cs typeface="Microsoft YaHei" pitchFamily="34" charset="-120"/>
               </a:rPr>
+              <a:t>现行宪法</a:t>
+            </a:r>
+            <a:endParaRPr lang="zh-CN" sz="2400" dirty="0"/>
+          </a:p>
+          <a:p>
+            <a:pPr algn="l" indent="0" marL="0">
+              <a:lnSpc>
+                <a:spcPct val="105000"/>
+              </a:lnSpc>
+              <a:buNone/>
+            </a:pPr>
+            <a:r>
+              <a:rPr lang="zh-CN" altLang="en-US" sz="2400" b="1" dirty="0">
+                <a:solidFill>
+                  <a:srgbClr val="9B3D32"/>
+                </a:solidFill>
+                <a:latin typeface="Microsoft YaHei" pitchFamily="34" charset="0"/>
+                <a:ea typeface="Microsoft YaHei" pitchFamily="34" charset="-122"/>
+                <a:cs typeface="Microsoft YaHei" pitchFamily="34" charset="-120"/>
+              </a:rPr>
               <a:t>第5条第3款</a:t>
             </a:r>
             <a:endParaRPr lang="zh-CN" sz="2400" dirty="0"/>
@@ -20167,7 +21966,7 @@
         <p:spPr>
           <a:xfrm>
             <a:off x="3410712" y="1965960"/>
-            <a:ext cx="8019288" cy="1650492"/>
+            <a:ext cx="8019288" cy="1002792"/>
           </a:xfrm>
           <a:prstGeom prst="rect">
             <a:avLst/>
@@ -20222,14 +22021,37 @@
       </p:sp>
       <p:sp>
         <p:nvSpPr>
-          <p:cNvPr id="6" name="Text 4"/>
-          <p:cNvSpPr/>
-          <p:nvPr/>
-        </p:nvSpPr>
-        <p:spPr>
-          <a:xfrm>
-            <a:off x="758952" y="3909060"/>
-            <a:ext cx="2194560" cy="1650492"/>
+          <p:cNvPr id="6" name="Shape 4"/>
+          <p:cNvSpPr/>
+          <p:nvPr/>
+        </p:nvSpPr>
+        <p:spPr>
+          <a:xfrm>
+            <a:off x="758952" y="3092196"/>
+            <a:ext cx="10671048" cy="0"/>
+          </a:xfrm>
+          <a:prstGeom prst="line">
+            <a:avLst/>
+          </a:prstGeom>
+          <a:noFill/>
+          <a:ln w="16510">
+            <a:solidFill>
+              <a:srgbClr val="CBCDC5"/>
+            </a:solidFill>
+            <a:prstDash val="solid"/>
+          </a:ln>
+        </p:spPr>
+      </p:sp>
+      <p:sp>
+        <p:nvSpPr>
+          <p:cNvPr id="7" name="Text 5"/>
+          <p:cNvSpPr/>
+          <p:nvPr/>
+        </p:nvSpPr>
+        <p:spPr>
+          <a:xfrm>
+            <a:off x="758952" y="3261360"/>
+            <a:ext cx="2194560" cy="1002792"/>
           </a:xfrm>
           <a:prstGeom prst="rect">
             <a:avLst/>
@@ -20256,10 +22078,117 @@
                 <a:ea typeface="Microsoft YaHei" pitchFamily="34" charset="-122"/>
                 <a:cs typeface="Microsoft YaHei" pitchFamily="34" charset="-120"/>
               </a:rPr>
-              <a:t>连接这条</a:t>
-            </a:r>
-            <a:endParaRPr lang="zh-CN" sz="2400" dirty="0"/>
-          </a:p>
+              <a:t>立法仍须回答</a:t>
+            </a:r>
+            <a:endParaRPr lang="zh-CN" sz="2400" dirty="0"/>
+          </a:p>
+        </p:txBody>
+      </p:sp>
+      <p:sp>
+        <p:nvSpPr>
+          <p:cNvPr id="8" name="Text 6"/>
+          <p:cNvSpPr/>
+          <p:nvPr/>
+        </p:nvSpPr>
+        <p:spPr>
+          <a:xfrm>
+            <a:off x="3410712" y="3261360"/>
+            <a:ext cx="8019288" cy="1002792"/>
+          </a:xfrm>
+          <a:prstGeom prst="rect">
+            <a:avLst/>
+          </a:prstGeom>
+          <a:noFill/>
+          <a:ln/>
+        </p:spPr>
+        <p:txBody>
+          <a:bodyPr wrap="none" lIns="0" tIns="0" rIns="0" bIns="0" rtlCol="0" anchor="t"/>
+          <a:lstStyle/>
+          <a:p>
+            <a:pPr algn="l" indent="0" marL="0">
+              <a:lnSpc>
+                <a:spcPct val="105000"/>
+              </a:lnSpc>
+              <a:buNone/>
+            </a:pPr>
+            <a:r>
+              <a:rPr lang="zh-CN" altLang="en-US" sz="2400" dirty="0">
+                <a:solidFill>
+                  <a:srgbClr val="2B302F"/>
+                </a:solidFill>
+                <a:latin typeface="Microsoft YaHei" pitchFamily="34" charset="0"/>
+                <a:ea typeface="Microsoft YaHei" pitchFamily="34" charset="-122"/>
+                <a:cs typeface="Microsoft YaHei" pitchFamily="34" charset="-120"/>
+              </a:rPr>
+              <a:t>在共同约束之内，具体情形、</a:t>
+            </a:r>
+            <a:endParaRPr lang="zh-CN" sz="2400" dirty="0"/>
+          </a:p>
+          <a:p>
+            <a:pPr algn="l" indent="0" marL="0">
+              <a:lnSpc>
+                <a:spcPct val="105000"/>
+              </a:lnSpc>
+              <a:buNone/>
+            </a:pPr>
+            <a:r>
+              <a:rPr lang="zh-CN" altLang="en-US" sz="2400" dirty="0">
+                <a:solidFill>
+                  <a:srgbClr val="2B302F"/>
+                </a:solidFill>
+                <a:latin typeface="Microsoft YaHei" pitchFamily="34" charset="0"/>
+                <a:ea typeface="Microsoft YaHei" pitchFamily="34" charset="-122"/>
+                <a:cs typeface="Microsoft YaHei" pitchFamily="34" charset="-120"/>
+              </a:rPr>
+              <a:t>责任主体与办理方式怎样安排？</a:t>
+            </a:r>
+            <a:endParaRPr lang="zh-CN" sz="2400" dirty="0"/>
+          </a:p>
+        </p:txBody>
+      </p:sp>
+      <p:sp>
+        <p:nvSpPr>
+          <p:cNvPr id="9" name="Shape 7"/>
+          <p:cNvSpPr/>
+          <p:nvPr/>
+        </p:nvSpPr>
+        <p:spPr>
+          <a:xfrm>
+            <a:off x="758952" y="4387596"/>
+            <a:ext cx="10671048" cy="0"/>
+          </a:xfrm>
+          <a:prstGeom prst="line">
+            <a:avLst/>
+          </a:prstGeom>
+          <a:noFill/>
+          <a:ln w="16510">
+            <a:solidFill>
+              <a:srgbClr val="CBCDC5"/>
+            </a:solidFill>
+            <a:prstDash val="solid"/>
+          </a:ln>
+        </p:spPr>
+      </p:sp>
+      <p:sp>
+        <p:nvSpPr>
+          <p:cNvPr id="10" name="Text 8"/>
+          <p:cNvSpPr/>
+          <p:nvPr/>
+        </p:nvSpPr>
+        <p:spPr>
+          <a:xfrm>
+            <a:off x="758952" y="4556760"/>
+            <a:ext cx="2194560" cy="1002792"/>
+          </a:xfrm>
+          <a:prstGeom prst="rect">
+            <a:avLst/>
+          </a:prstGeom>
+          <a:noFill/>
+          <a:ln/>
+        </p:spPr>
+        <p:txBody>
+          <a:bodyPr wrap="none" lIns="0" tIns="0" rIns="0" bIns="0" rtlCol="0" anchor="t"/>
+          <a:lstStyle/>
           <a:p>
             <a:pPr algn="l" indent="0" marL="0">
               <a:lnSpc>
@@ -20276,22 +22205,42 @@
                 <a:ea typeface="Microsoft YaHei" pitchFamily="34" charset="-122"/>
                 <a:cs typeface="Microsoft YaHei" pitchFamily="34" charset="-120"/>
               </a:rPr>
-              <a:t>规定的理由</a:t>
-            </a:r>
-            <a:endParaRPr lang="zh-CN" sz="2400" dirty="0"/>
-          </a:p>
-        </p:txBody>
-      </p:sp>
-      <p:sp>
-        <p:nvSpPr>
-          <p:cNvPr id="7" name="Text 5"/>
-          <p:cNvSpPr/>
-          <p:nvPr/>
-        </p:nvSpPr>
-        <p:spPr>
-          <a:xfrm>
-            <a:off x="3410712" y="3909060"/>
-            <a:ext cx="8019288" cy="1650492"/>
+              <a:t>两种不能</a:t>
+            </a:r>
+            <a:endParaRPr lang="zh-CN" sz="2400" dirty="0"/>
+          </a:p>
+          <a:p>
+            <a:pPr algn="l" indent="0" marL="0">
+              <a:lnSpc>
+                <a:spcPct val="105000"/>
+              </a:lnSpc>
+              <a:buNone/>
+            </a:pPr>
+            <a:r>
+              <a:rPr lang="zh-CN" altLang="en-US" sz="2400" b="1" dirty="0">
+                <a:solidFill>
+                  <a:srgbClr val="9B3D32"/>
+                </a:solidFill>
+                <a:latin typeface="Microsoft YaHei" pitchFamily="34" charset="0"/>
+                <a:ea typeface="Microsoft YaHei" pitchFamily="34" charset="-122"/>
+                <a:cs typeface="Microsoft YaHei" pitchFamily="34" charset="-120"/>
+              </a:rPr>
+              <a:t>省略的判断</a:t>
+            </a:r>
+            <a:endParaRPr lang="zh-CN" sz="2400" dirty="0"/>
+          </a:p>
+        </p:txBody>
+      </p:sp>
+      <p:sp>
+        <p:nvSpPr>
+          <p:cNvPr id="11" name="Text 9"/>
+          <p:cNvSpPr/>
+          <p:nvPr/>
+        </p:nvSpPr>
+        <p:spPr>
+          <a:xfrm>
+            <a:off x="3410712" y="4556760"/>
+            <a:ext cx="8019288" cy="1002792"/>
           </a:xfrm>
           <a:prstGeom prst="rect">
             <a:avLst/>
@@ -20318,35 +22267,15 @@
                 <a:ea typeface="Microsoft YaHei" pitchFamily="34" charset="-122"/>
                 <a:cs typeface="Microsoft YaHei" pitchFamily="34" charset="-120"/>
               </a:rPr>
-              <a:t>宪法组织和约束国家权力；制定</a:t>
-            </a:r>
-            <a:endParaRPr lang="zh-CN" sz="2400" dirty="0"/>
-          </a:p>
-          <a:p>
-            <a:pPr algn="l" indent="0" marL="0">
-              <a:lnSpc>
-                <a:spcPct val="105000"/>
-              </a:lnSpc>
-              <a:buNone/>
-            </a:pPr>
-            <a:r>
-              <a:rPr lang="zh-CN" altLang="en-US" sz="2400" dirty="0">
-                <a:solidFill>
-                  <a:srgbClr val="2B302F"/>
-                </a:solidFill>
-                <a:latin typeface="Microsoft YaHei" pitchFamily="34" charset="0"/>
-                <a:ea typeface="Microsoft YaHei" pitchFamily="34" charset="-122"/>
-                <a:cs typeface="Microsoft YaHei" pitchFamily="34" charset="-120"/>
-              </a:rPr>
-              <a:t>法律本身也是行使国家权力。</a:t>
-            </a:r>
-            <a:endParaRPr lang="zh-CN" sz="2400" dirty="0"/>
-          </a:p>
-        </p:txBody>
-      </p:sp>
-      <p:sp>
-        <p:nvSpPr>
-          <p:cNvPr id="8" name="Text 6"/>
+              <a:t>有没有越过宪法要求？具体选择有什么理由？</a:t>
+            </a:r>
+            <a:endParaRPr lang="zh-CN" sz="2400" dirty="0"/>
+          </a:p>
+        </p:txBody>
+      </p:sp>
+      <p:sp>
+        <p:nvSpPr>
+          <p:cNvPr id="12" name="Text 10"/>
           <p:cNvSpPr/>
           <p:nvPr/>
         </p:nvSpPr>
@@ -20380,15 +22309,15 @@
                 <a:ea typeface="Microsoft YaHei" pitchFamily="34" charset="-122"/>
                 <a:cs typeface="Microsoft YaHei" pitchFamily="34" charset="-120"/>
               </a:rPr>
-              <a:t>具体安排有形成空间，不能自行排除根本约束。</a:t>
-            </a:r>
-            <a:endParaRPr lang="zh-CN" sz="2400" dirty="0"/>
-          </a:p>
-        </p:txBody>
-      </p:sp>
-      <p:sp>
-        <p:nvSpPr>
-          <p:cNvPr id="9" name="Text 7"/>
+              <a:t>有选择空间，仍须说明选择的依据。</a:t>
+            </a:r>
+            <a:endParaRPr lang="zh-CN" sz="2400" dirty="0"/>
+          </a:p>
+        </p:txBody>
+      </p:sp>
+      <p:sp>
+        <p:nvSpPr>
+          <p:cNvPr id="13" name="Text 11"/>
           <p:cNvSpPr/>
           <p:nvPr/>
         </p:nvSpPr>
@@ -20430,7 +22359,7 @@
       </p:sp>
       <p:sp>
         <p:nvSpPr>
-          <p:cNvPr id="10" name="Text 8"/>
+          <p:cNvPr id="14" name="Text 12"/>
           <p:cNvSpPr/>
           <p:nvPr/>
         </p:nvSpPr>
@@ -20464,7 +22393,7 @@
                 <a:ea typeface="Microsoft YaHei" pitchFamily="34" charset="-122"/>
                 <a:cs typeface="Microsoft YaHei" pitchFamily="34" charset="-120"/>
               </a:rPr>
-              <a:t>6 / 36</a:t>
+              <a:t>6 / 38</a:t>
             </a:r>
             <a:endParaRPr lang="zh-CN" sz="1200" dirty="0"/>
           </a:p>
@@ -20538,7 +22467,7 @@
                 <a:ea typeface="Microsoft YaHei" pitchFamily="34" charset="-122"/>
                 <a:cs typeface="Microsoft YaHei" pitchFamily="34" charset="-120"/>
               </a:rPr>
-              <a:t>一 国家生活的根本规则</a:t>
+              <a:t>上节｜一 国家生活的根本规则</a:t>
             </a:r>
             <a:endParaRPr lang="zh-CN" sz="1700" dirty="0"/>
           </a:p>
@@ -21211,7 +23140,7 @@
                 <a:ea typeface="Microsoft YaHei" pitchFamily="34" charset="-122"/>
                 <a:cs typeface="Microsoft YaHei" pitchFamily="34" charset="-120"/>
               </a:rPr>
-              <a:t>7 / 36</a:t>
+              <a:t>7 / 38</a:t>
             </a:r>
             <a:endParaRPr lang="zh-CN" sz="1200" dirty="0"/>
           </a:p>
@@ -21285,7 +23214,7 @@
                 <a:ea typeface="Microsoft YaHei" pitchFamily="34" charset="-122"/>
                 <a:cs typeface="Microsoft YaHei" pitchFamily="34" charset="-120"/>
               </a:rPr>
-              <a:t>一 国家生活的根本规则</a:t>
+              <a:t>上节｜一 国家生活的根本规则</a:t>
             </a:r>
             <a:endParaRPr lang="zh-CN" sz="1700" dirty="0"/>
           </a:p>
@@ -21715,7 +23644,7 @@
                 <a:ea typeface="Microsoft YaHei" pitchFamily="34" charset="-122"/>
                 <a:cs typeface="Microsoft YaHei" pitchFamily="34" charset="-120"/>
               </a:rPr>
-              <a:t>8 / 36</a:t>
+              <a:t>8 / 38</a:t>
             </a:r>
             <a:endParaRPr lang="zh-CN" sz="1200" dirty="0"/>
           </a:p>
@@ -21789,7 +23718,7 @@
                 <a:ea typeface="Microsoft YaHei" pitchFamily="34" charset="-122"/>
                 <a:cs typeface="Microsoft YaHei" pitchFamily="34" charset="-120"/>
               </a:rPr>
-              <a:t>一 国家生活的根本规则</a:t>
+              <a:t>上节｜一 国家生活的根本规则</a:t>
             </a:r>
             <a:endParaRPr lang="zh-CN" sz="1700" dirty="0"/>
           </a:p>
@@ -22239,7 +24168,7 @@
                 <a:ea typeface="Microsoft YaHei" pitchFamily="34" charset="-122"/>
                 <a:cs typeface="Microsoft YaHei" pitchFamily="34" charset="-120"/>
               </a:rPr>
-              <a:t>9 / 36</a:t>
+              <a:t>9 / 38</a:t>
             </a:r>
             <a:endParaRPr lang="zh-CN" sz="1200" dirty="0"/>
           </a:p>

--- a/materials/第1讲整合试讲主版本/第1讲_宪法总论_整合试讲主版本.pptx
+++ b/materials/第1讲整合试讲主版本/第1讲_宪法总论_整合试讲主版本.pptx
@@ -641,7 +641,7 @@
             <a:r>
               <a:rPr lang="en-US" dirty="0"/>
               <a:t>P10｜权力怎样行使，必须看见人的权利
-上节（本节0—45分钟）｜本节约30—32.7分钟
+上节（本节0—45分钟）｜本节约28.6—31.3分钟
 默认按页顺讲。页定位为备课估算；最终口读校正与独立活动见同版容量报告，不是教师实测。
 【翻至P10｜权力怎样行使，必须看见人的权利】（不朗读）
 1. 逐字讲述
@@ -750,7 +750,7 @@
             <a:r>
               <a:rPr lang="en-US" dirty="0"/>
               <a:t>P11｜五项原则，共同说明国家权力怎样运行
-上节（本节0—45分钟）｜本节约32.7—35.6分钟
+上节（本节0—45分钟）｜本节约31.3—34.2分钟
 默认按页顺讲。页定位为备课估算；最终口读校正与独立活动见同版容量报告，不是教师实测。
 【翻至P11｜五项原则，共同说明国家权力怎样运行】（不朗读）
 1. 逐字讲述
@@ -859,11 +859,11 @@
             <a:r>
               <a:rPr lang="en-US" dirty="0"/>
               <a:t>P12｜理解检查：机关地位与履职责任怎样相连？
-上节（本节0—45分钟）｜本节约35.6—39.7分钟
+上节（本节0—45分钟）｜本节约34.2—38分钟
 默认按页顺讲。页定位为备课估算；最终口读校正与独立活动见同版容量报告，不是教师实测。
 【翻至P12｜理解检查：机关地位与履职责任怎样相连？】（不朗读）
 1. 逐字讲述
-现在把已经读过的条文连一次。机关依法产生，能否只据此说明它每项行为都正确？请用第二、三、三十三条中至少两处，写一两句解释。不是把原则名称列出来，而是说清各处增加了什么要求。我们保留这一次独立说明，用它检查刚才几个关系有没有真正接起来。
+现在把已经读过的条文连一次。机关依法产生，能否只据此说明它每项行为都正确？请用第二、三、三十三条中至少两处，写一两句解释。不是把原则名称列出来，而是说清各处增加了什么要求。
 2. 活动，不朗读（2分钟）
 独立回看条文并写一两句80秒；请一名学生说明所选关系最多40秒。教师随后按下列已写讲述回收，不预设学生必然答错或长答。快情景90秒，常规120秒，慢情景150秒；这些是安排假设，非实测。
 3. 逐字讲述
@@ -871,9 +871,10 @@
 4. 逐字讲述
 如果你用的是第3条与第33条，也可以从机关的产生走到履职的约束。不同顺序都可以，关键是说出联系，而不只是把“人民主权、人权保障”两个词放在一起。
 5. 逐字讲述
-为什么不能只说“机关代表人民，所以行为当然正确”？第三条本身还规定负责与监督，第三十三条又提出国家活动应当遵守的权利要求。机关的法定地位和某项具体行为是否符合要求，仍须分别说明。可以从权力归属讲到责任，也可以从产生讲到权利；只要依据和联系完整，不要求同一种句式。这个回答能够说明本次关系解释，不据此宣布大家在陌生问题中都已独立掌握。
+为什么不能只说“机关代表人民，所以行为当然正确”？第三条本身还规定负责与监督，第三十三条又提出国家活动应当遵守的权利要求。机关的法定地位和某项具体行为是否符合要求，仍须分别说明。可以从权力归属讲到责任，也可以从产生讲到权利；只要依据和联系完整，不要求同一种句式。
 教师备查，不朗读
 这是上节唯一独立学习检查，其余短条文随讲带读。解释和教师反馈已写入speech，不再另计重复讲评。
+本次独立说明用于检查制度关系是否接起；示范后即时表达不能证明在陌生问题中已独立掌握。
 本页出处
 宪法第2、3、33条；原任务1及讲评合并
 来源及定位
@@ -968,7 +969,7 @@
             <a:r>
               <a:rPr lang="en-US" dirty="0"/>
               <a:t>P13｜根本规则可以改变，但修改有特别要求
-上节（本节0—45分钟）｜本节约39.7—42.8分钟
+上节（本节0—45分钟）｜本节约38—41.1分钟
 默认按页顺讲。页定位为备课估算；最终口读校正与独立活动见同版容量报告，不是教师实测。
 【翻至P13｜根本规则可以改变，但修改有特别要求】（不朗读）
 1. 逐字讲述
@@ -1077,7 +1078,7 @@
             <a:r>
               <a:rPr lang="en-US" dirty="0"/>
               <a:t>P14｜回看第一学时：“根本”已经有了哪些内容？
-上节（本节0—45分钟）｜本节约42.8—44.2分钟
+上节（本节0—45分钟）｜本节约41.1—42.5分钟
 默认按页顺讲。页定位为备课估算；最终口读校正与独立活动见同版容量报告，不是教师实测。
 【翻至P14｜回看第一学时：“根本”已经有了哪些内容？】（不朗读）
 1. 逐字讲述
@@ -1721,10 +1722,10 @@
           <a:p>
             <a:r>
               <a:rPr lang="en-US" dirty="0"/>
-              <a:t>P02｜从过渡安排，到持续的共同规则
-上节（本节0—45分钟）｜本节约1.5—5.7分钟
+              <a:t>P02｜从过渡安排，到国家制度的展开
+上节（本节0—45分钟）｜本节约1.5—5.4分钟
 默认按页顺讲。页定位为备课估算；最终口读校正与独立活动见同版容量报告，不是教师实测。
-【翻至P02｜从过渡安排，到持续的共同规则】（不朗读）
+【翻至P02｜从过渡安排，到国家制度的展开】（不朗读）
 1. 逐字讲述
 先把两份历史文本放在一起。新中国成立时，需要说明国家性质、政权机关怎样组织、人民享有什么权利。共同纲领已经对这些问题作出规定，发挥了临时宪法的作用。因此，照片中的代表走进怀仁堂时，面对的不是一个没有国家规则的空白。真正需要追问的是：已有安排解决到了哪一步，接下来又要怎样发展。
 2. 逐字讲述
@@ -1734,11 +1735,12 @@
 4. 逐字讲述
 当年的宪法第二十一条确认，全国人大是最高国家权力机关。其序言也明确说，这部宪法以共同纲领为基础，又是共同纲领的发展。因此，不是新文件出现就把过去一笔抹掉，而是过渡性安排继续展开为更完整的国家制度。我们看到了先有规则、规则指向下一步、下一步由国家机构和宪法继续确认的过程。
 5. 逐字讲述
-这件事为什么值得放在总论开头？因为它让我们看见，宪法不是给国家生活加一个响亮的名称。人民怎样行使国家权力，机关怎样组成、做什么、公民处在怎样的地位，都需要根本安排。一次会议可以作出这一次的决定，宪法还要给后来持续进行的国家活动确立共同前提。换了任职者，有关机关仍须在法定地位、权限和责任中工作。
+这次大会通过的内容，正是今后国家活动要共同遵循的根本安排：人民怎样行使国家权力，机关怎样组成、承担什么职责，公民处在怎样的地位。共同纲领此前已经回答这些问题，宪法在这一基础上继续展开。换了任职者，机关仍须在法定地位、权限和责任中工作。因此，根本性既不是“新文件更重要”，也不只是存在得更长；关键要看它为国家生活确立了哪些共同前提。
 6. 逐字讲述
-但也要保留一个区别：为什么一九五四年制定这部宪法，是具体历史问题；宪法为什么是国家根本法，是对国家制度和法律关系的一般解释。前一个故事打开后一个问题，却不能替我们证明所有答案。现在明确转回二〇一八年修正的现行宪法，看看今天的根本安排具体规定什么。完整的发展过程，下一讲再展开。
+这些共同前提，在今天的宪法中又怎样规定？我们转到二〇一八年修正的现行宪法，从它规定的任务、制度、权力和公民地位继续看。完整的发展过程，下一讲再展开。
 教师备查，不朗读
 屏幕第一段为历史条文提要，有简称，不冒充逐字引文；所用原句见学生材料。起草委员会与全国人大审议通过不同，若被问及据旧来源说明，不展开起草年代线。
+1954制定的具体原因与宪法根本法地位的一般解释有区别；历史过程只是入口，随后以现行宪法及教材继续说明。共同纲领也已作根本安排并有效约束，不能以有无持续效力将两者简单对立。
 本页出处
 共同纲领第13条节录；1954年宪法序言、第21条；1954最小历史线与起草/通过机关核查
 来源及定位
@@ -1969,13 +1971,13 @@
 信息要求有助于区分应当保障的请求，却不能仅凭这一用途就证明每种取得信息的办法都不可改变。需要信息与需要唯一形式，是下一步要分开的判断。
 同一条第二款继续规定：赔偿请求人书写申请书确有困难的，可以委托他人代书；也可以口头申请，由赔偿义务机关记入笔录。书写确有困难是条件，口头申请之后还有记入笔录，不是取消全部信息要求。
 书面形式便于固定请求和事实理由，但这种用途不能直接证明必须由本人亲笔完成。一个人写不出申请书，不等于没有事实，更不等于没有法定请求。把书写能力代替内容判断，便混淆了表达障碍与请求是否成立。
-现在明确增加一个教学条件：甲书写申请书确有困难，原题其他条件不变。它不是原题已经给出的事实，也不指称某机关真的拒绝甲。若坚持写不出就只能拒绝，没有回应法定替代；若说有困难便不要事实和理由，也没有完成核实任务。
+现在明确增加一个教学条件：甲书写申请书确有困难，原题其他条件不变。有人认为必须本人写，才能保证信息可靠。需要可靠信息的理由成立，但本人动笔也不独自证明事实真实；代书或口头申请形成记录之后，也仍须依法核实。这项关切需要比较取得信息的办法，不能直接推出唯一形式。
 代书改变文字由谁写，口头申请加笔录改变信息取得和记录的方式，仍保留依法判断所需内容。比较制度时可以问：要求与核实任务有什么关联；是否有仍完成任务的可行替代；对提出请求的机会有什么影响。这里的信息有必要，亲笔唯一却不能从该必要性直接推出；法律给出的替代减少形式障碍，未替代实体判断。
 这是对实际材料的课堂分析，不是正式合宪性审查模型。也不能把本条扩大为所有领域都可无条件口头办理，更不能编造当年存在两派争论。
-现在请用第十二条说明：甲书写确有困难，是只能拒绝，还是可以不要事实和理由？写出另一种安排，说明保留什么、改变什么，再加一句限度。
-可以这样解释：仍须有具体的要求、事实根据和理由；书写确有困难时可以代书，也可口头申请，由机关记入笔录。改变取得信息的方式，保留记录与核实所需要求，使请求有机会依法办理，却没有证明所有事实已经核实、全部主张必然成立。原题给定事实可支持原来的有限结论，教学新增的书写困难则支持本次方式比较，二者根据不能互相冒充。
-只说兼顾双方，尚未指向代书或口头加笔录的实际动作；只说口头就行，漏了困难条件和记录；只说仍需事实，又没回答障碍怎样处理。表达顺序可以不同，关键是依据和两层关系完整。
-一项方式回应了具体困难，不能独自证明全法合宪、金额确定或所有请求已获救济。普通法律是在宪法要求下形成制度，机关还须依法取得信息并履行义务。这使我们继续追问：法律已经规定，实际实施仍需要哪些工作？
+甲书写确有困难，机关需要可靠的信息。有人因此认为必须甲本人写，才能保证信息可靠。请用第十二条解释：这个理由是否足以证明本人书写是唯一方式？代书或口头申请加笔录保留什么、改变什么，又未证明哪一种后续结果？
+可以这样解释：仍须有具体的要求、事实根据和理由；书写确有困难时可以代书，也可口头申请，由机关记入笔录。可靠信息的需要不能直接证明必须本人写，本人动笔也不独自证明事实真实。法定替代仍保留记录和核实所需内容，使请求有机会依法办理。
+原题给定的违法行政拘留和自由侵害，继续支持甲有赔偿权、相应机关负义务的有限结论；书写困难支持本次方式比较，不能替代具体金额、其他主张和实际履行结果的根据。只说兼顾双方，尚未指向实际办法；只说口头就行，漏了困难条件和记录；只说仍需事实，又没回答障碍怎样处理。
+一项方式回应了具体困难，不能独自证明全法合宪或所有请求已获救济。普通法律在宪法要求下形成制度，机关仍须依法核实并履行义务。这使我们继续追问：法律已经规定，实际实施仍需要哪些工作？
 本页出处
 宪法第5条第3款、第41条第3款；国家赔偿法第12条第1款起句及第2项
 来源及定位
@@ -2073,7 +2075,7 @@
             <a:r>
               <a:rPr lang="en-US" dirty="0"/>
               <a:t>P22｜必要信息与取得信息的方式，可以分开
-下节（本节0—45分钟）｜本节约19.1—25.8分钟
+下节（本节0—45分钟）｜本节约19.1—25.9分钟
 默认按页顺讲。页定位为备课估算；最终口读校正与独立活动见同版容量报告，不是教师实测。
 【翻至P22｜必要信息与取得信息的方式，可以分开】（不朗读）
 1. 逐字讲述
@@ -2087,7 +2089,7 @@
 5. 逐字讲述
 为什么不直接把所有要求取消？假如请求没有明确内容，事实和理由也没有记录，办理者甚至不知道双方正在讨论是否发生过同一行为。这样造成的不确定，可能反而妨碍应有的保障。第十二条没有让便利取代依法判断，它选择的是保留能核实的内容，同时改变某一形式怎样完成。这让我们看到，解决障碍可以落在一个具体动作上。
 6. 逐字讲述
-用甲的请求作一个清楚标明的教学延伸：现在只再假定甲书写申请书确有困难，其他给定事实不变。若要求“必须亲自写，写不出就不让提出”，没有回应法律规定的替代方式；若说“既有困难，就不用具体要求、事实和理由”，也误解了同一条。已有信息要求继续有用途，取得信息的办法可以调整。
+用甲的请求作一个清楚标明的教学延伸：现在只再假定甲书写申请书确有困难，其他给定事实不变。有人认为，必须由本人写出申请书，才有可靠的事实信息。这项关切重视核实，值得认真回答；但本人是否动笔与所述事实是否真实，并不是同一个判断。还要看代书或口头申请加笔录能否留下同样需要核实的内容，不能省去比较便把本人书写定为唯一方式。
 7. 逐字讲述
 又为什么不认为同样要求本人书写，便对每个人都一样公平？同一句形式要求落在不同处境中，实际完成的难度可能不同。这不使机关可以按喜好对待人，而是说明形式统一尚不能独自证明机会充分。现行法明确给出书写确有困难这一条件，并安排可行方式。依法使用这种方式，是遵循规则的一部分，不是工作人员凭私人关系额外放宽。
 8. 逐字讲述
@@ -2193,11 +2195,11 @@
             <a:r>
               <a:rPr lang="en-US" dirty="0"/>
               <a:t>P23｜理解检查：改变方式，是否放弃了要求？
-下节（本节0—45分钟）｜本节约25.8—32.6分钟
+下节（本节0—45分钟）｜本节约25.9—33分钟
 默认按页顺讲。页定位为备课估算；最终口读校正与独立活动见同版容量报告，不是教师实测。
 【翻至P23｜理解检查：改变方式，是否放弃了要求？】（不朗读）
 1. 逐字讲述
-我们在这里保留下节一次独立解释。甲书写确有困难，是只能拒绝，还是可以不要事实和理由？请用刚才的条文指出另一种可行安排，并说明它保留了什么要求、改变了什么方式。再加一句限度：这种方式是否已证明甲的全部主张、具体金额及实际履行结果？不是只答两个主张都不好，要把理由接起来。
+甲书写申请书确有困难，这一点已经查明。机关需要可靠的请求和事实信息，有人因此认为必须由甲本人写，才能保证信息可靠。这个理由是否足以证明本人书写是唯一方式？请用第十二条解释代书或口头申请记入笔录保留了什么、改变了什么，再说明它尚未证明哪一种后续结果。请把理由连起来，而不只说办法更方便。
 2. 活动，不朗读（2分钟）
 独立对读第12条并写两三句80秒；请一名学生解释最多40秒。教师的下列回收是已写口述，不再另计。快情景90秒，常规120秒，慢情景150秒；不预设讨论热烈。
 3. 逐字讲述
@@ -2205,9 +2207,9 @@
 4. 逐字讲述
 如果只答“法律要兼顾双方”，还可以再问：兼顾究竟体现在哪个动作？答案在代书和口头申请加笔录，而不在一句态度。若只答“口头申请就行”，则漏掉书写确有困难的条件和机关记入笔录的安排。若只说“仍需事实”，又未说明实际困难怎样被回应。我们要形成的是能指向材料的判断。
 5. 逐字讲述
-在本设例中，原给定的违法行政拘留与相应机关义务判断继续成立，采用口头方式不会把它们改回未知。甲提出的其他主张、具体数额和实际办理结果，则不能仅从这种方式推出。现实办理仍须依法核实具体请求和相应事实，不能把本课题设当成现实证据。若另一道题未给书写确有困难，也不能单凭不愿书写就认定第二款条件已成立。方式、事实和其他请求内容，需要各自的根据。
+“本人写”本身也不能保证事实真实。一个人亲笔写下某件事，仍需依法核查它是否发生；代书或口头申请形成记录，也仍有同样的核实工作。可靠信息的需要成立，但从这里直接跳到唯一形式，缺少了对替代方式的比较。第十二条已经给出两种仍能留下请求和事实理由的办法，这正是判断要补上的一层。
 6. 逐字讲述
-再看它没有证明什么。它不证明每位请求人的全部事实都已核实，不证明赔偿金额和所有程序已经确定，也不能凭一条较周全的方式，宣布整部法律所有规定都已合宪、现实中的所有请求都得到救济。具体方式合理到哪一步，要同所解决的任务相称；未解决全部问题，也不使这项实际安排失去价值。
+在本设例中，原给定的违法行政拘留与相应机关义务判断继续成立，采用口头方式不会把它们改回未知。甲提出的其他主张、具体数额和实际办理结果，则不能仅从这种方式推出。现实办理仍须依法核实，不能把本课题设当成现实证据，也不能凭这一条安排宣布整部法律均已合宪、所有请求已获救济。若另一道题未给书写确有困难，也不能单凭不愿书写就认定第二款条件已成立。方式回应了具体困难，有实际价值；它没有代替各项结论所需的根据。
 7. 逐字讲述
 从甲的延伸回到一般关系，普通法律具体化宪法不是机械抄写，也不是任意摆布。它在根本要求下安排情形、主体和可操作办法；这些办法继续需要理由和核查。尊重制度选择，不能免除宪法约束；承认宪法约束，也不能假定每一项办理细节早已逐字藏在第四十一条里。
 8. 逐字讲述
@@ -2314,7 +2316,7 @@
             <a:r>
               <a:rPr lang="en-US" dirty="0"/>
               <a:t>P24｜把关系迁移到普通法律的起首句
-下节（本节0—45分钟）｜本节约32.6—35.1分钟
+下节（本节0—45分钟）｜本节约33—35.5分钟
 默认按页顺讲。页定位为备课估算；最终口读校正与独立活动见同版容量报告，不是教师实测。
 【翻至P24｜把关系迁移到普通法律的起首句】（不朗读）
 1. 逐字讲述
@@ -2421,11 +2423,11 @@
             <a:r>
               <a:rPr lang="en-US" dirty="0"/>
               <a:t>P25｜法律将要施行，为什么还要布置具体工作？
-下节（本节0—45分钟）｜本节约35.1—41.9分钟
+下节（本节0—45分钟）｜本节约35.5—41.9分钟
 默认按页顺讲。页定位为备课估算；最终口读校正与独立活动见同版容量报告，不是教师实测。
 【翻至P25｜法律将要施行，为什么还要布置具体工作？】（不朗读）
 1. 逐字讲述
-一九九四年，国家赔偿法已经通过并公布，将于一九九五年一月一日起施行。临近施行，国务院办公厅在十二月二十二日发出实施通知。这份通知保存了当时实际要处理的问题：法律已经有了，为什么仍要专门布置工作？
+现在回看一九九四年的施行准备。国家赔偿法已经通过并公布，将于一九九五年一月一日起施行。临近施行，国务院办公厅在十二月二十二日发出实施通知。这份通知保存了当时实际要处理的问题：法律已经有了，为什么仍要专门布置工作？
 2. 逐字讲述
 先看通知怎样说明来历。它明确援引宪法的赔偿规定，并说国家赔偿法在行政诉讼法有关行政赔偿规定的基础上，对行政赔偿范围、程序、标准作了具体规定，增加刑事赔偿内容，形成比较完备的国家赔偿制度。因此，一九九四年不是此前毫无依据、一部专法突然创造了全部赔偿要求。已有宪法权利和行政赔偿基础，随后作更系统的专门法律安排。
 3. 逐字讲述
@@ -2435,14 +2437,12 @@
 5. 逐字讲述
 为什么法律确定了义务机关，还需要这些组织工作？第七条使我们知道哪一个机关承担义务，但一位请求人来提出请求，机关仍须组织谁受理、怎样记录、如何核实并依法判断。权利依据、法定责任和具体工作衔接起来，制度才有实施的条件。刚才第十二条允许口头申请并记入笔录，也在提醒我们：一个明确办法往往同时包含机关要做的事。
 6. 逐字讲述
-注意，这里说的是实施条件，不是说只要机构成立就保证每项赔偿都及时完成。通知布置任务，不是任务已经充分完成的成绩单。它能证明当时提出了什么工作要求，不能证明每个地方怎样履行，更不能替今天的实际请求证明结果。原通知对当时法律的说明，也不代替我们刚才所读的现行条文。
+这种实施准备也使机关责任更具体。法律规定机关负义务，内部就应有人依制度处理，不能因为请求在几个岗位间流转便说没有人负责。不过，通知布置任务，不是任务已经充分完成的成绩单。它能证明当时提出了哪些工作要求，不能证明每个地方怎样履行；当年的机构安排和法律说明，也不能代替今天的适用规则与实际办理事实。
 7. 逐字讲述
-这种实施准备也使机关责任更具体。法律规定机关负义务，内部就应有人依制度处理，不能因为请求在几个岗位间流转便说没有人负责。我们这里只解释组织工作的必要性，没有把当年的机构分工当作今天的通行规定。通知能够证明提出过任务；今天哪一机关怎样履行，还要依据当下制度和事实核查。
+把三层分开，故事的意义才完整。第一层是已有权利与法律基础；第二层是专法的系统安排；第三层是施行中的组织和履行。法律将要施行，并不使此前宪法第一次获得效力；施行还需准备，也不允许机关任意拒绝本来应遵循的规范。恰恰因为有明确义务，我们才能追问工作有没有依法完成。
 8. 逐字讲述
-把三层分开，故事的意义才完整。第一层是已有权利与法律基础；第二层是专法的系统安排；第三层是施行中的组织和履行。法律将要施行，并不使此前宪法第一次获得效力；施行还需准备，也不允许机关任意拒绝本来应遵循的规范。恰恰因为有明确义务，我们才能追问工作有没有依法完成。
+再回到今天教学设例中的甲。同一件事里有两个不同国家行为：违法拘留造成侵害，依法办理赔偿回应侵害。如果赔偿义务依法履行，它就完成了相应的救济工作；这不会把此前拘留变成合法。若请求未依法处理，需要查清哪个环节违反要求；若赔偿依法履行，也不能因此宣布过去合法或以后不必继续依法履职。题目没有给甲的实际办理结果，具体追责和全面监督不在今天展开。
 9. 逐字讲述
-再回到甲。同一件事里有两个不同国家行为：违法拘留造成侵害，依法办理赔偿回应侵害。后者不会把前者变成合法，却完成应当提供的救济工作。若请求未依法处理，需要查清哪个环节违反要求；若赔偿依法履行，也不能因此宣布过去合法或以后不必继续依法履职。具体追责和全面监督不在今天展开。
-10. 逐字讲述
 所以，这张图的连线表示制度联系，不表示条文自动兑现。宪法确认和约束，普通法律形成具体安排，国家机关据事实与规则履行义务，权利通过相应制度得到依法保障。效力、制度可操作和实际效果有关联，却各需自己的根据。看见现实不足，是继续依法追问的起点，不是抹掉规范；看见明确条文，是工作应有根据，也不是效果已经证明。
 教师备查，不朗读
 本轮回看PDF56、57、58原图，短引标题与组织任务均依原页。通知不是今日个案程序依据，不由其安排推出实施效果。
@@ -2969,7 +2969,7 @@
             <a:r>
               <a:rPr lang="en-US" dirty="0"/>
               <a:t>P03｜先读国家要做什么，再读怎样组织国家
-上节（本节0—45分钟）｜本节约5.7—8.1分钟
+上节（本节0—45分钟）｜本节约5.4—7.9分钟
 默认按页顺讲。页定位为备课估算；最终口读校正与独立活动见同版容量报告，不是教师实测。
 【翻至P03｜先读国家要做什么，再读怎样组织国家】（不朗读）
 1. 逐字讲述
@@ -3287,7 +3287,7 @@
             <a:r>
               <a:rPr lang="en-US" dirty="0"/>
               <a:t>P04｜国家的根本安排，先回答哪些问题？
-上节（本节0—45分钟）｜本节约8.1—11.4分钟
+上节（本节0—45分钟）｜本节约7.9—11.2分钟
 默认按页顺讲。页定位为备课估算；最终口读校正与独立活动见同版容量报告，不是教师实测。
 【翻至P04｜国家的根本安排，先回答哪些问题？】（不朗读）
 1. 逐字讲述
@@ -3396,7 +3396,7 @@
             <a:r>
               <a:rPr lang="en-US" dirty="0"/>
               <a:t>P05｜现在，把“宪法”说完整
-上节（本节0—45分钟）｜本节约11.4—13.4分钟
+上节（本节0—45分钟）｜本节约11.2—13.1分钟
 默认按页顺讲。页定位为备课估算；最终口读校正与独立活动见同版容量报告，不是教师实测。
 【翻至P05｜现在，把“宪法”说完整】（不朗读）
 1. 逐字讲述
@@ -3503,7 +3503,7 @@
             <a:r>
               <a:rPr lang="en-US" dirty="0"/>
               <a:t>P06｜制定法律的人和机关，也处在宪法之内
-上节（本节0—45分钟）｜本节约13.4—17.7分钟
+上节（本节0—45分钟）｜本节约13.1—17.4分钟
 默认按页顺讲。页定位为备课估算；最终口读校正与独立活动见同版容量报告，不是教师实测。
 【翻至P06｜制定法律的人和机关，也处在宪法之内】（不朗读）
 1. 逐字讲述
@@ -3616,7 +3616,7 @@
             <a:r>
               <a:rPr lang="en-US" dirty="0"/>
               <a:t>P07｜“属于人民”，怎样进入国家机构？
-上节（本节0—45分钟）｜本节约17.7—21.5分钟
+上节（本节0—45分钟）｜本节约17.4—20.5分钟
 默认按页顺讲。页定位为备课估算；最终口读校正与独立活动见同版容量报告，不是教师实测。
 【翻至P07｜“属于人民”，怎样进入国家机构？】（不朗读）
 1. 逐字讲述
@@ -3626,10 +3626,8 @@
 3. 逐字讲述
 第2条也没有把人民管理国家和社会事务的方式缩成参加一次选举。它还规定人民依照法律，通过各种途径和形式，管理国家事务、经济和文化事业以及社会事务。本课先认识整体关系，具体制度以后逐一展开。
 4. 逐字讲述
-把这几条按问题分开，关系就更清楚。第二条的“一切权力属于人民”，回答归属；第二条所列行使国家权力的机关，回答通过什么制度行使；第三条的产生、负责、监督，继续回答组织怎样形成、怎样保持责任联系。我们不能用归属一句话替代全部机关安排，也不能只看一张机构图就说人民主权已经解释完了。
+现在把图与条文合起来看：权力的归属，经由机关的产生和持续责任，进入可以依法运行的制度。图把行政、监察、审判、检察机关列在一起，是为了说明它们与人大的共同关系，不表示职权相同。具体哪个机关能作什么、谁领导谁、何种监督怎样进行，第七讲再展开。今天先保住归属、组织和责任之间的联系，不把国家权力的全部活动简化成逐层转交。
 5. 逐字讲述
-图中的行政、监察、审判、检察机关是依第三条作的归纳，今天只看共同关系，并不说它们执行同一种任务。由人大产生，是产生关系；对产生它的人大负责、受监督，是责任关系。哪一个机关具体能作什么，谁领导谁，谁有何种监督职权，不能从一个没有标注的箭头里猜出来，第七讲会继续展开。现在图上能够确定的关系，我们就按照条文说明，不把全部权力活动简化成逐层转交。
-6. 逐字讲述
 民主集中制在这里有实际内容：既有民主选举和监督，也有由相应国家机关依法形成并执行决定的组织安排。不能只记住“集中”，也不能把每个人的个人决定都当作国家决定。权力属于人民，与权力通过制度得到组织，是需要同时说明的两件事。
 教师备查，不朗读
 人大由人民选举产生的直接/间接层级不在本页铺开；图不表示所有人大都由全民直接选举。民主集中制完整内容包括中央地方关系等，留后续。
@@ -3637,8 +3635,8 @@
 仅在本单元开始前采用，替换该单元完整口述，保留原2分钟解释机会；其余单元不变，长短不重复。
 请把第二条与第三条接起来读。第二条先说国家的一切权力属于人民，又规定人民行使国家权力的机关是全国人大和地方各级人大。第三条继续说明民主选举、负责和监督。这几层分别回答权力属于谁、通过什么机关行使、机关怎样形成及保持责任联系，不能用其中一句代替全部解释。
 图中向下箭头只表示产生或组织关系：人大由民主选举产生，相应行政、监察、审判、检察机关由人大产生。负责和监督看右侧文字：人大对人民负责、受人民监督，这些机关对产生它的人大负责、受该人大监督。箭头没有展开直接和间接选举，不能读成所有人大都由全体人民直接选举。
-民主集中制因此不只是记住集中两个字，还包括民主产生、负责监督和依法形成并执行国家决定的组织安排。第二条也保留人民依法通过各种途径和形式管理公共事务，不把人民参与缩成参加一次选举。具体制度以后展开。
-产生与监督也不能只合成一句都同人大有关。前者使机关获得履职的制度位置，后者确立履职中的持续负责监督关系。图上分别写出这些关系，是为了保住不同的主客体和动作，不暗示机关产生后已完成全部责任。
+这些机关有与人大的共同关系，不表示职权相同。具体哪个机关能作什么、谁领导谁、何种监督怎样进行，第七讲再展开。今天保住归属、组织和持续责任的联系，不把全部权力活动简化成逐层转交。
+民主集中制因此不只是记住集中两个字，还包括民主产生、负责监督和依法形成并执行国家决定的组织安排。第二条也保留人民依法通过各种途径和形式管理公共事务，不把人民参与缩成参加一次选举。
 机关依法产生，为什么仍要依法履职？产生确认制度地位，每次行为则要说明职权、条件和依据。只回答机关是依法产生的，尚未证明某项决定正确。第三条在产生之后仍规定负责和监督，正使责任成为持续的制度关系。
 另一项关切必须认真对待：机关需要专业判断和及时行动。让没有相应职责的人重做所有决定，可能妨碍履职。但行动空间不等于免除责任，监督也不等于任何人都能取代机关。监督者同样须依法辨认自己的职权和方式，不能因监督目的正当便免去自身的权限要求。判断、责任与监督各有制度位置，才不至于在信任和任意替代之间二选一。应分别追问：谁依法判断，依据什么，向谁负责，由谁按什么权限监督。专业性说明为何由相应机关办事，不能单独证明每次行为都符合规范。
 负责也不是等某个人被怀疑品质不好才临时加上。机关持续承担任务，就持续处在宪法法律规定的责任关系中；换了任职者，法定责任不会随私人关系消失。具体说明和纠正程序仍由相关制度展开，不能从第三条推出一套适用所有机关的办法。
@@ -3746,7 +3744,7 @@
             <a:r>
               <a:rPr lang="en-US" dirty="0"/>
               <a:t>P08｜机关依法产生，为什么还要依法履职？
-上节（本节0—45分钟）｜本节约21.5—27.4分钟
+上节（本节0—45分钟）｜本节约20.5—26.4分钟
 默认按页顺讲。页定位为备课估算；最终口读校正与独立活动见同版容量报告，不是教师实测。
 【翻至P08｜机关依法产生，为什么还要依法履职？】（不朗读）
 1. 逐字讲述
@@ -3864,7 +3862,7 @@
             <a:r>
               <a:rPr lang="en-US" dirty="0"/>
               <a:t>P09｜党的领导与依法活动，怎样连起来理解？
-上节（本节0—45分钟）｜本节约27.4—30分钟
+上节（本节0—45分钟）｜本节约26.4—28.6分钟
 默认按页顺讲。页定位为备课估算；最终口读校正与独立活动见同版容量报告，不是教师实测。
 【翻至P09｜党的领导与依法活动，怎样连起来理解？】（不朗读）
 1. 逐字讲述
@@ -3872,10 +3870,8 @@
 2. 逐字讲述
 教材解释党的领导时，谈到领导立法、保证执法、支持司法、带头守法，以及在宪法和法律范围内活动。这里的联系是：领导推动国家制度和法律的运行，也通过制度和法律的方式得到体现。不能只看领导地位而漏掉依法活动，也不能把法治理解为与我国根本制度无关的一套技术。
 3. 逐字讲述
-对国家机关而言，具有某项工作任务，还须说明它依据什么权限、按照什么规则履行。法律不是做完工作后再附上的说明，而是组织和开展工作的依据。有关主体共同遵守宪法法律，才使刚才所说的最高效力在权力运行中有具体方向。
+对国家机关而言，具有某项工作任务，还须说明它依据什么权限、按照什么规则履行。法律不是做完工作后再附上的说明，而是组织和开展工作的依据。依法组织和运行，要求规则进入任务形成、职权行使及责任承担之中，最高效力由此在权力运行中有了具体方向。对一项具体措施，仍要看它的法律依据和事实条件；建立这层共同要求，还没有替每个措施完成合法性判断。
 4. 逐字讲述
-社会主义法治也不能压缩成机关已经办完事后有没有找一条规定作解释。依法组织和运行，要求规则进入任务形成、职权行使及责任承担之中。我们在上节先建立这种一般联系，没有据此宣布某项具体措施合法。对具体措施，仍要读其法律依据和事实条件。这个区别以后会不断使用，今天不先把各部门程序铺开。
-5. 逐字讲述
 还有一个问题没有回答：权力依法组织起来，是为了怎样对待生活在其中的人？这就把我们带到第33条。
 教师备查，不朗读
 两段均明确节录；材料B给完整有关款。教材原图印刷94/PDF109。避免把教材解释冒充宪法逐字原文。
@@ -9905,7 +9901,7 @@
                 <a:ea typeface="Microsoft YaHei" pitchFamily="34" charset="-122"/>
                 <a:cs typeface="Microsoft YaHei" pitchFamily="34" charset="-120"/>
               </a:rPr>
-              <a:t>从过渡安排，到持续的共同规则</a:t>
+              <a:t>从过渡安排，到国家制度的展开</a:t>
             </a:r>
             <a:endParaRPr lang="zh-CN" sz="3600" dirty="0"/>
           </a:p>
@@ -11089,7 +11085,7 @@
                 <a:ea typeface="Microsoft YaHei" pitchFamily="34" charset="-122"/>
                 <a:cs typeface="Microsoft YaHei" pitchFamily="34" charset="-120"/>
               </a:rPr>
-              <a:t>仍须完成的制度工作</a:t>
+              <a:t>各自继续完成的工作</a:t>
             </a:r>
             <a:endParaRPr lang="zh-CN" sz="2400" dirty="0"/>
           </a:p>
@@ -11131,7 +11127,7 @@
                 <a:ea typeface="Microsoft YaHei" pitchFamily="34" charset="-122"/>
                 <a:cs typeface="Microsoft YaHei" pitchFamily="34" charset="-120"/>
               </a:rPr>
-              <a:t>依法区分情形、确定义务主体，</a:t>
+              <a:t>普通法律安排情形、主体和办理</a:t>
             </a:r>
             <a:endParaRPr lang="zh-CN" sz="2400" dirty="0"/>
           </a:p>
@@ -11151,7 +11147,27 @@
                 <a:ea typeface="Microsoft YaHei" pitchFamily="34" charset="-122"/>
                 <a:cs typeface="Microsoft YaHei" pitchFamily="34" charset="-120"/>
               </a:rPr>
-              <a:t>并取得核查请求所需的信息。</a:t>
+              <a:t>方式；国家机关依法获取、核实</a:t>
+            </a:r>
+            <a:endParaRPr lang="zh-CN" sz="2400" dirty="0"/>
+          </a:p>
+          <a:p>
+            <a:pPr algn="l" indent="0" marL="0">
+              <a:lnSpc>
+                <a:spcPct val="105000"/>
+              </a:lnSpc>
+              <a:buNone/>
+            </a:pPr>
+            <a:r>
+              <a:rPr lang="zh-CN" altLang="en-US" sz="2400" dirty="0">
+                <a:solidFill>
+                  <a:srgbClr val="2B302F"/>
+                </a:solidFill>
+                <a:latin typeface="Microsoft YaHei" pitchFamily="34" charset="0"/>
+                <a:ea typeface="Microsoft YaHei" pitchFamily="34" charset="-122"/>
+                <a:cs typeface="Microsoft YaHei" pitchFamily="34" charset="-120"/>
+              </a:rPr>
+              <a:t>请求所需的信息。</a:t>
             </a:r>
             <a:endParaRPr lang="zh-CN" sz="2400" dirty="0"/>
           </a:p>
@@ -11193,7 +11209,7 @@
                 <a:ea typeface="Microsoft YaHei" pitchFamily="34" charset="-122"/>
                 <a:cs typeface="Microsoft YaHei" pitchFamily="34" charset="-120"/>
               </a:rPr>
-              <a:t>先回到手中的条文，再解释它们为什么都需要。</a:t>
+              <a:t>宪法约束制度安排；法律确定办法，机关依法办理。</a:t>
             </a:r>
             <a:endParaRPr lang="zh-CN" sz="2400" dirty="0"/>
           </a:p>
@@ -11777,7 +11793,7 @@
                 <a:ea typeface="Microsoft YaHei" pitchFamily="34" charset="-122"/>
                 <a:cs typeface="Microsoft YaHei" pitchFamily="34" charset="-120"/>
               </a:rPr>
-              <a:t>要求解释关系；可以用自己的措辞组织理由。</a:t>
+              <a:t>改变表达和记录方式，仍保留请求、事实与理由。</a:t>
             </a:r>
             <a:endParaRPr lang="zh-CN" sz="2400" dirty="0"/>
           </a:p>
@@ -12061,7 +12077,7 @@
                 <a:ea typeface="Microsoft YaHei" pitchFamily="34" charset="-122"/>
                 <a:cs typeface="Microsoft YaHei" pitchFamily="34" charset="-120"/>
               </a:rPr>
-              <a:t>甲书写申请书确有困难。有人主张：只能拒绝；另有人主张：不必</a:t>
+              <a:t>甲书写申请书确有困难。机关需要可靠的信息；有人因此认为必须</a:t>
             </a:r>
             <a:endParaRPr lang="zh-CN" sz="2600" dirty="0"/>
           </a:p>
@@ -12081,7 +12097,7 @@
                 <a:ea typeface="Microsoft YaHei" pitchFamily="34" charset="-122"/>
                 <a:cs typeface="Microsoft YaHei" pitchFamily="34" charset="-120"/>
               </a:rPr>
-              <a:t>提供事实和理由。</a:t>
+              <a:t>甲本人写，才能保证信息可靠。</a:t>
             </a:r>
             <a:endParaRPr lang="zh-CN" sz="2600" dirty="0"/>
           </a:p>
@@ -12123,7 +12139,7 @@
                 <a:ea typeface="Microsoft YaHei" pitchFamily="34" charset="-122"/>
                 <a:cs typeface="Microsoft YaHei" pitchFamily="34" charset="-120"/>
               </a:rPr>
-              <a:t>用实际条文说明</a:t>
+              <a:t>用第12条解释</a:t>
             </a:r>
             <a:endParaRPr lang="zh-CN" sz="2400" dirty="0"/>
           </a:p>
@@ -12165,7 +12181,7 @@
                 <a:ea typeface="Microsoft YaHei" pitchFamily="34" charset="-122"/>
                 <a:cs typeface="Microsoft YaHei" pitchFamily="34" charset="-120"/>
               </a:rPr>
-              <a:t>第12条怎样提供另一种安排？解决</a:t>
+              <a:t>信息需要能否证明本人书写是唯一方式？代书或口头申请加笔录保</a:t>
             </a:r>
             <a:endParaRPr lang="zh-CN" sz="2600" dirty="0"/>
           </a:p>
@@ -12185,7 +12201,7 @@
                 <a:ea typeface="Microsoft YaHei" pitchFamily="34" charset="-122"/>
                 <a:cs typeface="Microsoft YaHei" pitchFamily="34" charset="-120"/>
               </a:rPr>
-              <a:t>了什么，又没有替我们证明什么？</a:t>
+              <a:t>留什么、改变什么，又未证明什么？</a:t>
             </a:r>
             <a:endParaRPr lang="zh-CN" sz="2600" dirty="0"/>
           </a:p>
